--- a/docs/Sistema Gestor de Finanzas Personales - Diego J. Martín Roldán.pptx
+++ b/docs/Sistema Gestor de Finanzas Personales - Diego J. Martín Roldán.pptx
@@ -3,18 +3,19 @@
 <p:presentation xmlns:a="http://schemas.openxmlformats.org/drawingml/2006/main" xmlns:p="http://schemas.openxmlformats.org/presentationml/2006/main" xmlns:r="http://schemas.openxmlformats.org/officeDocument/2006/relationships" xmlns:p14="http://schemas.microsoft.com/office/powerpoint/2010/main" xmlns:p15="http://schemas.microsoft.com/office/powerpoint/2012/main" xmlns:mc="http://schemas.openxmlformats.org/markup-compatibility/2006">
   <p:sldMasterIdLst>
     <p:sldMasterId id="2147483648" r:id="rId2"/>
+    <p:sldMasterId id="2147483661" r:id="rId3"/>
   </p:sldMasterIdLst>
   <p:sldIdLst>
-    <p:sldId id="256" r:id="rId3"/>
-    <p:sldId id="257" r:id="rId4"/>
-    <p:sldId id="258" r:id="rId5"/>
-    <p:sldId id="259" r:id="rId6"/>
-    <p:sldId id="260" r:id="rId7"/>
-    <p:sldId id="261" r:id="rId8"/>
-    <p:sldId id="262" r:id="rId9"/>
-    <p:sldId id="263" r:id="rId10"/>
-    <p:sldId id="264" r:id="rId11"/>
-    <p:sldId id="265" r:id="rId12"/>
+    <p:sldId id="256" r:id="rId4"/>
+    <p:sldId id="257" r:id="rId5"/>
+    <p:sldId id="258" r:id="rId6"/>
+    <p:sldId id="259" r:id="rId7"/>
+    <p:sldId id="260" r:id="rId8"/>
+    <p:sldId id="261" r:id="rId9"/>
+    <p:sldId id="262" r:id="rId10"/>
+    <p:sldId id="263" r:id="rId11"/>
+    <p:sldId id="264" r:id="rId12"/>
+    <p:sldId id="265" r:id="rId13"/>
   </p:sldIdLst>
   <p:sldSz cx="12192000" cy="6858000"/>
   <p:notesSz cx="7559675" cy="10691813"/>
@@ -45,7 +46,7 @@
             <a:spLocks noGrp="1"/>
           </p:cNvSpPr>
           <p:nvPr>
-            <p:ph type="ftr" idx="2"/>
+            <p:ph type="ftr" idx="1"/>
           </p:nvPr>
         </p:nvSpPr>
         <p:spPr/>
@@ -65,14 +66,14 @@
             <a:spLocks noGrp="1"/>
           </p:cNvSpPr>
           <p:nvPr>
-            <p:ph type="sldNum" idx="3"/>
+            <p:ph type="sldNum" idx="2"/>
           </p:nvPr>
         </p:nvSpPr>
         <p:spPr/>
         <p:txBody>
           <a:bodyPr/>
           <a:p>
-            <a:fld id="{930F090D-3568-41E1-937B-C953769B5986}" type="slidenum">
+            <a:fld id="{465003AD-AA6D-4A27-9F2A-F7A852BEF1A4}" type="slidenum">
               <a:t>&lt;#&gt;</a:t>
             </a:fld>
           </a:p>
@@ -85,7 +86,7 @@
             <a:spLocks noGrp="1"/>
           </p:cNvSpPr>
           <p:nvPr>
-            <p:ph type="dt" idx="1"/>
+            <p:ph type="dt" idx="3"/>
           </p:nvPr>
         </p:nvSpPr>
         <p:spPr/>
@@ -133,8 +134,8 @@
         </p:nvSpPr>
         <p:spPr>
           <a:xfrm>
-            <a:off x="1525680" y="2041560"/>
-            <a:ext cx="9143640" cy="1975320"/>
+            <a:off x="609480" y="273600"/>
+            <a:ext cx="10972440" cy="1144800"/>
           </a:xfrm>
           <a:prstGeom prst="rect">
             <a:avLst/>
@@ -149,11 +150,11 @@
             <a:noAutofit/>
           </a:bodyPr>
           <a:p>
-            <a:endParaRPr b="0" lang="es-ES" sz="1800" spc="-1" strike="noStrike">
-              <a:solidFill>
-                <a:srgbClr val="000000"/>
-              </a:solidFill>
-              <a:latin typeface="Calibri"/>
+            <a:pPr algn="ctr">
+              <a:buNone/>
+            </a:pPr>
+            <a:endParaRPr b="0" lang="en-US" sz="4400" spc="-1" strike="noStrike">
+              <a:latin typeface="Arial"/>
             </a:endParaRPr>
           </a:p>
         </p:txBody>
@@ -170,8 +171,8 @@
         </p:nvSpPr>
         <p:spPr>
           <a:xfrm>
-            <a:off x="0" y="0"/>
-            <a:ext cx="12191760" cy="3270960"/>
+            <a:off x="609480" y="1604520"/>
+            <a:ext cx="10972440" cy="1896840"/>
           </a:xfrm>
           <a:prstGeom prst="rect">
             <a:avLst/>
@@ -186,20 +187,8 @@
             <a:normAutofit/>
           </a:bodyPr>
           <a:p>
-            <a:pPr>
-              <a:lnSpc>
-                <a:spcPct val="90000"/>
-              </a:lnSpc>
-              <a:spcBef>
-                <a:spcPts val="1417"/>
-              </a:spcBef>
-              <a:buNone/>
-            </a:pPr>
-            <a:endParaRPr b="0" lang="es-ES" sz="2800" spc="-1" strike="noStrike">
-              <a:solidFill>
-                <a:srgbClr val="000000"/>
-              </a:solidFill>
-              <a:latin typeface="Calibri"/>
+            <a:endParaRPr b="0" lang="en-US" sz="3200" spc="-1" strike="noStrike">
+              <a:latin typeface="Arial"/>
             </a:endParaRPr>
           </a:p>
         </p:txBody>
@@ -216,8 +205,8 @@
         </p:nvSpPr>
         <p:spPr>
           <a:xfrm>
-            <a:off x="0" y="3582000"/>
-            <a:ext cx="12191760" cy="3270960"/>
+            <a:off x="609480" y="3682080"/>
+            <a:ext cx="10972440" cy="1896840"/>
           </a:xfrm>
           <a:prstGeom prst="rect">
             <a:avLst/>
@@ -232,20 +221,8 @@
             <a:normAutofit/>
           </a:bodyPr>
           <a:p>
-            <a:pPr>
-              <a:lnSpc>
-                <a:spcPct val="90000"/>
-              </a:lnSpc>
-              <a:spcBef>
-                <a:spcPts val="1417"/>
-              </a:spcBef>
-              <a:buNone/>
-            </a:pPr>
-            <a:endParaRPr b="0" lang="es-ES" sz="2800" spc="-1" strike="noStrike">
-              <a:solidFill>
-                <a:srgbClr val="000000"/>
-              </a:solidFill>
-              <a:latin typeface="Calibri"/>
+            <a:endParaRPr b="0" lang="en-US" sz="3200" spc="-1" strike="noStrike">
+              <a:latin typeface="Arial"/>
             </a:endParaRPr>
           </a:p>
         </p:txBody>
@@ -257,7 +234,7 @@
             <a:spLocks noGrp="1"/>
           </p:cNvSpPr>
           <p:nvPr>
-            <p:ph type="ftr" idx="2"/>
+            <p:ph type="ftr" idx="1"/>
           </p:nvPr>
         </p:nvSpPr>
         <p:spPr/>
@@ -277,14 +254,14 @@
             <a:spLocks noGrp="1"/>
           </p:cNvSpPr>
           <p:nvPr>
-            <p:ph type="sldNum" idx="3"/>
+            <p:ph type="sldNum" idx="2"/>
           </p:nvPr>
         </p:nvSpPr>
         <p:spPr/>
         <p:txBody>
           <a:bodyPr/>
           <a:p>
-            <a:fld id="{3140DE18-07FA-4044-9F33-6D39A9E4C191}" type="slidenum">
+            <a:fld id="{E0EFBB7B-61C8-494B-8660-E5C53B3E0AD9}" type="slidenum">
               <a:t>&lt;#&gt;</a:t>
             </a:fld>
           </a:p>
@@ -297,7 +274,7 @@
             <a:spLocks noGrp="1"/>
           </p:cNvSpPr>
           <p:nvPr>
-            <p:ph type="dt" idx="1"/>
+            <p:ph type="dt" idx="3"/>
           </p:nvPr>
         </p:nvSpPr>
         <p:spPr/>
@@ -345,8 +322,8 @@
         </p:nvSpPr>
         <p:spPr>
           <a:xfrm>
-            <a:off x="1525680" y="2041560"/>
-            <a:ext cx="9143640" cy="1975320"/>
+            <a:off x="609480" y="273600"/>
+            <a:ext cx="10972440" cy="1144800"/>
           </a:xfrm>
           <a:prstGeom prst="rect">
             <a:avLst/>
@@ -361,11 +338,11 @@
             <a:noAutofit/>
           </a:bodyPr>
           <a:p>
-            <a:endParaRPr b="0" lang="es-ES" sz="1800" spc="-1" strike="noStrike">
-              <a:solidFill>
-                <a:srgbClr val="000000"/>
-              </a:solidFill>
-              <a:latin typeface="Calibri"/>
+            <a:pPr algn="ctr">
+              <a:buNone/>
+            </a:pPr>
+            <a:endParaRPr b="0" lang="en-US" sz="4400" spc="-1" strike="noStrike">
+              <a:latin typeface="Arial"/>
             </a:endParaRPr>
           </a:p>
         </p:txBody>
@@ -382,8 +359,8 @@
         </p:nvSpPr>
         <p:spPr>
           <a:xfrm>
-            <a:off x="0" y="0"/>
-            <a:ext cx="5949360" cy="3270960"/>
+            <a:off x="609480" y="1604520"/>
+            <a:ext cx="5354280" cy="1896840"/>
           </a:xfrm>
           <a:prstGeom prst="rect">
             <a:avLst/>
@@ -398,20 +375,8 @@
             <a:normAutofit/>
           </a:bodyPr>
           <a:p>
-            <a:pPr>
-              <a:lnSpc>
-                <a:spcPct val="90000"/>
-              </a:lnSpc>
-              <a:spcBef>
-                <a:spcPts val="1417"/>
-              </a:spcBef>
-              <a:buNone/>
-            </a:pPr>
-            <a:endParaRPr b="0" lang="es-ES" sz="2800" spc="-1" strike="noStrike">
-              <a:solidFill>
-                <a:srgbClr val="000000"/>
-              </a:solidFill>
-              <a:latin typeface="Calibri"/>
+            <a:endParaRPr b="0" lang="en-US" sz="3200" spc="-1" strike="noStrike">
+              <a:latin typeface="Arial"/>
             </a:endParaRPr>
           </a:p>
         </p:txBody>
@@ -428,8 +393,8 @@
         </p:nvSpPr>
         <p:spPr>
           <a:xfrm>
-            <a:off x="6247080" y="0"/>
-            <a:ext cx="5949360" cy="3270960"/>
+            <a:off x="6231960" y="1604520"/>
+            <a:ext cx="5354280" cy="1896840"/>
           </a:xfrm>
           <a:prstGeom prst="rect">
             <a:avLst/>
@@ -444,20 +409,8 @@
             <a:normAutofit/>
           </a:bodyPr>
           <a:p>
-            <a:pPr>
-              <a:lnSpc>
-                <a:spcPct val="90000"/>
-              </a:lnSpc>
-              <a:spcBef>
-                <a:spcPts val="1417"/>
-              </a:spcBef>
-              <a:buNone/>
-            </a:pPr>
-            <a:endParaRPr b="0" lang="es-ES" sz="2800" spc="-1" strike="noStrike">
-              <a:solidFill>
-                <a:srgbClr val="000000"/>
-              </a:solidFill>
-              <a:latin typeface="Calibri"/>
+            <a:endParaRPr b="0" lang="en-US" sz="3200" spc="-1" strike="noStrike">
+              <a:latin typeface="Arial"/>
             </a:endParaRPr>
           </a:p>
         </p:txBody>
@@ -474,8 +427,8 @@
         </p:nvSpPr>
         <p:spPr>
           <a:xfrm>
-            <a:off x="0" y="3582000"/>
-            <a:ext cx="5949360" cy="3270960"/>
+            <a:off x="609480" y="3682080"/>
+            <a:ext cx="5354280" cy="1896840"/>
           </a:xfrm>
           <a:prstGeom prst="rect">
             <a:avLst/>
@@ -490,20 +443,8 @@
             <a:normAutofit/>
           </a:bodyPr>
           <a:p>
-            <a:pPr>
-              <a:lnSpc>
-                <a:spcPct val="90000"/>
-              </a:lnSpc>
-              <a:spcBef>
-                <a:spcPts val="1417"/>
-              </a:spcBef>
-              <a:buNone/>
-            </a:pPr>
-            <a:endParaRPr b="0" lang="es-ES" sz="2800" spc="-1" strike="noStrike">
-              <a:solidFill>
-                <a:srgbClr val="000000"/>
-              </a:solidFill>
-              <a:latin typeface="Calibri"/>
+            <a:endParaRPr b="0" lang="en-US" sz="3200" spc="-1" strike="noStrike">
+              <a:latin typeface="Arial"/>
             </a:endParaRPr>
           </a:p>
         </p:txBody>
@@ -520,8 +461,8 @@
         </p:nvSpPr>
         <p:spPr>
           <a:xfrm>
-            <a:off x="6247080" y="3582000"/>
-            <a:ext cx="5949360" cy="3270960"/>
+            <a:off x="6231960" y="3682080"/>
+            <a:ext cx="5354280" cy="1896840"/>
           </a:xfrm>
           <a:prstGeom prst="rect">
             <a:avLst/>
@@ -536,20 +477,8 @@
             <a:normAutofit/>
           </a:bodyPr>
           <a:p>
-            <a:pPr>
-              <a:lnSpc>
-                <a:spcPct val="90000"/>
-              </a:lnSpc>
-              <a:spcBef>
-                <a:spcPts val="1417"/>
-              </a:spcBef>
-              <a:buNone/>
-            </a:pPr>
-            <a:endParaRPr b="0" lang="es-ES" sz="2800" spc="-1" strike="noStrike">
-              <a:solidFill>
-                <a:srgbClr val="000000"/>
-              </a:solidFill>
-              <a:latin typeface="Calibri"/>
+            <a:endParaRPr b="0" lang="en-US" sz="3200" spc="-1" strike="noStrike">
+              <a:latin typeface="Arial"/>
             </a:endParaRPr>
           </a:p>
         </p:txBody>
@@ -561,7 +490,7 @@
             <a:spLocks noGrp="1"/>
           </p:cNvSpPr>
           <p:nvPr>
-            <p:ph type="ftr" idx="2"/>
+            <p:ph type="ftr" idx="1"/>
           </p:nvPr>
         </p:nvSpPr>
         <p:spPr/>
@@ -581,14 +510,14 @@
             <a:spLocks noGrp="1"/>
           </p:cNvSpPr>
           <p:nvPr>
-            <p:ph type="sldNum" idx="3"/>
+            <p:ph type="sldNum" idx="2"/>
           </p:nvPr>
         </p:nvSpPr>
         <p:spPr/>
         <p:txBody>
           <a:bodyPr/>
           <a:p>
-            <a:fld id="{82A7B83D-CA2E-4BF8-94C2-A0056BB97E03}" type="slidenum">
+            <a:fld id="{DB7DB2B7-FBE1-4D7B-B6E7-725BAD9696CC}" type="slidenum">
               <a:t>&lt;#&gt;</a:t>
             </a:fld>
           </a:p>
@@ -601,7 +530,7 @@
             <a:spLocks noGrp="1"/>
           </p:cNvSpPr>
           <p:nvPr>
-            <p:ph type="dt" idx="1"/>
+            <p:ph type="dt" idx="3"/>
           </p:nvPr>
         </p:nvSpPr>
         <p:spPr/>
@@ -649,8 +578,8 @@
         </p:nvSpPr>
         <p:spPr>
           <a:xfrm>
-            <a:off x="1525680" y="2041560"/>
-            <a:ext cx="9143640" cy="1975320"/>
+            <a:off x="609480" y="273600"/>
+            <a:ext cx="10972440" cy="1144800"/>
           </a:xfrm>
           <a:prstGeom prst="rect">
             <a:avLst/>
@@ -665,11 +594,11 @@
             <a:noAutofit/>
           </a:bodyPr>
           <a:p>
-            <a:endParaRPr b="0" lang="es-ES" sz="1800" spc="-1" strike="noStrike">
-              <a:solidFill>
-                <a:srgbClr val="000000"/>
-              </a:solidFill>
-              <a:latin typeface="Calibri"/>
+            <a:pPr algn="ctr">
+              <a:buNone/>
+            </a:pPr>
+            <a:endParaRPr b="0" lang="en-US" sz="4400" spc="-1" strike="noStrike">
+              <a:latin typeface="Arial"/>
             </a:endParaRPr>
           </a:p>
         </p:txBody>
@@ -686,8 +615,8 @@
         </p:nvSpPr>
         <p:spPr>
           <a:xfrm>
-            <a:off x="0" y="0"/>
-            <a:ext cx="3925440" cy="3270960"/>
+            <a:off x="609480" y="1604520"/>
+            <a:ext cx="3533040" cy="1896840"/>
           </a:xfrm>
           <a:prstGeom prst="rect">
             <a:avLst/>
@@ -702,20 +631,8 @@
             <a:normAutofit/>
           </a:bodyPr>
           <a:p>
-            <a:pPr>
-              <a:lnSpc>
-                <a:spcPct val="90000"/>
-              </a:lnSpc>
-              <a:spcBef>
-                <a:spcPts val="1417"/>
-              </a:spcBef>
-              <a:buNone/>
-            </a:pPr>
-            <a:endParaRPr b="0" lang="es-ES" sz="2800" spc="-1" strike="noStrike">
-              <a:solidFill>
-                <a:srgbClr val="000000"/>
-              </a:solidFill>
-              <a:latin typeface="Calibri"/>
+            <a:endParaRPr b="0" lang="en-US" sz="3200" spc="-1" strike="noStrike">
+              <a:latin typeface="Arial"/>
             </a:endParaRPr>
           </a:p>
         </p:txBody>
@@ -732,8 +649,8 @@
         </p:nvSpPr>
         <p:spPr>
           <a:xfrm>
-            <a:off x="4122000" y="0"/>
-            <a:ext cx="3925440" cy="3270960"/>
+            <a:off x="4319640" y="1604520"/>
+            <a:ext cx="3533040" cy="1896840"/>
           </a:xfrm>
           <a:prstGeom prst="rect">
             <a:avLst/>
@@ -748,20 +665,8 @@
             <a:normAutofit/>
           </a:bodyPr>
           <a:p>
-            <a:pPr>
-              <a:lnSpc>
-                <a:spcPct val="90000"/>
-              </a:lnSpc>
-              <a:spcBef>
-                <a:spcPts val="1417"/>
-              </a:spcBef>
-              <a:buNone/>
-            </a:pPr>
-            <a:endParaRPr b="0" lang="es-ES" sz="2800" spc="-1" strike="noStrike">
-              <a:solidFill>
-                <a:srgbClr val="000000"/>
-              </a:solidFill>
-              <a:latin typeface="Calibri"/>
+            <a:endParaRPr b="0" lang="en-US" sz="3200" spc="-1" strike="noStrike">
+              <a:latin typeface="Arial"/>
             </a:endParaRPr>
           </a:p>
         </p:txBody>
@@ -778,8 +683,8 @@
         </p:nvSpPr>
         <p:spPr>
           <a:xfrm>
-            <a:off x="8244360" y="0"/>
-            <a:ext cx="3925440" cy="3270960"/>
+            <a:off x="8029800" y="1604520"/>
+            <a:ext cx="3533040" cy="1896840"/>
           </a:xfrm>
           <a:prstGeom prst="rect">
             <a:avLst/>
@@ -794,20 +699,8 @@
             <a:normAutofit/>
           </a:bodyPr>
           <a:p>
-            <a:pPr>
-              <a:lnSpc>
-                <a:spcPct val="90000"/>
-              </a:lnSpc>
-              <a:spcBef>
-                <a:spcPts val="1417"/>
-              </a:spcBef>
-              <a:buNone/>
-            </a:pPr>
-            <a:endParaRPr b="0" lang="es-ES" sz="2800" spc="-1" strike="noStrike">
-              <a:solidFill>
-                <a:srgbClr val="000000"/>
-              </a:solidFill>
-              <a:latin typeface="Calibri"/>
+            <a:endParaRPr b="0" lang="en-US" sz="3200" spc="-1" strike="noStrike">
+              <a:latin typeface="Arial"/>
             </a:endParaRPr>
           </a:p>
         </p:txBody>
@@ -824,8 +717,8 @@
         </p:nvSpPr>
         <p:spPr>
           <a:xfrm>
-            <a:off x="0" y="3582000"/>
-            <a:ext cx="3925440" cy="3270960"/>
+            <a:off x="609480" y="3682080"/>
+            <a:ext cx="3533040" cy="1896840"/>
           </a:xfrm>
           <a:prstGeom prst="rect">
             <a:avLst/>
@@ -840,20 +733,8 @@
             <a:normAutofit/>
           </a:bodyPr>
           <a:p>
-            <a:pPr>
-              <a:lnSpc>
-                <a:spcPct val="90000"/>
-              </a:lnSpc>
-              <a:spcBef>
-                <a:spcPts val="1417"/>
-              </a:spcBef>
-              <a:buNone/>
-            </a:pPr>
-            <a:endParaRPr b="0" lang="es-ES" sz="2800" spc="-1" strike="noStrike">
-              <a:solidFill>
-                <a:srgbClr val="000000"/>
-              </a:solidFill>
-              <a:latin typeface="Calibri"/>
+            <a:endParaRPr b="0" lang="en-US" sz="3200" spc="-1" strike="noStrike">
+              <a:latin typeface="Arial"/>
             </a:endParaRPr>
           </a:p>
         </p:txBody>
@@ -870,8 +751,8 @@
         </p:nvSpPr>
         <p:spPr>
           <a:xfrm>
-            <a:off x="4122000" y="3582000"/>
-            <a:ext cx="3925440" cy="3270960"/>
+            <a:off x="4319640" y="3682080"/>
+            <a:ext cx="3533040" cy="1896840"/>
           </a:xfrm>
           <a:prstGeom prst="rect">
             <a:avLst/>
@@ -886,20 +767,8 @@
             <a:normAutofit/>
           </a:bodyPr>
           <a:p>
-            <a:pPr>
-              <a:lnSpc>
-                <a:spcPct val="90000"/>
-              </a:lnSpc>
-              <a:spcBef>
-                <a:spcPts val="1417"/>
-              </a:spcBef>
-              <a:buNone/>
-            </a:pPr>
-            <a:endParaRPr b="0" lang="es-ES" sz="2800" spc="-1" strike="noStrike">
-              <a:solidFill>
-                <a:srgbClr val="000000"/>
-              </a:solidFill>
-              <a:latin typeface="Calibri"/>
+            <a:endParaRPr b="0" lang="en-US" sz="3200" spc="-1" strike="noStrike">
+              <a:latin typeface="Arial"/>
             </a:endParaRPr>
           </a:p>
         </p:txBody>
@@ -916,8 +785,8 @@
         </p:nvSpPr>
         <p:spPr>
           <a:xfrm>
-            <a:off x="8244360" y="3582000"/>
-            <a:ext cx="3925440" cy="3270960"/>
+            <a:off x="8029800" y="3682080"/>
+            <a:ext cx="3533040" cy="1896840"/>
           </a:xfrm>
           <a:prstGeom prst="rect">
             <a:avLst/>
@@ -932,20 +801,8 @@
             <a:normAutofit/>
           </a:bodyPr>
           <a:p>
-            <a:pPr>
-              <a:lnSpc>
-                <a:spcPct val="90000"/>
-              </a:lnSpc>
-              <a:spcBef>
-                <a:spcPts val="1417"/>
-              </a:spcBef>
-              <a:buNone/>
-            </a:pPr>
-            <a:endParaRPr b="0" lang="es-ES" sz="2800" spc="-1" strike="noStrike">
-              <a:solidFill>
-                <a:srgbClr val="000000"/>
-              </a:solidFill>
-              <a:latin typeface="Calibri"/>
+            <a:endParaRPr b="0" lang="en-US" sz="3200" spc="-1" strike="noStrike">
+              <a:latin typeface="Arial"/>
             </a:endParaRPr>
           </a:p>
         </p:txBody>
@@ -957,7 +814,7 @@
             <a:spLocks noGrp="1"/>
           </p:cNvSpPr>
           <p:nvPr>
-            <p:ph type="ftr" idx="2"/>
+            <p:ph type="ftr" idx="1"/>
           </p:nvPr>
         </p:nvSpPr>
         <p:spPr/>
@@ -977,14 +834,14 @@
             <a:spLocks noGrp="1"/>
           </p:cNvSpPr>
           <p:nvPr>
-            <p:ph type="sldNum" idx="3"/>
+            <p:ph type="sldNum" idx="2"/>
           </p:nvPr>
         </p:nvSpPr>
         <p:spPr/>
         <p:txBody>
           <a:bodyPr/>
           <a:p>
-            <a:fld id="{E661881C-076D-447A-AB32-5E064457A0F0}" type="slidenum">
+            <a:fld id="{1F027D3C-FB4E-4BFE-AD1B-0E40CBD2B31E}" type="slidenum">
               <a:t>&lt;#&gt;</a:t>
             </a:fld>
           </a:p>
@@ -997,7 +854,1051 @@
             <a:spLocks noGrp="1"/>
           </p:cNvSpPr>
           <p:nvPr>
-            <p:ph type="dt" idx="1"/>
+            <p:ph type="dt" idx="3"/>
+          </p:nvPr>
+        </p:nvSpPr>
+        <p:spPr/>
+        <p:txBody>
+          <a:bodyPr/>
+          <a:p>
+            <a:r>
+              <a:rPr lang="en-US"/>
+              <a:t/>
+            </a:r>
+          </a:p>
+        </p:txBody>
+      </p:sp>
+    </p:spTree>
+  </p:cSld>
+</p:sldLayout>
+</file>
+
+<file path=ppt/slideLayouts/slideLayout13.xml><?xml version="1.0" encoding="utf-8"?>
+<p:sldLayout xmlns:a="http://schemas.openxmlformats.org/drawingml/2006/main" xmlns:p="http://schemas.openxmlformats.org/presentationml/2006/main" xmlns:r="http://schemas.openxmlformats.org/officeDocument/2006/relationships" xmlns:p14="http://schemas.microsoft.com/office/powerpoint/2010/main" xmlns:p15="http://schemas.microsoft.com/office/powerpoint/2012/main" xmlns:mc="http://schemas.openxmlformats.org/markup-compatibility/2006" type="blank" preserve="1">
+  <p:cSld name="Blank Slide">
+    <p:spTree>
+      <p:nvGrpSpPr>
+        <p:cNvPr id="1" name=""/>
+        <p:cNvGrpSpPr/>
+        <p:nvPr/>
+      </p:nvGrpSpPr>
+      <p:grpSpPr>
+        <a:xfrm>
+          <a:off x="0" y="0"/>
+          <a:ext cx="0" cy="0"/>
+          <a:chOff x="0" y="0"/>
+          <a:chExt cx="0" cy="0"/>
+        </a:xfrm>
+      </p:grpSpPr>
+      <p:sp>
+        <p:nvSpPr>
+          <p:cNvPr id="2" name="PlaceHolder 1"/>
+          <p:cNvSpPr>
+            <a:spLocks noGrp="1"/>
+          </p:cNvSpPr>
+          <p:nvPr>
+            <p:ph type="ftr" idx="4"/>
+          </p:nvPr>
+        </p:nvSpPr>
+        <p:spPr/>
+        <p:txBody>
+          <a:bodyPr/>
+          <a:p>
+            <a:r>
+              <a:t>Footer</a:t>
+            </a:r>
+          </a:p>
+        </p:txBody>
+      </p:sp>
+      <p:sp>
+        <p:nvSpPr>
+          <p:cNvPr id="3" name="PlaceHolder 2"/>
+          <p:cNvSpPr>
+            <a:spLocks noGrp="1"/>
+          </p:cNvSpPr>
+          <p:nvPr>
+            <p:ph type="sldNum" idx="5"/>
+          </p:nvPr>
+        </p:nvSpPr>
+        <p:spPr/>
+        <p:txBody>
+          <a:bodyPr/>
+          <a:p>
+            <a:fld id="{EE189EAC-00E5-42BD-A239-F80AE8F8DB9A}" type="slidenum">
+              <a:t>&lt;#&gt;</a:t>
+            </a:fld>
+          </a:p>
+        </p:txBody>
+      </p:sp>
+      <p:sp>
+        <p:nvSpPr>
+          <p:cNvPr id="4" name="PlaceHolder 3"/>
+          <p:cNvSpPr>
+            <a:spLocks noGrp="1"/>
+          </p:cNvSpPr>
+          <p:nvPr>
+            <p:ph type="dt" idx="6"/>
+          </p:nvPr>
+        </p:nvSpPr>
+        <p:spPr/>
+        <p:txBody>
+          <a:bodyPr/>
+          <a:p>
+            <a:r>
+              <a:rPr lang="en-US"/>
+              <a:t/>
+            </a:r>
+          </a:p>
+        </p:txBody>
+      </p:sp>
+    </p:spTree>
+  </p:cSld>
+</p:sldLayout>
+</file>
+
+<file path=ppt/slideLayouts/slideLayout14.xml><?xml version="1.0" encoding="utf-8"?>
+<p:sldLayout xmlns:a="http://schemas.openxmlformats.org/drawingml/2006/main" xmlns:p="http://schemas.openxmlformats.org/presentationml/2006/main" xmlns:r="http://schemas.openxmlformats.org/officeDocument/2006/relationships" xmlns:p14="http://schemas.microsoft.com/office/powerpoint/2010/main" xmlns:p15="http://schemas.microsoft.com/office/powerpoint/2012/main" xmlns:mc="http://schemas.openxmlformats.org/markup-compatibility/2006" type="tx" preserve="1">
+  <p:cSld name="Title Slide">
+    <p:spTree>
+      <p:nvGrpSpPr>
+        <p:cNvPr id="1" name=""/>
+        <p:cNvGrpSpPr/>
+        <p:nvPr/>
+      </p:nvGrpSpPr>
+      <p:grpSpPr>
+        <a:xfrm>
+          <a:off x="0" y="0"/>
+          <a:ext cx="0" cy="0"/>
+          <a:chOff x="0" y="0"/>
+          <a:chExt cx="0" cy="0"/>
+        </a:xfrm>
+      </p:grpSpPr>
+      <p:sp>
+        <p:nvSpPr>
+          <p:cNvPr id="48" name="PlaceHolder 1"/>
+          <p:cNvSpPr>
+            <a:spLocks noGrp="1"/>
+          </p:cNvSpPr>
+          <p:nvPr>
+            <p:ph type="title"/>
+          </p:nvPr>
+        </p:nvSpPr>
+        <p:spPr>
+          <a:xfrm>
+            <a:off x="609480" y="273600"/>
+            <a:ext cx="10972440" cy="1144800"/>
+          </a:xfrm>
+          <a:prstGeom prst="rect">
+            <a:avLst/>
+          </a:prstGeom>
+          <a:noFill/>
+          <a:ln w="0">
+            <a:noFill/>
+          </a:ln>
+        </p:spPr>
+        <p:txBody>
+          <a:bodyPr lIns="0" rIns="0" tIns="0" bIns="0" anchor="ctr">
+            <a:noAutofit/>
+          </a:bodyPr>
+          <a:p>
+            <a:pPr algn="ctr">
+              <a:buNone/>
+            </a:pPr>
+            <a:endParaRPr b="0" lang="en-US" sz="4400" spc="-1" strike="noStrike">
+              <a:latin typeface="Arial"/>
+            </a:endParaRPr>
+          </a:p>
+        </p:txBody>
+      </p:sp>
+      <p:sp>
+        <p:nvSpPr>
+          <p:cNvPr id="49" name="PlaceHolder 2"/>
+          <p:cNvSpPr>
+            <a:spLocks noGrp="1"/>
+          </p:cNvSpPr>
+          <p:nvPr>
+            <p:ph type="subTitle"/>
+          </p:nvPr>
+        </p:nvSpPr>
+        <p:spPr>
+          <a:xfrm>
+            <a:off x="609480" y="1604520"/>
+            <a:ext cx="10972440" cy="3977280"/>
+          </a:xfrm>
+          <a:prstGeom prst="rect">
+            <a:avLst/>
+          </a:prstGeom>
+          <a:noFill/>
+          <a:ln w="0">
+            <a:noFill/>
+          </a:ln>
+        </p:spPr>
+        <p:txBody>
+          <a:bodyPr lIns="0" rIns="0" tIns="0" bIns="0" anchor="ctr">
+            <a:noAutofit/>
+          </a:bodyPr>
+          <a:p>
+            <a:pPr algn="ctr">
+              <a:buNone/>
+            </a:pPr>
+            <a:endParaRPr b="0" lang="en-US" sz="3200" spc="-1" strike="noStrike">
+              <a:latin typeface="Arial"/>
+            </a:endParaRPr>
+          </a:p>
+        </p:txBody>
+      </p:sp>
+      <p:sp>
+        <p:nvSpPr>
+          <p:cNvPr id="4" name="PlaceHolder 3"/>
+          <p:cNvSpPr>
+            <a:spLocks noGrp="1"/>
+          </p:cNvSpPr>
+          <p:nvPr>
+            <p:ph type="ftr" idx="4"/>
+          </p:nvPr>
+        </p:nvSpPr>
+        <p:spPr/>
+        <p:txBody>
+          <a:bodyPr/>
+          <a:p>
+            <a:r>
+              <a:t>Footer</a:t>
+            </a:r>
+          </a:p>
+        </p:txBody>
+      </p:sp>
+      <p:sp>
+        <p:nvSpPr>
+          <p:cNvPr id="5" name="PlaceHolder 4"/>
+          <p:cNvSpPr>
+            <a:spLocks noGrp="1"/>
+          </p:cNvSpPr>
+          <p:nvPr>
+            <p:ph type="sldNum" idx="5"/>
+          </p:nvPr>
+        </p:nvSpPr>
+        <p:spPr/>
+        <p:txBody>
+          <a:bodyPr/>
+          <a:p>
+            <a:fld id="{AE5596E2-31EE-409A-A057-7B0EEAC8E38B}" type="slidenum">
+              <a:t>&lt;#&gt;</a:t>
+            </a:fld>
+          </a:p>
+        </p:txBody>
+      </p:sp>
+      <p:sp>
+        <p:nvSpPr>
+          <p:cNvPr id="6" name="PlaceHolder 5"/>
+          <p:cNvSpPr>
+            <a:spLocks noGrp="1"/>
+          </p:cNvSpPr>
+          <p:nvPr>
+            <p:ph type="dt" idx="6"/>
+          </p:nvPr>
+        </p:nvSpPr>
+        <p:spPr/>
+        <p:txBody>
+          <a:bodyPr/>
+          <a:p>
+            <a:r>
+              <a:rPr lang="en-US"/>
+              <a:t/>
+            </a:r>
+          </a:p>
+        </p:txBody>
+      </p:sp>
+    </p:spTree>
+  </p:cSld>
+</p:sldLayout>
+</file>
+
+<file path=ppt/slideLayouts/slideLayout15.xml><?xml version="1.0" encoding="utf-8"?>
+<p:sldLayout xmlns:a="http://schemas.openxmlformats.org/drawingml/2006/main" xmlns:p="http://schemas.openxmlformats.org/presentationml/2006/main" xmlns:r="http://schemas.openxmlformats.org/officeDocument/2006/relationships" xmlns:p14="http://schemas.microsoft.com/office/powerpoint/2010/main" xmlns:p15="http://schemas.microsoft.com/office/powerpoint/2012/main" xmlns:mc="http://schemas.openxmlformats.org/markup-compatibility/2006" type="obj" preserve="1">
+  <p:cSld name="Title, Content">
+    <p:spTree>
+      <p:nvGrpSpPr>
+        <p:cNvPr id="1" name=""/>
+        <p:cNvGrpSpPr/>
+        <p:nvPr/>
+      </p:nvGrpSpPr>
+      <p:grpSpPr>
+        <a:xfrm>
+          <a:off x="0" y="0"/>
+          <a:ext cx="0" cy="0"/>
+          <a:chOff x="0" y="0"/>
+          <a:chExt cx="0" cy="0"/>
+        </a:xfrm>
+      </p:grpSpPr>
+      <p:sp>
+        <p:nvSpPr>
+          <p:cNvPr id="50" name="PlaceHolder 1"/>
+          <p:cNvSpPr>
+            <a:spLocks noGrp="1"/>
+          </p:cNvSpPr>
+          <p:nvPr>
+            <p:ph type="title"/>
+          </p:nvPr>
+        </p:nvSpPr>
+        <p:spPr>
+          <a:xfrm>
+            <a:off x="609480" y="273600"/>
+            <a:ext cx="10972440" cy="1144800"/>
+          </a:xfrm>
+          <a:prstGeom prst="rect">
+            <a:avLst/>
+          </a:prstGeom>
+          <a:noFill/>
+          <a:ln w="0">
+            <a:noFill/>
+          </a:ln>
+        </p:spPr>
+        <p:txBody>
+          <a:bodyPr lIns="0" rIns="0" tIns="0" bIns="0" anchor="ctr">
+            <a:noAutofit/>
+          </a:bodyPr>
+          <a:p>
+            <a:pPr algn="ctr">
+              <a:buNone/>
+            </a:pPr>
+            <a:endParaRPr b="0" lang="en-US" sz="4400" spc="-1" strike="noStrike">
+              <a:latin typeface="Arial"/>
+            </a:endParaRPr>
+          </a:p>
+        </p:txBody>
+      </p:sp>
+      <p:sp>
+        <p:nvSpPr>
+          <p:cNvPr id="51" name="PlaceHolder 2"/>
+          <p:cNvSpPr>
+            <a:spLocks noGrp="1"/>
+          </p:cNvSpPr>
+          <p:nvPr>
+            <p:ph/>
+          </p:nvPr>
+        </p:nvSpPr>
+        <p:spPr>
+          <a:xfrm>
+            <a:off x="609480" y="1604520"/>
+            <a:ext cx="10972440" cy="3977280"/>
+          </a:xfrm>
+          <a:prstGeom prst="rect">
+            <a:avLst/>
+          </a:prstGeom>
+          <a:noFill/>
+          <a:ln w="0">
+            <a:noFill/>
+          </a:ln>
+        </p:spPr>
+        <p:txBody>
+          <a:bodyPr lIns="0" rIns="0" tIns="0" bIns="0" anchor="t">
+            <a:normAutofit/>
+          </a:bodyPr>
+          <a:p>
+            <a:endParaRPr b="0" lang="en-US" sz="3200" spc="-1" strike="noStrike">
+              <a:latin typeface="Arial"/>
+            </a:endParaRPr>
+          </a:p>
+        </p:txBody>
+      </p:sp>
+      <p:sp>
+        <p:nvSpPr>
+          <p:cNvPr id="4" name="PlaceHolder 3"/>
+          <p:cNvSpPr>
+            <a:spLocks noGrp="1"/>
+          </p:cNvSpPr>
+          <p:nvPr>
+            <p:ph type="ftr" idx="4"/>
+          </p:nvPr>
+        </p:nvSpPr>
+        <p:spPr/>
+        <p:txBody>
+          <a:bodyPr/>
+          <a:p>
+            <a:r>
+              <a:t>Footer</a:t>
+            </a:r>
+          </a:p>
+        </p:txBody>
+      </p:sp>
+      <p:sp>
+        <p:nvSpPr>
+          <p:cNvPr id="5" name="PlaceHolder 4"/>
+          <p:cNvSpPr>
+            <a:spLocks noGrp="1"/>
+          </p:cNvSpPr>
+          <p:nvPr>
+            <p:ph type="sldNum" idx="5"/>
+          </p:nvPr>
+        </p:nvSpPr>
+        <p:spPr/>
+        <p:txBody>
+          <a:bodyPr/>
+          <a:p>
+            <a:fld id="{9A7B0C0F-2717-4885-A4BC-C11727EAB233}" type="slidenum">
+              <a:t>&lt;#&gt;</a:t>
+            </a:fld>
+          </a:p>
+        </p:txBody>
+      </p:sp>
+      <p:sp>
+        <p:nvSpPr>
+          <p:cNvPr id="6" name="PlaceHolder 5"/>
+          <p:cNvSpPr>
+            <a:spLocks noGrp="1"/>
+          </p:cNvSpPr>
+          <p:nvPr>
+            <p:ph type="dt" idx="6"/>
+          </p:nvPr>
+        </p:nvSpPr>
+        <p:spPr/>
+        <p:txBody>
+          <a:bodyPr/>
+          <a:p>
+            <a:r>
+              <a:rPr lang="en-US"/>
+              <a:t/>
+            </a:r>
+          </a:p>
+        </p:txBody>
+      </p:sp>
+    </p:spTree>
+  </p:cSld>
+</p:sldLayout>
+</file>
+
+<file path=ppt/slideLayouts/slideLayout16.xml><?xml version="1.0" encoding="utf-8"?>
+<p:sldLayout xmlns:a="http://schemas.openxmlformats.org/drawingml/2006/main" xmlns:p="http://schemas.openxmlformats.org/presentationml/2006/main" xmlns:r="http://schemas.openxmlformats.org/officeDocument/2006/relationships" xmlns:p14="http://schemas.microsoft.com/office/powerpoint/2010/main" xmlns:p15="http://schemas.microsoft.com/office/powerpoint/2012/main" xmlns:mc="http://schemas.openxmlformats.org/markup-compatibility/2006" type="twoObj" preserve="1">
+  <p:cSld name="Title, 2 Content">
+    <p:spTree>
+      <p:nvGrpSpPr>
+        <p:cNvPr id="1" name=""/>
+        <p:cNvGrpSpPr/>
+        <p:nvPr/>
+      </p:nvGrpSpPr>
+      <p:grpSpPr>
+        <a:xfrm>
+          <a:off x="0" y="0"/>
+          <a:ext cx="0" cy="0"/>
+          <a:chOff x="0" y="0"/>
+          <a:chExt cx="0" cy="0"/>
+        </a:xfrm>
+      </p:grpSpPr>
+      <p:sp>
+        <p:nvSpPr>
+          <p:cNvPr id="52" name="PlaceHolder 1"/>
+          <p:cNvSpPr>
+            <a:spLocks noGrp="1"/>
+          </p:cNvSpPr>
+          <p:nvPr>
+            <p:ph type="title"/>
+          </p:nvPr>
+        </p:nvSpPr>
+        <p:spPr>
+          <a:xfrm>
+            <a:off x="609480" y="273600"/>
+            <a:ext cx="10972440" cy="1144800"/>
+          </a:xfrm>
+          <a:prstGeom prst="rect">
+            <a:avLst/>
+          </a:prstGeom>
+          <a:noFill/>
+          <a:ln w="0">
+            <a:noFill/>
+          </a:ln>
+        </p:spPr>
+        <p:txBody>
+          <a:bodyPr lIns="0" rIns="0" tIns="0" bIns="0" anchor="ctr">
+            <a:noAutofit/>
+          </a:bodyPr>
+          <a:p>
+            <a:pPr algn="ctr">
+              <a:buNone/>
+            </a:pPr>
+            <a:endParaRPr b="0" lang="en-US" sz="4400" spc="-1" strike="noStrike">
+              <a:latin typeface="Arial"/>
+            </a:endParaRPr>
+          </a:p>
+        </p:txBody>
+      </p:sp>
+      <p:sp>
+        <p:nvSpPr>
+          <p:cNvPr id="53" name="PlaceHolder 2"/>
+          <p:cNvSpPr>
+            <a:spLocks noGrp="1"/>
+          </p:cNvSpPr>
+          <p:nvPr>
+            <p:ph/>
+          </p:nvPr>
+        </p:nvSpPr>
+        <p:spPr>
+          <a:xfrm>
+            <a:off x="609480" y="1604520"/>
+            <a:ext cx="5354280" cy="3977280"/>
+          </a:xfrm>
+          <a:prstGeom prst="rect">
+            <a:avLst/>
+          </a:prstGeom>
+          <a:noFill/>
+          <a:ln w="0">
+            <a:noFill/>
+          </a:ln>
+        </p:spPr>
+        <p:txBody>
+          <a:bodyPr lIns="0" rIns="0" tIns="0" bIns="0" anchor="t">
+            <a:normAutofit/>
+          </a:bodyPr>
+          <a:p>
+            <a:endParaRPr b="0" lang="en-US" sz="3200" spc="-1" strike="noStrike">
+              <a:latin typeface="Arial"/>
+            </a:endParaRPr>
+          </a:p>
+        </p:txBody>
+      </p:sp>
+      <p:sp>
+        <p:nvSpPr>
+          <p:cNvPr id="54" name="PlaceHolder 3"/>
+          <p:cNvSpPr>
+            <a:spLocks noGrp="1"/>
+          </p:cNvSpPr>
+          <p:nvPr>
+            <p:ph/>
+          </p:nvPr>
+        </p:nvSpPr>
+        <p:spPr>
+          <a:xfrm>
+            <a:off x="6231960" y="1604520"/>
+            <a:ext cx="5354280" cy="3977280"/>
+          </a:xfrm>
+          <a:prstGeom prst="rect">
+            <a:avLst/>
+          </a:prstGeom>
+          <a:noFill/>
+          <a:ln w="0">
+            <a:noFill/>
+          </a:ln>
+        </p:spPr>
+        <p:txBody>
+          <a:bodyPr lIns="0" rIns="0" tIns="0" bIns="0" anchor="t">
+            <a:normAutofit/>
+          </a:bodyPr>
+          <a:p>
+            <a:endParaRPr b="0" lang="en-US" sz="3200" spc="-1" strike="noStrike">
+              <a:latin typeface="Arial"/>
+            </a:endParaRPr>
+          </a:p>
+        </p:txBody>
+      </p:sp>
+      <p:sp>
+        <p:nvSpPr>
+          <p:cNvPr id="5" name="PlaceHolder 4"/>
+          <p:cNvSpPr>
+            <a:spLocks noGrp="1"/>
+          </p:cNvSpPr>
+          <p:nvPr>
+            <p:ph type="ftr" idx="4"/>
+          </p:nvPr>
+        </p:nvSpPr>
+        <p:spPr/>
+        <p:txBody>
+          <a:bodyPr/>
+          <a:p>
+            <a:r>
+              <a:t>Footer</a:t>
+            </a:r>
+          </a:p>
+        </p:txBody>
+      </p:sp>
+      <p:sp>
+        <p:nvSpPr>
+          <p:cNvPr id="6" name="PlaceHolder 5"/>
+          <p:cNvSpPr>
+            <a:spLocks noGrp="1"/>
+          </p:cNvSpPr>
+          <p:nvPr>
+            <p:ph type="sldNum" idx="5"/>
+          </p:nvPr>
+        </p:nvSpPr>
+        <p:spPr/>
+        <p:txBody>
+          <a:bodyPr/>
+          <a:p>
+            <a:fld id="{0F9755CA-374B-4611-B04B-A524ED3840F5}" type="slidenum">
+              <a:t>&lt;#&gt;</a:t>
+            </a:fld>
+          </a:p>
+        </p:txBody>
+      </p:sp>
+      <p:sp>
+        <p:nvSpPr>
+          <p:cNvPr id="7" name="PlaceHolder 6"/>
+          <p:cNvSpPr>
+            <a:spLocks noGrp="1"/>
+          </p:cNvSpPr>
+          <p:nvPr>
+            <p:ph type="dt" idx="6"/>
+          </p:nvPr>
+        </p:nvSpPr>
+        <p:spPr/>
+        <p:txBody>
+          <a:bodyPr/>
+          <a:p>
+            <a:r>
+              <a:rPr lang="en-US"/>
+              <a:t/>
+            </a:r>
+          </a:p>
+        </p:txBody>
+      </p:sp>
+    </p:spTree>
+  </p:cSld>
+</p:sldLayout>
+</file>
+
+<file path=ppt/slideLayouts/slideLayout17.xml><?xml version="1.0" encoding="utf-8"?>
+<p:sldLayout xmlns:a="http://schemas.openxmlformats.org/drawingml/2006/main" xmlns:p="http://schemas.openxmlformats.org/presentationml/2006/main" xmlns:r="http://schemas.openxmlformats.org/officeDocument/2006/relationships" xmlns:p14="http://schemas.microsoft.com/office/powerpoint/2010/main" xmlns:p15="http://schemas.microsoft.com/office/powerpoint/2012/main" xmlns:mc="http://schemas.openxmlformats.org/markup-compatibility/2006" type="titleOnly" preserve="1">
+  <p:cSld name="Title Only">
+    <p:spTree>
+      <p:nvGrpSpPr>
+        <p:cNvPr id="1" name=""/>
+        <p:cNvGrpSpPr/>
+        <p:nvPr/>
+      </p:nvGrpSpPr>
+      <p:grpSpPr>
+        <a:xfrm>
+          <a:off x="0" y="0"/>
+          <a:ext cx="0" cy="0"/>
+          <a:chOff x="0" y="0"/>
+          <a:chExt cx="0" cy="0"/>
+        </a:xfrm>
+      </p:grpSpPr>
+      <p:sp>
+        <p:nvSpPr>
+          <p:cNvPr id="55" name="PlaceHolder 1"/>
+          <p:cNvSpPr>
+            <a:spLocks noGrp="1"/>
+          </p:cNvSpPr>
+          <p:nvPr>
+            <p:ph type="title"/>
+          </p:nvPr>
+        </p:nvSpPr>
+        <p:spPr>
+          <a:xfrm>
+            <a:off x="609480" y="273600"/>
+            <a:ext cx="10972440" cy="1144800"/>
+          </a:xfrm>
+          <a:prstGeom prst="rect">
+            <a:avLst/>
+          </a:prstGeom>
+          <a:noFill/>
+          <a:ln w="0">
+            <a:noFill/>
+          </a:ln>
+        </p:spPr>
+        <p:txBody>
+          <a:bodyPr lIns="0" rIns="0" tIns="0" bIns="0" anchor="ctr">
+            <a:noAutofit/>
+          </a:bodyPr>
+          <a:p>
+            <a:pPr algn="ctr">
+              <a:buNone/>
+            </a:pPr>
+            <a:endParaRPr b="0" lang="en-US" sz="4400" spc="-1" strike="noStrike">
+              <a:latin typeface="Arial"/>
+            </a:endParaRPr>
+          </a:p>
+        </p:txBody>
+      </p:sp>
+      <p:sp>
+        <p:nvSpPr>
+          <p:cNvPr id="3" name="PlaceHolder 2"/>
+          <p:cNvSpPr>
+            <a:spLocks noGrp="1"/>
+          </p:cNvSpPr>
+          <p:nvPr>
+            <p:ph type="ftr" idx="4"/>
+          </p:nvPr>
+        </p:nvSpPr>
+        <p:spPr/>
+        <p:txBody>
+          <a:bodyPr/>
+          <a:p>
+            <a:r>
+              <a:t>Footer</a:t>
+            </a:r>
+          </a:p>
+        </p:txBody>
+      </p:sp>
+      <p:sp>
+        <p:nvSpPr>
+          <p:cNvPr id="4" name="PlaceHolder 3"/>
+          <p:cNvSpPr>
+            <a:spLocks noGrp="1"/>
+          </p:cNvSpPr>
+          <p:nvPr>
+            <p:ph type="sldNum" idx="5"/>
+          </p:nvPr>
+        </p:nvSpPr>
+        <p:spPr/>
+        <p:txBody>
+          <a:bodyPr/>
+          <a:p>
+            <a:fld id="{9FD19CD7-5226-4A4C-992E-51FB7A331ABA}" type="slidenum">
+              <a:t>&lt;#&gt;</a:t>
+            </a:fld>
+          </a:p>
+        </p:txBody>
+      </p:sp>
+      <p:sp>
+        <p:nvSpPr>
+          <p:cNvPr id="5" name="PlaceHolder 4"/>
+          <p:cNvSpPr>
+            <a:spLocks noGrp="1"/>
+          </p:cNvSpPr>
+          <p:nvPr>
+            <p:ph type="dt" idx="6"/>
+          </p:nvPr>
+        </p:nvSpPr>
+        <p:spPr/>
+        <p:txBody>
+          <a:bodyPr/>
+          <a:p>
+            <a:r>
+              <a:rPr lang="en-US"/>
+              <a:t/>
+            </a:r>
+          </a:p>
+        </p:txBody>
+      </p:sp>
+    </p:spTree>
+  </p:cSld>
+</p:sldLayout>
+</file>
+
+<file path=ppt/slideLayouts/slideLayout18.xml><?xml version="1.0" encoding="utf-8"?>
+<p:sldLayout xmlns:a="http://schemas.openxmlformats.org/drawingml/2006/main" xmlns:p="http://schemas.openxmlformats.org/presentationml/2006/main" xmlns:r="http://schemas.openxmlformats.org/officeDocument/2006/relationships" xmlns:p14="http://schemas.microsoft.com/office/powerpoint/2010/main" xmlns:p15="http://schemas.microsoft.com/office/powerpoint/2012/main" xmlns:mc="http://schemas.openxmlformats.org/markup-compatibility/2006" type="objOnly" preserve="1">
+  <p:cSld name="Centered Text">
+    <p:spTree>
+      <p:nvGrpSpPr>
+        <p:cNvPr id="1" name=""/>
+        <p:cNvGrpSpPr/>
+        <p:nvPr/>
+      </p:nvGrpSpPr>
+      <p:grpSpPr>
+        <a:xfrm>
+          <a:off x="0" y="0"/>
+          <a:ext cx="0" cy="0"/>
+          <a:chOff x="0" y="0"/>
+          <a:chExt cx="0" cy="0"/>
+        </a:xfrm>
+      </p:grpSpPr>
+      <p:sp>
+        <p:nvSpPr>
+          <p:cNvPr id="56" name="PlaceHolder 1"/>
+          <p:cNvSpPr>
+            <a:spLocks noGrp="1"/>
+          </p:cNvSpPr>
+          <p:nvPr>
+            <p:ph type="subTitle"/>
+          </p:nvPr>
+        </p:nvSpPr>
+        <p:spPr>
+          <a:xfrm>
+            <a:off x="609480" y="273600"/>
+            <a:ext cx="10972440" cy="5307840"/>
+          </a:xfrm>
+          <a:prstGeom prst="rect">
+            <a:avLst/>
+          </a:prstGeom>
+          <a:noFill/>
+          <a:ln w="0">
+            <a:noFill/>
+          </a:ln>
+        </p:spPr>
+        <p:txBody>
+          <a:bodyPr lIns="0" rIns="0" tIns="0" bIns="0" anchor="ctr">
+            <a:noAutofit/>
+          </a:bodyPr>
+          <a:p>
+            <a:pPr algn="ctr">
+              <a:buNone/>
+            </a:pPr>
+            <a:endParaRPr b="0" lang="en-US" sz="3200" spc="-1" strike="noStrike">
+              <a:latin typeface="Arial"/>
+            </a:endParaRPr>
+          </a:p>
+        </p:txBody>
+      </p:sp>
+      <p:sp>
+        <p:nvSpPr>
+          <p:cNvPr id="3" name="PlaceHolder 2"/>
+          <p:cNvSpPr>
+            <a:spLocks noGrp="1"/>
+          </p:cNvSpPr>
+          <p:nvPr>
+            <p:ph type="ftr" idx="4"/>
+          </p:nvPr>
+        </p:nvSpPr>
+        <p:spPr/>
+        <p:txBody>
+          <a:bodyPr/>
+          <a:p>
+            <a:r>
+              <a:t>Footer</a:t>
+            </a:r>
+          </a:p>
+        </p:txBody>
+      </p:sp>
+      <p:sp>
+        <p:nvSpPr>
+          <p:cNvPr id="4" name="PlaceHolder 3"/>
+          <p:cNvSpPr>
+            <a:spLocks noGrp="1"/>
+          </p:cNvSpPr>
+          <p:nvPr>
+            <p:ph type="sldNum" idx="5"/>
+          </p:nvPr>
+        </p:nvSpPr>
+        <p:spPr/>
+        <p:txBody>
+          <a:bodyPr/>
+          <a:p>
+            <a:fld id="{D80ADD45-A6F2-42E3-9CA1-6AC1BE58C7D7}" type="slidenum">
+              <a:t>&lt;#&gt;</a:t>
+            </a:fld>
+          </a:p>
+        </p:txBody>
+      </p:sp>
+      <p:sp>
+        <p:nvSpPr>
+          <p:cNvPr id="5" name="PlaceHolder 4"/>
+          <p:cNvSpPr>
+            <a:spLocks noGrp="1"/>
+          </p:cNvSpPr>
+          <p:nvPr>
+            <p:ph type="dt" idx="6"/>
+          </p:nvPr>
+        </p:nvSpPr>
+        <p:spPr/>
+        <p:txBody>
+          <a:bodyPr/>
+          <a:p>
+            <a:r>
+              <a:rPr lang="en-US"/>
+              <a:t/>
+            </a:r>
+          </a:p>
+        </p:txBody>
+      </p:sp>
+    </p:spTree>
+  </p:cSld>
+</p:sldLayout>
+</file>
+
+<file path=ppt/slideLayouts/slideLayout19.xml><?xml version="1.0" encoding="utf-8"?>
+<p:sldLayout xmlns:a="http://schemas.openxmlformats.org/drawingml/2006/main" xmlns:p="http://schemas.openxmlformats.org/presentationml/2006/main" xmlns:r="http://schemas.openxmlformats.org/officeDocument/2006/relationships" xmlns:p14="http://schemas.microsoft.com/office/powerpoint/2010/main" xmlns:p15="http://schemas.microsoft.com/office/powerpoint/2012/main" xmlns:mc="http://schemas.openxmlformats.org/markup-compatibility/2006" type="twoObjAndObj" preserve="1">
+  <p:cSld name="Title, 2 Content and Content">
+    <p:spTree>
+      <p:nvGrpSpPr>
+        <p:cNvPr id="1" name=""/>
+        <p:cNvGrpSpPr/>
+        <p:nvPr/>
+      </p:nvGrpSpPr>
+      <p:grpSpPr>
+        <a:xfrm>
+          <a:off x="0" y="0"/>
+          <a:ext cx="0" cy="0"/>
+          <a:chOff x="0" y="0"/>
+          <a:chExt cx="0" cy="0"/>
+        </a:xfrm>
+      </p:grpSpPr>
+      <p:sp>
+        <p:nvSpPr>
+          <p:cNvPr id="57" name="PlaceHolder 1"/>
+          <p:cNvSpPr>
+            <a:spLocks noGrp="1"/>
+          </p:cNvSpPr>
+          <p:nvPr>
+            <p:ph type="title"/>
+          </p:nvPr>
+        </p:nvSpPr>
+        <p:spPr>
+          <a:xfrm>
+            <a:off x="609480" y="273600"/>
+            <a:ext cx="10972440" cy="1144800"/>
+          </a:xfrm>
+          <a:prstGeom prst="rect">
+            <a:avLst/>
+          </a:prstGeom>
+          <a:noFill/>
+          <a:ln w="0">
+            <a:noFill/>
+          </a:ln>
+        </p:spPr>
+        <p:txBody>
+          <a:bodyPr lIns="0" rIns="0" tIns="0" bIns="0" anchor="ctr">
+            <a:noAutofit/>
+          </a:bodyPr>
+          <a:p>
+            <a:pPr algn="ctr">
+              <a:buNone/>
+            </a:pPr>
+            <a:endParaRPr b="0" lang="en-US" sz="4400" spc="-1" strike="noStrike">
+              <a:latin typeface="Arial"/>
+            </a:endParaRPr>
+          </a:p>
+        </p:txBody>
+      </p:sp>
+      <p:sp>
+        <p:nvSpPr>
+          <p:cNvPr id="58" name="PlaceHolder 2"/>
+          <p:cNvSpPr>
+            <a:spLocks noGrp="1"/>
+          </p:cNvSpPr>
+          <p:nvPr>
+            <p:ph/>
+          </p:nvPr>
+        </p:nvSpPr>
+        <p:spPr>
+          <a:xfrm>
+            <a:off x="609480" y="1604520"/>
+            <a:ext cx="5354280" cy="1896840"/>
+          </a:xfrm>
+          <a:prstGeom prst="rect">
+            <a:avLst/>
+          </a:prstGeom>
+          <a:noFill/>
+          <a:ln w="0">
+            <a:noFill/>
+          </a:ln>
+        </p:spPr>
+        <p:txBody>
+          <a:bodyPr lIns="0" rIns="0" tIns="0" bIns="0" anchor="t">
+            <a:normAutofit/>
+          </a:bodyPr>
+          <a:p>
+            <a:endParaRPr b="0" lang="en-US" sz="3200" spc="-1" strike="noStrike">
+              <a:latin typeface="Arial"/>
+            </a:endParaRPr>
+          </a:p>
+        </p:txBody>
+      </p:sp>
+      <p:sp>
+        <p:nvSpPr>
+          <p:cNvPr id="59" name="PlaceHolder 3"/>
+          <p:cNvSpPr>
+            <a:spLocks noGrp="1"/>
+          </p:cNvSpPr>
+          <p:nvPr>
+            <p:ph/>
+          </p:nvPr>
+        </p:nvSpPr>
+        <p:spPr>
+          <a:xfrm>
+            <a:off x="6231960" y="1604520"/>
+            <a:ext cx="5354280" cy="3977280"/>
+          </a:xfrm>
+          <a:prstGeom prst="rect">
+            <a:avLst/>
+          </a:prstGeom>
+          <a:noFill/>
+          <a:ln w="0">
+            <a:noFill/>
+          </a:ln>
+        </p:spPr>
+        <p:txBody>
+          <a:bodyPr lIns="0" rIns="0" tIns="0" bIns="0" anchor="t">
+            <a:normAutofit/>
+          </a:bodyPr>
+          <a:p>
+            <a:endParaRPr b="0" lang="en-US" sz="3200" spc="-1" strike="noStrike">
+              <a:latin typeface="Arial"/>
+            </a:endParaRPr>
+          </a:p>
+        </p:txBody>
+      </p:sp>
+      <p:sp>
+        <p:nvSpPr>
+          <p:cNvPr id="60" name="PlaceHolder 4"/>
+          <p:cNvSpPr>
+            <a:spLocks noGrp="1"/>
+          </p:cNvSpPr>
+          <p:nvPr>
+            <p:ph/>
+          </p:nvPr>
+        </p:nvSpPr>
+        <p:spPr>
+          <a:xfrm>
+            <a:off x="609480" y="3682080"/>
+            <a:ext cx="5354280" cy="1896840"/>
+          </a:xfrm>
+          <a:prstGeom prst="rect">
+            <a:avLst/>
+          </a:prstGeom>
+          <a:noFill/>
+          <a:ln w="0">
+            <a:noFill/>
+          </a:ln>
+        </p:spPr>
+        <p:txBody>
+          <a:bodyPr lIns="0" rIns="0" tIns="0" bIns="0" anchor="t">
+            <a:normAutofit/>
+          </a:bodyPr>
+          <a:p>
+            <a:endParaRPr b="0" lang="en-US" sz="3200" spc="-1" strike="noStrike">
+              <a:latin typeface="Arial"/>
+            </a:endParaRPr>
+          </a:p>
+        </p:txBody>
+      </p:sp>
+      <p:sp>
+        <p:nvSpPr>
+          <p:cNvPr id="6" name="PlaceHolder 5"/>
+          <p:cNvSpPr>
+            <a:spLocks noGrp="1"/>
+          </p:cNvSpPr>
+          <p:nvPr>
+            <p:ph type="ftr" idx="4"/>
+          </p:nvPr>
+        </p:nvSpPr>
+        <p:spPr/>
+        <p:txBody>
+          <a:bodyPr/>
+          <a:p>
+            <a:r>
+              <a:t>Footer</a:t>
+            </a:r>
+          </a:p>
+        </p:txBody>
+      </p:sp>
+      <p:sp>
+        <p:nvSpPr>
+          <p:cNvPr id="7" name="PlaceHolder 6"/>
+          <p:cNvSpPr>
+            <a:spLocks noGrp="1"/>
+          </p:cNvSpPr>
+          <p:nvPr>
+            <p:ph type="sldNum" idx="5"/>
+          </p:nvPr>
+        </p:nvSpPr>
+        <p:spPr/>
+        <p:txBody>
+          <a:bodyPr/>
+          <a:p>
+            <a:fld id="{E1ED4391-DAEF-4699-9634-3108282B83AD}" type="slidenum">
+              <a:t>&lt;#&gt;</a:t>
+            </a:fld>
+          </a:p>
+        </p:txBody>
+      </p:sp>
+      <p:sp>
+        <p:nvSpPr>
+          <p:cNvPr id="8" name="PlaceHolder 7"/>
+          <p:cNvSpPr>
+            <a:spLocks noGrp="1"/>
+          </p:cNvSpPr>
+          <p:nvPr>
+            <p:ph type="dt" idx="6"/>
           </p:nvPr>
         </p:nvSpPr>
         <p:spPr/>
@@ -1045,8 +1946,8 @@
         </p:nvSpPr>
         <p:spPr>
           <a:xfrm>
-            <a:off x="1525680" y="2041560"/>
-            <a:ext cx="9143640" cy="1975320"/>
+            <a:off x="609480" y="273600"/>
+            <a:ext cx="10972440" cy="1144800"/>
           </a:xfrm>
           <a:prstGeom prst="rect">
             <a:avLst/>
@@ -1061,11 +1962,11 @@
             <a:noAutofit/>
           </a:bodyPr>
           <a:p>
-            <a:endParaRPr b="0" lang="es-ES" sz="1800" spc="-1" strike="noStrike">
-              <a:solidFill>
-                <a:srgbClr val="000000"/>
-              </a:solidFill>
-              <a:latin typeface="Calibri"/>
+            <a:pPr algn="ctr">
+              <a:buNone/>
+            </a:pPr>
+            <a:endParaRPr b="0" lang="en-US" sz="4400" spc="-1" strike="noStrike">
+              <a:latin typeface="Arial"/>
             </a:endParaRPr>
           </a:p>
         </p:txBody>
@@ -1082,8 +1983,8 @@
         </p:nvSpPr>
         <p:spPr>
           <a:xfrm>
-            <a:off x="0" y="0"/>
-            <a:ext cx="12191760" cy="6857640"/>
+            <a:off x="609480" y="1604520"/>
+            <a:ext cx="10972440" cy="3977280"/>
           </a:xfrm>
           <a:prstGeom prst="rect">
             <a:avLst/>
@@ -1114,7 +2015,7 @@
             <a:spLocks noGrp="1"/>
           </p:cNvSpPr>
           <p:nvPr>
-            <p:ph type="ftr" idx="2"/>
+            <p:ph type="ftr" idx="1"/>
           </p:nvPr>
         </p:nvSpPr>
         <p:spPr/>
@@ -1134,14 +2035,14 @@
             <a:spLocks noGrp="1"/>
           </p:cNvSpPr>
           <p:nvPr>
-            <p:ph type="sldNum" idx="3"/>
+            <p:ph type="sldNum" idx="2"/>
           </p:nvPr>
         </p:nvSpPr>
         <p:spPr/>
         <p:txBody>
           <a:bodyPr/>
           <a:p>
-            <a:fld id="{CEFFBFE2-3BBC-4719-ACC5-E0D5912ACD61}" type="slidenum">
+            <a:fld id="{99478DF6-235A-44B1-BFE6-E164482ADDE6}" type="slidenum">
               <a:t>&lt;#&gt;</a:t>
             </a:fld>
           </a:p>
@@ -1154,7 +2055,1219 @@
             <a:spLocks noGrp="1"/>
           </p:cNvSpPr>
           <p:nvPr>
-            <p:ph type="dt" idx="1"/>
+            <p:ph type="dt" idx="3"/>
+          </p:nvPr>
+        </p:nvSpPr>
+        <p:spPr/>
+        <p:txBody>
+          <a:bodyPr/>
+          <a:p>
+            <a:r>
+              <a:rPr lang="en-US"/>
+              <a:t/>
+            </a:r>
+          </a:p>
+        </p:txBody>
+      </p:sp>
+    </p:spTree>
+  </p:cSld>
+</p:sldLayout>
+</file>
+
+<file path=ppt/slideLayouts/slideLayout20.xml><?xml version="1.0" encoding="utf-8"?>
+<p:sldLayout xmlns:a="http://schemas.openxmlformats.org/drawingml/2006/main" xmlns:p="http://schemas.openxmlformats.org/presentationml/2006/main" xmlns:r="http://schemas.openxmlformats.org/officeDocument/2006/relationships" xmlns:p14="http://schemas.microsoft.com/office/powerpoint/2010/main" xmlns:p15="http://schemas.microsoft.com/office/powerpoint/2012/main" xmlns:mc="http://schemas.openxmlformats.org/markup-compatibility/2006" type="objAndTwoObj" preserve="1">
+  <p:cSld name="Title Content and 2 Content">
+    <p:spTree>
+      <p:nvGrpSpPr>
+        <p:cNvPr id="1" name=""/>
+        <p:cNvGrpSpPr/>
+        <p:nvPr/>
+      </p:nvGrpSpPr>
+      <p:grpSpPr>
+        <a:xfrm>
+          <a:off x="0" y="0"/>
+          <a:ext cx="0" cy="0"/>
+          <a:chOff x="0" y="0"/>
+          <a:chExt cx="0" cy="0"/>
+        </a:xfrm>
+      </p:grpSpPr>
+      <p:sp>
+        <p:nvSpPr>
+          <p:cNvPr id="61" name="PlaceHolder 1"/>
+          <p:cNvSpPr>
+            <a:spLocks noGrp="1"/>
+          </p:cNvSpPr>
+          <p:nvPr>
+            <p:ph type="title"/>
+          </p:nvPr>
+        </p:nvSpPr>
+        <p:spPr>
+          <a:xfrm>
+            <a:off x="609480" y="273600"/>
+            <a:ext cx="10972440" cy="1144800"/>
+          </a:xfrm>
+          <a:prstGeom prst="rect">
+            <a:avLst/>
+          </a:prstGeom>
+          <a:noFill/>
+          <a:ln w="0">
+            <a:noFill/>
+          </a:ln>
+        </p:spPr>
+        <p:txBody>
+          <a:bodyPr lIns="0" rIns="0" tIns="0" bIns="0" anchor="ctr">
+            <a:noAutofit/>
+          </a:bodyPr>
+          <a:p>
+            <a:pPr algn="ctr">
+              <a:buNone/>
+            </a:pPr>
+            <a:endParaRPr b="0" lang="en-US" sz="4400" spc="-1" strike="noStrike">
+              <a:latin typeface="Arial"/>
+            </a:endParaRPr>
+          </a:p>
+        </p:txBody>
+      </p:sp>
+      <p:sp>
+        <p:nvSpPr>
+          <p:cNvPr id="62" name="PlaceHolder 2"/>
+          <p:cNvSpPr>
+            <a:spLocks noGrp="1"/>
+          </p:cNvSpPr>
+          <p:nvPr>
+            <p:ph/>
+          </p:nvPr>
+        </p:nvSpPr>
+        <p:spPr>
+          <a:xfrm>
+            <a:off x="609480" y="1604520"/>
+            <a:ext cx="5354280" cy="3977280"/>
+          </a:xfrm>
+          <a:prstGeom prst="rect">
+            <a:avLst/>
+          </a:prstGeom>
+          <a:noFill/>
+          <a:ln w="0">
+            <a:noFill/>
+          </a:ln>
+        </p:spPr>
+        <p:txBody>
+          <a:bodyPr lIns="0" rIns="0" tIns="0" bIns="0" anchor="t">
+            <a:normAutofit/>
+          </a:bodyPr>
+          <a:p>
+            <a:endParaRPr b="0" lang="en-US" sz="3200" spc="-1" strike="noStrike">
+              <a:latin typeface="Arial"/>
+            </a:endParaRPr>
+          </a:p>
+        </p:txBody>
+      </p:sp>
+      <p:sp>
+        <p:nvSpPr>
+          <p:cNvPr id="63" name="PlaceHolder 3"/>
+          <p:cNvSpPr>
+            <a:spLocks noGrp="1"/>
+          </p:cNvSpPr>
+          <p:nvPr>
+            <p:ph/>
+          </p:nvPr>
+        </p:nvSpPr>
+        <p:spPr>
+          <a:xfrm>
+            <a:off x="6231960" y="1604520"/>
+            <a:ext cx="5354280" cy="1896840"/>
+          </a:xfrm>
+          <a:prstGeom prst="rect">
+            <a:avLst/>
+          </a:prstGeom>
+          <a:noFill/>
+          <a:ln w="0">
+            <a:noFill/>
+          </a:ln>
+        </p:spPr>
+        <p:txBody>
+          <a:bodyPr lIns="0" rIns="0" tIns="0" bIns="0" anchor="t">
+            <a:normAutofit/>
+          </a:bodyPr>
+          <a:p>
+            <a:endParaRPr b="0" lang="en-US" sz="3200" spc="-1" strike="noStrike">
+              <a:latin typeface="Arial"/>
+            </a:endParaRPr>
+          </a:p>
+        </p:txBody>
+      </p:sp>
+      <p:sp>
+        <p:nvSpPr>
+          <p:cNvPr id="64" name="PlaceHolder 4"/>
+          <p:cNvSpPr>
+            <a:spLocks noGrp="1"/>
+          </p:cNvSpPr>
+          <p:nvPr>
+            <p:ph/>
+          </p:nvPr>
+        </p:nvSpPr>
+        <p:spPr>
+          <a:xfrm>
+            <a:off x="6231960" y="3682080"/>
+            <a:ext cx="5354280" cy="1896840"/>
+          </a:xfrm>
+          <a:prstGeom prst="rect">
+            <a:avLst/>
+          </a:prstGeom>
+          <a:noFill/>
+          <a:ln w="0">
+            <a:noFill/>
+          </a:ln>
+        </p:spPr>
+        <p:txBody>
+          <a:bodyPr lIns="0" rIns="0" tIns="0" bIns="0" anchor="t">
+            <a:normAutofit/>
+          </a:bodyPr>
+          <a:p>
+            <a:endParaRPr b="0" lang="en-US" sz="3200" spc="-1" strike="noStrike">
+              <a:latin typeface="Arial"/>
+            </a:endParaRPr>
+          </a:p>
+        </p:txBody>
+      </p:sp>
+      <p:sp>
+        <p:nvSpPr>
+          <p:cNvPr id="6" name="PlaceHolder 5"/>
+          <p:cNvSpPr>
+            <a:spLocks noGrp="1"/>
+          </p:cNvSpPr>
+          <p:nvPr>
+            <p:ph type="ftr" idx="4"/>
+          </p:nvPr>
+        </p:nvSpPr>
+        <p:spPr/>
+        <p:txBody>
+          <a:bodyPr/>
+          <a:p>
+            <a:r>
+              <a:t>Footer</a:t>
+            </a:r>
+          </a:p>
+        </p:txBody>
+      </p:sp>
+      <p:sp>
+        <p:nvSpPr>
+          <p:cNvPr id="7" name="PlaceHolder 6"/>
+          <p:cNvSpPr>
+            <a:spLocks noGrp="1"/>
+          </p:cNvSpPr>
+          <p:nvPr>
+            <p:ph type="sldNum" idx="5"/>
+          </p:nvPr>
+        </p:nvSpPr>
+        <p:spPr/>
+        <p:txBody>
+          <a:bodyPr/>
+          <a:p>
+            <a:fld id="{357F145F-3185-415D-9E8C-B86C41A4984D}" type="slidenum">
+              <a:t>&lt;#&gt;</a:t>
+            </a:fld>
+          </a:p>
+        </p:txBody>
+      </p:sp>
+      <p:sp>
+        <p:nvSpPr>
+          <p:cNvPr id="8" name="PlaceHolder 7"/>
+          <p:cNvSpPr>
+            <a:spLocks noGrp="1"/>
+          </p:cNvSpPr>
+          <p:nvPr>
+            <p:ph type="dt" idx="6"/>
+          </p:nvPr>
+        </p:nvSpPr>
+        <p:spPr/>
+        <p:txBody>
+          <a:bodyPr/>
+          <a:p>
+            <a:r>
+              <a:rPr lang="en-US"/>
+              <a:t/>
+            </a:r>
+          </a:p>
+        </p:txBody>
+      </p:sp>
+    </p:spTree>
+  </p:cSld>
+</p:sldLayout>
+</file>
+
+<file path=ppt/slideLayouts/slideLayout21.xml><?xml version="1.0" encoding="utf-8"?>
+<p:sldLayout xmlns:a="http://schemas.openxmlformats.org/drawingml/2006/main" xmlns:p="http://schemas.openxmlformats.org/presentationml/2006/main" xmlns:r="http://schemas.openxmlformats.org/officeDocument/2006/relationships" xmlns:p14="http://schemas.microsoft.com/office/powerpoint/2010/main" xmlns:p15="http://schemas.microsoft.com/office/powerpoint/2012/main" xmlns:mc="http://schemas.openxmlformats.org/markup-compatibility/2006" type="twoObjOverTx" preserve="1">
+  <p:cSld name="Title, 2 Content over Content">
+    <p:spTree>
+      <p:nvGrpSpPr>
+        <p:cNvPr id="1" name=""/>
+        <p:cNvGrpSpPr/>
+        <p:nvPr/>
+      </p:nvGrpSpPr>
+      <p:grpSpPr>
+        <a:xfrm>
+          <a:off x="0" y="0"/>
+          <a:ext cx="0" cy="0"/>
+          <a:chOff x="0" y="0"/>
+          <a:chExt cx="0" cy="0"/>
+        </a:xfrm>
+      </p:grpSpPr>
+      <p:sp>
+        <p:nvSpPr>
+          <p:cNvPr id="65" name="PlaceHolder 1"/>
+          <p:cNvSpPr>
+            <a:spLocks noGrp="1"/>
+          </p:cNvSpPr>
+          <p:nvPr>
+            <p:ph type="title"/>
+          </p:nvPr>
+        </p:nvSpPr>
+        <p:spPr>
+          <a:xfrm>
+            <a:off x="609480" y="273600"/>
+            <a:ext cx="10972440" cy="1144800"/>
+          </a:xfrm>
+          <a:prstGeom prst="rect">
+            <a:avLst/>
+          </a:prstGeom>
+          <a:noFill/>
+          <a:ln w="0">
+            <a:noFill/>
+          </a:ln>
+        </p:spPr>
+        <p:txBody>
+          <a:bodyPr lIns="0" rIns="0" tIns="0" bIns="0" anchor="ctr">
+            <a:noAutofit/>
+          </a:bodyPr>
+          <a:p>
+            <a:pPr algn="ctr">
+              <a:buNone/>
+            </a:pPr>
+            <a:endParaRPr b="0" lang="en-US" sz="4400" spc="-1" strike="noStrike">
+              <a:latin typeface="Arial"/>
+            </a:endParaRPr>
+          </a:p>
+        </p:txBody>
+      </p:sp>
+      <p:sp>
+        <p:nvSpPr>
+          <p:cNvPr id="66" name="PlaceHolder 2"/>
+          <p:cNvSpPr>
+            <a:spLocks noGrp="1"/>
+          </p:cNvSpPr>
+          <p:nvPr>
+            <p:ph/>
+          </p:nvPr>
+        </p:nvSpPr>
+        <p:spPr>
+          <a:xfrm>
+            <a:off x="609480" y="1604520"/>
+            <a:ext cx="5354280" cy="1896840"/>
+          </a:xfrm>
+          <a:prstGeom prst="rect">
+            <a:avLst/>
+          </a:prstGeom>
+          <a:noFill/>
+          <a:ln w="0">
+            <a:noFill/>
+          </a:ln>
+        </p:spPr>
+        <p:txBody>
+          <a:bodyPr lIns="0" rIns="0" tIns="0" bIns="0" anchor="t">
+            <a:normAutofit/>
+          </a:bodyPr>
+          <a:p>
+            <a:endParaRPr b="0" lang="en-US" sz="3200" spc="-1" strike="noStrike">
+              <a:latin typeface="Arial"/>
+            </a:endParaRPr>
+          </a:p>
+        </p:txBody>
+      </p:sp>
+      <p:sp>
+        <p:nvSpPr>
+          <p:cNvPr id="67" name="PlaceHolder 3"/>
+          <p:cNvSpPr>
+            <a:spLocks noGrp="1"/>
+          </p:cNvSpPr>
+          <p:nvPr>
+            <p:ph/>
+          </p:nvPr>
+        </p:nvSpPr>
+        <p:spPr>
+          <a:xfrm>
+            <a:off x="6231960" y="1604520"/>
+            <a:ext cx="5354280" cy="1896840"/>
+          </a:xfrm>
+          <a:prstGeom prst="rect">
+            <a:avLst/>
+          </a:prstGeom>
+          <a:noFill/>
+          <a:ln w="0">
+            <a:noFill/>
+          </a:ln>
+        </p:spPr>
+        <p:txBody>
+          <a:bodyPr lIns="0" rIns="0" tIns="0" bIns="0" anchor="t">
+            <a:normAutofit/>
+          </a:bodyPr>
+          <a:p>
+            <a:endParaRPr b="0" lang="en-US" sz="3200" spc="-1" strike="noStrike">
+              <a:latin typeface="Arial"/>
+            </a:endParaRPr>
+          </a:p>
+        </p:txBody>
+      </p:sp>
+      <p:sp>
+        <p:nvSpPr>
+          <p:cNvPr id="68" name="PlaceHolder 4"/>
+          <p:cNvSpPr>
+            <a:spLocks noGrp="1"/>
+          </p:cNvSpPr>
+          <p:nvPr>
+            <p:ph/>
+          </p:nvPr>
+        </p:nvSpPr>
+        <p:spPr>
+          <a:xfrm>
+            <a:off x="609480" y="3682080"/>
+            <a:ext cx="10972440" cy="1896840"/>
+          </a:xfrm>
+          <a:prstGeom prst="rect">
+            <a:avLst/>
+          </a:prstGeom>
+          <a:noFill/>
+          <a:ln w="0">
+            <a:noFill/>
+          </a:ln>
+        </p:spPr>
+        <p:txBody>
+          <a:bodyPr lIns="0" rIns="0" tIns="0" bIns="0" anchor="t">
+            <a:normAutofit/>
+          </a:bodyPr>
+          <a:p>
+            <a:endParaRPr b="0" lang="en-US" sz="3200" spc="-1" strike="noStrike">
+              <a:latin typeface="Arial"/>
+            </a:endParaRPr>
+          </a:p>
+        </p:txBody>
+      </p:sp>
+      <p:sp>
+        <p:nvSpPr>
+          <p:cNvPr id="6" name="PlaceHolder 5"/>
+          <p:cNvSpPr>
+            <a:spLocks noGrp="1"/>
+          </p:cNvSpPr>
+          <p:nvPr>
+            <p:ph type="ftr" idx="4"/>
+          </p:nvPr>
+        </p:nvSpPr>
+        <p:spPr/>
+        <p:txBody>
+          <a:bodyPr/>
+          <a:p>
+            <a:r>
+              <a:t>Footer</a:t>
+            </a:r>
+          </a:p>
+        </p:txBody>
+      </p:sp>
+      <p:sp>
+        <p:nvSpPr>
+          <p:cNvPr id="7" name="PlaceHolder 6"/>
+          <p:cNvSpPr>
+            <a:spLocks noGrp="1"/>
+          </p:cNvSpPr>
+          <p:nvPr>
+            <p:ph type="sldNum" idx="5"/>
+          </p:nvPr>
+        </p:nvSpPr>
+        <p:spPr/>
+        <p:txBody>
+          <a:bodyPr/>
+          <a:p>
+            <a:fld id="{8ECAB6D2-C0FE-43F4-A29D-9B58F652BB57}" type="slidenum">
+              <a:t>&lt;#&gt;</a:t>
+            </a:fld>
+          </a:p>
+        </p:txBody>
+      </p:sp>
+      <p:sp>
+        <p:nvSpPr>
+          <p:cNvPr id="8" name="PlaceHolder 7"/>
+          <p:cNvSpPr>
+            <a:spLocks noGrp="1"/>
+          </p:cNvSpPr>
+          <p:nvPr>
+            <p:ph type="dt" idx="6"/>
+          </p:nvPr>
+        </p:nvSpPr>
+        <p:spPr/>
+        <p:txBody>
+          <a:bodyPr/>
+          <a:p>
+            <a:r>
+              <a:rPr lang="en-US"/>
+              <a:t/>
+            </a:r>
+          </a:p>
+        </p:txBody>
+      </p:sp>
+    </p:spTree>
+  </p:cSld>
+</p:sldLayout>
+</file>
+
+<file path=ppt/slideLayouts/slideLayout22.xml><?xml version="1.0" encoding="utf-8"?>
+<p:sldLayout xmlns:a="http://schemas.openxmlformats.org/drawingml/2006/main" xmlns:p="http://schemas.openxmlformats.org/presentationml/2006/main" xmlns:r="http://schemas.openxmlformats.org/officeDocument/2006/relationships" xmlns:p14="http://schemas.microsoft.com/office/powerpoint/2010/main" xmlns:p15="http://schemas.microsoft.com/office/powerpoint/2012/main" xmlns:mc="http://schemas.openxmlformats.org/markup-compatibility/2006" type="objOverTx" preserve="1">
+  <p:cSld name="Title, Content over Content">
+    <p:spTree>
+      <p:nvGrpSpPr>
+        <p:cNvPr id="1" name=""/>
+        <p:cNvGrpSpPr/>
+        <p:nvPr/>
+      </p:nvGrpSpPr>
+      <p:grpSpPr>
+        <a:xfrm>
+          <a:off x="0" y="0"/>
+          <a:ext cx="0" cy="0"/>
+          <a:chOff x="0" y="0"/>
+          <a:chExt cx="0" cy="0"/>
+        </a:xfrm>
+      </p:grpSpPr>
+      <p:sp>
+        <p:nvSpPr>
+          <p:cNvPr id="69" name="PlaceHolder 1"/>
+          <p:cNvSpPr>
+            <a:spLocks noGrp="1"/>
+          </p:cNvSpPr>
+          <p:nvPr>
+            <p:ph type="title"/>
+          </p:nvPr>
+        </p:nvSpPr>
+        <p:spPr>
+          <a:xfrm>
+            <a:off x="609480" y="273600"/>
+            <a:ext cx="10972440" cy="1144800"/>
+          </a:xfrm>
+          <a:prstGeom prst="rect">
+            <a:avLst/>
+          </a:prstGeom>
+          <a:noFill/>
+          <a:ln w="0">
+            <a:noFill/>
+          </a:ln>
+        </p:spPr>
+        <p:txBody>
+          <a:bodyPr lIns="0" rIns="0" tIns="0" bIns="0" anchor="ctr">
+            <a:noAutofit/>
+          </a:bodyPr>
+          <a:p>
+            <a:pPr algn="ctr">
+              <a:buNone/>
+            </a:pPr>
+            <a:endParaRPr b="0" lang="en-US" sz="4400" spc="-1" strike="noStrike">
+              <a:latin typeface="Arial"/>
+            </a:endParaRPr>
+          </a:p>
+        </p:txBody>
+      </p:sp>
+      <p:sp>
+        <p:nvSpPr>
+          <p:cNvPr id="70" name="PlaceHolder 2"/>
+          <p:cNvSpPr>
+            <a:spLocks noGrp="1"/>
+          </p:cNvSpPr>
+          <p:nvPr>
+            <p:ph/>
+          </p:nvPr>
+        </p:nvSpPr>
+        <p:spPr>
+          <a:xfrm>
+            <a:off x="609480" y="1604520"/>
+            <a:ext cx="10972440" cy="1896840"/>
+          </a:xfrm>
+          <a:prstGeom prst="rect">
+            <a:avLst/>
+          </a:prstGeom>
+          <a:noFill/>
+          <a:ln w="0">
+            <a:noFill/>
+          </a:ln>
+        </p:spPr>
+        <p:txBody>
+          <a:bodyPr lIns="0" rIns="0" tIns="0" bIns="0" anchor="t">
+            <a:normAutofit/>
+          </a:bodyPr>
+          <a:p>
+            <a:endParaRPr b="0" lang="en-US" sz="3200" spc="-1" strike="noStrike">
+              <a:latin typeface="Arial"/>
+            </a:endParaRPr>
+          </a:p>
+        </p:txBody>
+      </p:sp>
+      <p:sp>
+        <p:nvSpPr>
+          <p:cNvPr id="71" name="PlaceHolder 3"/>
+          <p:cNvSpPr>
+            <a:spLocks noGrp="1"/>
+          </p:cNvSpPr>
+          <p:nvPr>
+            <p:ph/>
+          </p:nvPr>
+        </p:nvSpPr>
+        <p:spPr>
+          <a:xfrm>
+            <a:off x="609480" y="3682080"/>
+            <a:ext cx="10972440" cy="1896840"/>
+          </a:xfrm>
+          <a:prstGeom prst="rect">
+            <a:avLst/>
+          </a:prstGeom>
+          <a:noFill/>
+          <a:ln w="0">
+            <a:noFill/>
+          </a:ln>
+        </p:spPr>
+        <p:txBody>
+          <a:bodyPr lIns="0" rIns="0" tIns="0" bIns="0" anchor="t">
+            <a:normAutofit/>
+          </a:bodyPr>
+          <a:p>
+            <a:endParaRPr b="0" lang="en-US" sz="3200" spc="-1" strike="noStrike">
+              <a:latin typeface="Arial"/>
+            </a:endParaRPr>
+          </a:p>
+        </p:txBody>
+      </p:sp>
+      <p:sp>
+        <p:nvSpPr>
+          <p:cNvPr id="5" name="PlaceHolder 4"/>
+          <p:cNvSpPr>
+            <a:spLocks noGrp="1"/>
+          </p:cNvSpPr>
+          <p:nvPr>
+            <p:ph type="ftr" idx="4"/>
+          </p:nvPr>
+        </p:nvSpPr>
+        <p:spPr/>
+        <p:txBody>
+          <a:bodyPr/>
+          <a:p>
+            <a:r>
+              <a:t>Footer</a:t>
+            </a:r>
+          </a:p>
+        </p:txBody>
+      </p:sp>
+      <p:sp>
+        <p:nvSpPr>
+          <p:cNvPr id="6" name="PlaceHolder 5"/>
+          <p:cNvSpPr>
+            <a:spLocks noGrp="1"/>
+          </p:cNvSpPr>
+          <p:nvPr>
+            <p:ph type="sldNum" idx="5"/>
+          </p:nvPr>
+        </p:nvSpPr>
+        <p:spPr/>
+        <p:txBody>
+          <a:bodyPr/>
+          <a:p>
+            <a:fld id="{644366D8-DB1B-4827-BA35-2931BCD706B1}" type="slidenum">
+              <a:t>&lt;#&gt;</a:t>
+            </a:fld>
+          </a:p>
+        </p:txBody>
+      </p:sp>
+      <p:sp>
+        <p:nvSpPr>
+          <p:cNvPr id="7" name="PlaceHolder 6"/>
+          <p:cNvSpPr>
+            <a:spLocks noGrp="1"/>
+          </p:cNvSpPr>
+          <p:nvPr>
+            <p:ph type="dt" idx="6"/>
+          </p:nvPr>
+        </p:nvSpPr>
+        <p:spPr/>
+        <p:txBody>
+          <a:bodyPr/>
+          <a:p>
+            <a:r>
+              <a:rPr lang="en-US"/>
+              <a:t/>
+            </a:r>
+          </a:p>
+        </p:txBody>
+      </p:sp>
+    </p:spTree>
+  </p:cSld>
+</p:sldLayout>
+</file>
+
+<file path=ppt/slideLayouts/slideLayout23.xml><?xml version="1.0" encoding="utf-8"?>
+<p:sldLayout xmlns:a="http://schemas.openxmlformats.org/drawingml/2006/main" xmlns:p="http://schemas.openxmlformats.org/presentationml/2006/main" xmlns:r="http://schemas.openxmlformats.org/officeDocument/2006/relationships" xmlns:p14="http://schemas.microsoft.com/office/powerpoint/2010/main" xmlns:p15="http://schemas.microsoft.com/office/powerpoint/2012/main" xmlns:mc="http://schemas.openxmlformats.org/markup-compatibility/2006" type="fourObj" preserve="1">
+  <p:cSld name="Title, 4 Content">
+    <p:spTree>
+      <p:nvGrpSpPr>
+        <p:cNvPr id="1" name=""/>
+        <p:cNvGrpSpPr/>
+        <p:nvPr/>
+      </p:nvGrpSpPr>
+      <p:grpSpPr>
+        <a:xfrm>
+          <a:off x="0" y="0"/>
+          <a:ext cx="0" cy="0"/>
+          <a:chOff x="0" y="0"/>
+          <a:chExt cx="0" cy="0"/>
+        </a:xfrm>
+      </p:grpSpPr>
+      <p:sp>
+        <p:nvSpPr>
+          <p:cNvPr id="72" name="PlaceHolder 1"/>
+          <p:cNvSpPr>
+            <a:spLocks noGrp="1"/>
+          </p:cNvSpPr>
+          <p:nvPr>
+            <p:ph type="title"/>
+          </p:nvPr>
+        </p:nvSpPr>
+        <p:spPr>
+          <a:xfrm>
+            <a:off x="609480" y="273600"/>
+            <a:ext cx="10972440" cy="1144800"/>
+          </a:xfrm>
+          <a:prstGeom prst="rect">
+            <a:avLst/>
+          </a:prstGeom>
+          <a:noFill/>
+          <a:ln w="0">
+            <a:noFill/>
+          </a:ln>
+        </p:spPr>
+        <p:txBody>
+          <a:bodyPr lIns="0" rIns="0" tIns="0" bIns="0" anchor="ctr">
+            <a:noAutofit/>
+          </a:bodyPr>
+          <a:p>
+            <a:pPr algn="ctr">
+              <a:buNone/>
+            </a:pPr>
+            <a:endParaRPr b="0" lang="en-US" sz="4400" spc="-1" strike="noStrike">
+              <a:latin typeface="Arial"/>
+            </a:endParaRPr>
+          </a:p>
+        </p:txBody>
+      </p:sp>
+      <p:sp>
+        <p:nvSpPr>
+          <p:cNvPr id="73" name="PlaceHolder 2"/>
+          <p:cNvSpPr>
+            <a:spLocks noGrp="1"/>
+          </p:cNvSpPr>
+          <p:nvPr>
+            <p:ph/>
+          </p:nvPr>
+        </p:nvSpPr>
+        <p:spPr>
+          <a:xfrm>
+            <a:off x="609480" y="1604520"/>
+            <a:ext cx="5354280" cy="1896840"/>
+          </a:xfrm>
+          <a:prstGeom prst="rect">
+            <a:avLst/>
+          </a:prstGeom>
+          <a:noFill/>
+          <a:ln w="0">
+            <a:noFill/>
+          </a:ln>
+        </p:spPr>
+        <p:txBody>
+          <a:bodyPr lIns="0" rIns="0" tIns="0" bIns="0" anchor="t">
+            <a:normAutofit/>
+          </a:bodyPr>
+          <a:p>
+            <a:endParaRPr b="0" lang="en-US" sz="3200" spc="-1" strike="noStrike">
+              <a:latin typeface="Arial"/>
+            </a:endParaRPr>
+          </a:p>
+        </p:txBody>
+      </p:sp>
+      <p:sp>
+        <p:nvSpPr>
+          <p:cNvPr id="74" name="PlaceHolder 3"/>
+          <p:cNvSpPr>
+            <a:spLocks noGrp="1"/>
+          </p:cNvSpPr>
+          <p:nvPr>
+            <p:ph/>
+          </p:nvPr>
+        </p:nvSpPr>
+        <p:spPr>
+          <a:xfrm>
+            <a:off x="6231960" y="1604520"/>
+            <a:ext cx="5354280" cy="1896840"/>
+          </a:xfrm>
+          <a:prstGeom prst="rect">
+            <a:avLst/>
+          </a:prstGeom>
+          <a:noFill/>
+          <a:ln w="0">
+            <a:noFill/>
+          </a:ln>
+        </p:spPr>
+        <p:txBody>
+          <a:bodyPr lIns="0" rIns="0" tIns="0" bIns="0" anchor="t">
+            <a:normAutofit/>
+          </a:bodyPr>
+          <a:p>
+            <a:endParaRPr b="0" lang="en-US" sz="3200" spc="-1" strike="noStrike">
+              <a:latin typeface="Arial"/>
+            </a:endParaRPr>
+          </a:p>
+        </p:txBody>
+      </p:sp>
+      <p:sp>
+        <p:nvSpPr>
+          <p:cNvPr id="75" name="PlaceHolder 4"/>
+          <p:cNvSpPr>
+            <a:spLocks noGrp="1"/>
+          </p:cNvSpPr>
+          <p:nvPr>
+            <p:ph/>
+          </p:nvPr>
+        </p:nvSpPr>
+        <p:spPr>
+          <a:xfrm>
+            <a:off x="609480" y="3682080"/>
+            <a:ext cx="5354280" cy="1896840"/>
+          </a:xfrm>
+          <a:prstGeom prst="rect">
+            <a:avLst/>
+          </a:prstGeom>
+          <a:noFill/>
+          <a:ln w="0">
+            <a:noFill/>
+          </a:ln>
+        </p:spPr>
+        <p:txBody>
+          <a:bodyPr lIns="0" rIns="0" tIns="0" bIns="0" anchor="t">
+            <a:normAutofit/>
+          </a:bodyPr>
+          <a:p>
+            <a:endParaRPr b="0" lang="en-US" sz="3200" spc="-1" strike="noStrike">
+              <a:latin typeface="Arial"/>
+            </a:endParaRPr>
+          </a:p>
+        </p:txBody>
+      </p:sp>
+      <p:sp>
+        <p:nvSpPr>
+          <p:cNvPr id="76" name="PlaceHolder 5"/>
+          <p:cNvSpPr>
+            <a:spLocks noGrp="1"/>
+          </p:cNvSpPr>
+          <p:nvPr>
+            <p:ph/>
+          </p:nvPr>
+        </p:nvSpPr>
+        <p:spPr>
+          <a:xfrm>
+            <a:off x="6231960" y="3682080"/>
+            <a:ext cx="5354280" cy="1896840"/>
+          </a:xfrm>
+          <a:prstGeom prst="rect">
+            <a:avLst/>
+          </a:prstGeom>
+          <a:noFill/>
+          <a:ln w="0">
+            <a:noFill/>
+          </a:ln>
+        </p:spPr>
+        <p:txBody>
+          <a:bodyPr lIns="0" rIns="0" tIns="0" bIns="0" anchor="t">
+            <a:normAutofit/>
+          </a:bodyPr>
+          <a:p>
+            <a:endParaRPr b="0" lang="en-US" sz="3200" spc="-1" strike="noStrike">
+              <a:latin typeface="Arial"/>
+            </a:endParaRPr>
+          </a:p>
+        </p:txBody>
+      </p:sp>
+      <p:sp>
+        <p:nvSpPr>
+          <p:cNvPr id="7" name="PlaceHolder 6"/>
+          <p:cNvSpPr>
+            <a:spLocks noGrp="1"/>
+          </p:cNvSpPr>
+          <p:nvPr>
+            <p:ph type="ftr" idx="4"/>
+          </p:nvPr>
+        </p:nvSpPr>
+        <p:spPr/>
+        <p:txBody>
+          <a:bodyPr/>
+          <a:p>
+            <a:r>
+              <a:t>Footer</a:t>
+            </a:r>
+          </a:p>
+        </p:txBody>
+      </p:sp>
+      <p:sp>
+        <p:nvSpPr>
+          <p:cNvPr id="8" name="PlaceHolder 7"/>
+          <p:cNvSpPr>
+            <a:spLocks noGrp="1"/>
+          </p:cNvSpPr>
+          <p:nvPr>
+            <p:ph type="sldNum" idx="5"/>
+          </p:nvPr>
+        </p:nvSpPr>
+        <p:spPr/>
+        <p:txBody>
+          <a:bodyPr/>
+          <a:p>
+            <a:fld id="{265EB786-291D-417A-8995-1F41404AF52A}" type="slidenum">
+              <a:t>&lt;#&gt;</a:t>
+            </a:fld>
+          </a:p>
+        </p:txBody>
+      </p:sp>
+      <p:sp>
+        <p:nvSpPr>
+          <p:cNvPr id="9" name="PlaceHolder 8"/>
+          <p:cNvSpPr>
+            <a:spLocks noGrp="1"/>
+          </p:cNvSpPr>
+          <p:nvPr>
+            <p:ph type="dt" idx="6"/>
+          </p:nvPr>
+        </p:nvSpPr>
+        <p:spPr/>
+        <p:txBody>
+          <a:bodyPr/>
+          <a:p>
+            <a:r>
+              <a:rPr lang="en-US"/>
+              <a:t/>
+            </a:r>
+          </a:p>
+        </p:txBody>
+      </p:sp>
+    </p:spTree>
+  </p:cSld>
+</p:sldLayout>
+</file>
+
+<file path=ppt/slideLayouts/slideLayout24.xml><?xml version="1.0" encoding="utf-8"?>
+<p:sldLayout xmlns:a="http://schemas.openxmlformats.org/drawingml/2006/main" xmlns:p="http://schemas.openxmlformats.org/presentationml/2006/main" xmlns:r="http://schemas.openxmlformats.org/officeDocument/2006/relationships" xmlns:p14="http://schemas.microsoft.com/office/powerpoint/2010/main" xmlns:p15="http://schemas.microsoft.com/office/powerpoint/2012/main" xmlns:mc="http://schemas.openxmlformats.org/markup-compatibility/2006" type="blank" preserve="1">
+  <p:cSld name="Title, 6 Content">
+    <p:spTree>
+      <p:nvGrpSpPr>
+        <p:cNvPr id="1" name=""/>
+        <p:cNvGrpSpPr/>
+        <p:nvPr/>
+      </p:nvGrpSpPr>
+      <p:grpSpPr>
+        <a:xfrm>
+          <a:off x="0" y="0"/>
+          <a:ext cx="0" cy="0"/>
+          <a:chOff x="0" y="0"/>
+          <a:chExt cx="0" cy="0"/>
+        </a:xfrm>
+      </p:grpSpPr>
+      <p:sp>
+        <p:nvSpPr>
+          <p:cNvPr id="77" name="PlaceHolder 1"/>
+          <p:cNvSpPr>
+            <a:spLocks noGrp="1"/>
+          </p:cNvSpPr>
+          <p:nvPr>
+            <p:ph type="title"/>
+          </p:nvPr>
+        </p:nvSpPr>
+        <p:spPr>
+          <a:xfrm>
+            <a:off x="609480" y="273600"/>
+            <a:ext cx="10972440" cy="1144800"/>
+          </a:xfrm>
+          <a:prstGeom prst="rect">
+            <a:avLst/>
+          </a:prstGeom>
+          <a:noFill/>
+          <a:ln w="0">
+            <a:noFill/>
+          </a:ln>
+        </p:spPr>
+        <p:txBody>
+          <a:bodyPr lIns="0" rIns="0" tIns="0" bIns="0" anchor="ctr">
+            <a:noAutofit/>
+          </a:bodyPr>
+          <a:p>
+            <a:pPr algn="ctr">
+              <a:buNone/>
+            </a:pPr>
+            <a:endParaRPr b="0" lang="en-US" sz="4400" spc="-1" strike="noStrike">
+              <a:latin typeface="Arial"/>
+            </a:endParaRPr>
+          </a:p>
+        </p:txBody>
+      </p:sp>
+      <p:sp>
+        <p:nvSpPr>
+          <p:cNvPr id="78" name="PlaceHolder 2"/>
+          <p:cNvSpPr>
+            <a:spLocks noGrp="1"/>
+          </p:cNvSpPr>
+          <p:nvPr>
+            <p:ph/>
+          </p:nvPr>
+        </p:nvSpPr>
+        <p:spPr>
+          <a:xfrm>
+            <a:off x="609480" y="1604520"/>
+            <a:ext cx="3533040" cy="1896840"/>
+          </a:xfrm>
+          <a:prstGeom prst="rect">
+            <a:avLst/>
+          </a:prstGeom>
+          <a:noFill/>
+          <a:ln w="0">
+            <a:noFill/>
+          </a:ln>
+        </p:spPr>
+        <p:txBody>
+          <a:bodyPr lIns="0" rIns="0" tIns="0" bIns="0" anchor="t">
+            <a:normAutofit/>
+          </a:bodyPr>
+          <a:p>
+            <a:endParaRPr b="0" lang="en-US" sz="3200" spc="-1" strike="noStrike">
+              <a:latin typeface="Arial"/>
+            </a:endParaRPr>
+          </a:p>
+        </p:txBody>
+      </p:sp>
+      <p:sp>
+        <p:nvSpPr>
+          <p:cNvPr id="79" name="PlaceHolder 3"/>
+          <p:cNvSpPr>
+            <a:spLocks noGrp="1"/>
+          </p:cNvSpPr>
+          <p:nvPr>
+            <p:ph/>
+          </p:nvPr>
+        </p:nvSpPr>
+        <p:spPr>
+          <a:xfrm>
+            <a:off x="4319640" y="1604520"/>
+            <a:ext cx="3533040" cy="1896840"/>
+          </a:xfrm>
+          <a:prstGeom prst="rect">
+            <a:avLst/>
+          </a:prstGeom>
+          <a:noFill/>
+          <a:ln w="0">
+            <a:noFill/>
+          </a:ln>
+        </p:spPr>
+        <p:txBody>
+          <a:bodyPr lIns="0" rIns="0" tIns="0" bIns="0" anchor="t">
+            <a:normAutofit/>
+          </a:bodyPr>
+          <a:p>
+            <a:endParaRPr b="0" lang="en-US" sz="3200" spc="-1" strike="noStrike">
+              <a:latin typeface="Arial"/>
+            </a:endParaRPr>
+          </a:p>
+        </p:txBody>
+      </p:sp>
+      <p:sp>
+        <p:nvSpPr>
+          <p:cNvPr id="80" name="PlaceHolder 4"/>
+          <p:cNvSpPr>
+            <a:spLocks noGrp="1"/>
+          </p:cNvSpPr>
+          <p:nvPr>
+            <p:ph/>
+          </p:nvPr>
+        </p:nvSpPr>
+        <p:spPr>
+          <a:xfrm>
+            <a:off x="8029800" y="1604520"/>
+            <a:ext cx="3533040" cy="1896840"/>
+          </a:xfrm>
+          <a:prstGeom prst="rect">
+            <a:avLst/>
+          </a:prstGeom>
+          <a:noFill/>
+          <a:ln w="0">
+            <a:noFill/>
+          </a:ln>
+        </p:spPr>
+        <p:txBody>
+          <a:bodyPr lIns="0" rIns="0" tIns="0" bIns="0" anchor="t">
+            <a:normAutofit/>
+          </a:bodyPr>
+          <a:p>
+            <a:endParaRPr b="0" lang="en-US" sz="3200" spc="-1" strike="noStrike">
+              <a:latin typeface="Arial"/>
+            </a:endParaRPr>
+          </a:p>
+        </p:txBody>
+      </p:sp>
+      <p:sp>
+        <p:nvSpPr>
+          <p:cNvPr id="81" name="PlaceHolder 5"/>
+          <p:cNvSpPr>
+            <a:spLocks noGrp="1"/>
+          </p:cNvSpPr>
+          <p:nvPr>
+            <p:ph/>
+          </p:nvPr>
+        </p:nvSpPr>
+        <p:spPr>
+          <a:xfrm>
+            <a:off x="609480" y="3682080"/>
+            <a:ext cx="3533040" cy="1896840"/>
+          </a:xfrm>
+          <a:prstGeom prst="rect">
+            <a:avLst/>
+          </a:prstGeom>
+          <a:noFill/>
+          <a:ln w="0">
+            <a:noFill/>
+          </a:ln>
+        </p:spPr>
+        <p:txBody>
+          <a:bodyPr lIns="0" rIns="0" tIns="0" bIns="0" anchor="t">
+            <a:normAutofit/>
+          </a:bodyPr>
+          <a:p>
+            <a:endParaRPr b="0" lang="en-US" sz="3200" spc="-1" strike="noStrike">
+              <a:latin typeface="Arial"/>
+            </a:endParaRPr>
+          </a:p>
+        </p:txBody>
+      </p:sp>
+      <p:sp>
+        <p:nvSpPr>
+          <p:cNvPr id="82" name="PlaceHolder 6"/>
+          <p:cNvSpPr>
+            <a:spLocks noGrp="1"/>
+          </p:cNvSpPr>
+          <p:nvPr>
+            <p:ph/>
+          </p:nvPr>
+        </p:nvSpPr>
+        <p:spPr>
+          <a:xfrm>
+            <a:off x="4319640" y="3682080"/>
+            <a:ext cx="3533040" cy="1896840"/>
+          </a:xfrm>
+          <a:prstGeom prst="rect">
+            <a:avLst/>
+          </a:prstGeom>
+          <a:noFill/>
+          <a:ln w="0">
+            <a:noFill/>
+          </a:ln>
+        </p:spPr>
+        <p:txBody>
+          <a:bodyPr lIns="0" rIns="0" tIns="0" bIns="0" anchor="t">
+            <a:normAutofit/>
+          </a:bodyPr>
+          <a:p>
+            <a:endParaRPr b="0" lang="en-US" sz="3200" spc="-1" strike="noStrike">
+              <a:latin typeface="Arial"/>
+            </a:endParaRPr>
+          </a:p>
+        </p:txBody>
+      </p:sp>
+      <p:sp>
+        <p:nvSpPr>
+          <p:cNvPr id="83" name="PlaceHolder 7"/>
+          <p:cNvSpPr>
+            <a:spLocks noGrp="1"/>
+          </p:cNvSpPr>
+          <p:nvPr>
+            <p:ph/>
+          </p:nvPr>
+        </p:nvSpPr>
+        <p:spPr>
+          <a:xfrm>
+            <a:off x="8029800" y="3682080"/>
+            <a:ext cx="3533040" cy="1896840"/>
+          </a:xfrm>
+          <a:prstGeom prst="rect">
+            <a:avLst/>
+          </a:prstGeom>
+          <a:noFill/>
+          <a:ln w="0">
+            <a:noFill/>
+          </a:ln>
+        </p:spPr>
+        <p:txBody>
+          <a:bodyPr lIns="0" rIns="0" tIns="0" bIns="0" anchor="t">
+            <a:normAutofit/>
+          </a:bodyPr>
+          <a:p>
+            <a:endParaRPr b="0" lang="en-US" sz="3200" spc="-1" strike="noStrike">
+              <a:latin typeface="Arial"/>
+            </a:endParaRPr>
+          </a:p>
+        </p:txBody>
+      </p:sp>
+      <p:sp>
+        <p:nvSpPr>
+          <p:cNvPr id="9" name="PlaceHolder 8"/>
+          <p:cNvSpPr>
+            <a:spLocks noGrp="1"/>
+          </p:cNvSpPr>
+          <p:nvPr>
+            <p:ph type="ftr" idx="4"/>
+          </p:nvPr>
+        </p:nvSpPr>
+        <p:spPr/>
+        <p:txBody>
+          <a:bodyPr/>
+          <a:p>
+            <a:r>
+              <a:t>Footer</a:t>
+            </a:r>
+          </a:p>
+        </p:txBody>
+      </p:sp>
+      <p:sp>
+        <p:nvSpPr>
+          <p:cNvPr id="10" name="PlaceHolder 9"/>
+          <p:cNvSpPr>
+            <a:spLocks noGrp="1"/>
+          </p:cNvSpPr>
+          <p:nvPr>
+            <p:ph type="sldNum" idx="5"/>
+          </p:nvPr>
+        </p:nvSpPr>
+        <p:spPr/>
+        <p:txBody>
+          <a:bodyPr/>
+          <a:p>
+            <a:fld id="{ADE60FBF-43A0-4184-9BED-045CE4F7E31D}" type="slidenum">
+              <a:t>&lt;#&gt;</a:t>
+            </a:fld>
+          </a:p>
+        </p:txBody>
+      </p:sp>
+      <p:sp>
+        <p:nvSpPr>
+          <p:cNvPr id="11" name="PlaceHolder 10"/>
+          <p:cNvSpPr>
+            <a:spLocks noGrp="1"/>
+          </p:cNvSpPr>
+          <p:nvPr>
+            <p:ph type="dt" idx="6"/>
           </p:nvPr>
         </p:nvSpPr>
         <p:spPr/>
@@ -1202,8 +3315,8 @@
         </p:nvSpPr>
         <p:spPr>
           <a:xfrm>
-            <a:off x="1525680" y="2041560"/>
-            <a:ext cx="9143640" cy="1975320"/>
+            <a:off x="609480" y="273600"/>
+            <a:ext cx="10972440" cy="1144800"/>
           </a:xfrm>
           <a:prstGeom prst="rect">
             <a:avLst/>
@@ -1218,11 +3331,11 @@
             <a:noAutofit/>
           </a:bodyPr>
           <a:p>
-            <a:endParaRPr b="0" lang="es-ES" sz="1800" spc="-1" strike="noStrike">
-              <a:solidFill>
-                <a:srgbClr val="000000"/>
-              </a:solidFill>
-              <a:latin typeface="Calibri"/>
+            <a:pPr algn="ctr">
+              <a:buNone/>
+            </a:pPr>
+            <a:endParaRPr b="0" lang="en-US" sz="4400" spc="-1" strike="noStrike">
+              <a:latin typeface="Arial"/>
             </a:endParaRPr>
           </a:p>
         </p:txBody>
@@ -1239,8 +3352,8 @@
         </p:nvSpPr>
         <p:spPr>
           <a:xfrm>
-            <a:off x="0" y="0"/>
-            <a:ext cx="12191760" cy="6857640"/>
+            <a:off x="609480" y="1604520"/>
+            <a:ext cx="10972440" cy="3977280"/>
           </a:xfrm>
           <a:prstGeom prst="rect">
             <a:avLst/>
@@ -1255,20 +3368,8 @@
             <a:normAutofit/>
           </a:bodyPr>
           <a:p>
-            <a:pPr>
-              <a:lnSpc>
-                <a:spcPct val="90000"/>
-              </a:lnSpc>
-              <a:spcBef>
-                <a:spcPts val="1417"/>
-              </a:spcBef>
-              <a:buNone/>
-            </a:pPr>
-            <a:endParaRPr b="0" lang="es-ES" sz="2800" spc="-1" strike="noStrike">
-              <a:solidFill>
-                <a:srgbClr val="000000"/>
-              </a:solidFill>
-              <a:latin typeface="Calibri"/>
+            <a:endParaRPr b="0" lang="en-US" sz="3200" spc="-1" strike="noStrike">
+              <a:latin typeface="Arial"/>
             </a:endParaRPr>
           </a:p>
         </p:txBody>
@@ -1280,7 +3381,7 @@
             <a:spLocks noGrp="1"/>
           </p:cNvSpPr>
           <p:nvPr>
-            <p:ph type="ftr" idx="2"/>
+            <p:ph type="ftr" idx="1"/>
           </p:nvPr>
         </p:nvSpPr>
         <p:spPr/>
@@ -1300,14 +3401,14 @@
             <a:spLocks noGrp="1"/>
           </p:cNvSpPr>
           <p:nvPr>
-            <p:ph type="sldNum" idx="3"/>
+            <p:ph type="sldNum" idx="2"/>
           </p:nvPr>
         </p:nvSpPr>
         <p:spPr/>
         <p:txBody>
           <a:bodyPr/>
           <a:p>
-            <a:fld id="{6CEE903F-F1CB-4E4F-9C4C-44C38FBBD5A6}" type="slidenum">
+            <a:fld id="{3AEC71F0-65FD-4F00-B3C0-7004BB56F2B8}" type="slidenum">
               <a:t>&lt;#&gt;</a:t>
             </a:fld>
           </a:p>
@@ -1320,7 +3421,7 @@
             <a:spLocks noGrp="1"/>
           </p:cNvSpPr>
           <p:nvPr>
-            <p:ph type="dt" idx="1"/>
+            <p:ph type="dt" idx="3"/>
           </p:nvPr>
         </p:nvSpPr>
         <p:spPr/>
@@ -1368,8 +3469,8 @@
         </p:nvSpPr>
         <p:spPr>
           <a:xfrm>
-            <a:off x="1525680" y="2041560"/>
-            <a:ext cx="9143640" cy="1975320"/>
+            <a:off x="609480" y="273600"/>
+            <a:ext cx="10972440" cy="1144800"/>
           </a:xfrm>
           <a:prstGeom prst="rect">
             <a:avLst/>
@@ -1384,11 +3485,11 @@
             <a:noAutofit/>
           </a:bodyPr>
           <a:p>
-            <a:endParaRPr b="0" lang="es-ES" sz="1800" spc="-1" strike="noStrike">
-              <a:solidFill>
-                <a:srgbClr val="000000"/>
-              </a:solidFill>
-              <a:latin typeface="Calibri"/>
+            <a:pPr algn="ctr">
+              <a:buNone/>
+            </a:pPr>
+            <a:endParaRPr b="0" lang="en-US" sz="4400" spc="-1" strike="noStrike">
+              <a:latin typeface="Arial"/>
             </a:endParaRPr>
           </a:p>
         </p:txBody>
@@ -1405,8 +3506,8 @@
         </p:nvSpPr>
         <p:spPr>
           <a:xfrm>
-            <a:off x="0" y="0"/>
-            <a:ext cx="5949360" cy="6857640"/>
+            <a:off x="609480" y="1604520"/>
+            <a:ext cx="5354280" cy="3977280"/>
           </a:xfrm>
           <a:prstGeom prst="rect">
             <a:avLst/>
@@ -1421,20 +3522,8 @@
             <a:normAutofit/>
           </a:bodyPr>
           <a:p>
-            <a:pPr>
-              <a:lnSpc>
-                <a:spcPct val="90000"/>
-              </a:lnSpc>
-              <a:spcBef>
-                <a:spcPts val="1417"/>
-              </a:spcBef>
-              <a:buNone/>
-            </a:pPr>
-            <a:endParaRPr b="0" lang="es-ES" sz="2800" spc="-1" strike="noStrike">
-              <a:solidFill>
-                <a:srgbClr val="000000"/>
-              </a:solidFill>
-              <a:latin typeface="Calibri"/>
+            <a:endParaRPr b="0" lang="en-US" sz="3200" spc="-1" strike="noStrike">
+              <a:latin typeface="Arial"/>
             </a:endParaRPr>
           </a:p>
         </p:txBody>
@@ -1451,8 +3540,8 @@
         </p:nvSpPr>
         <p:spPr>
           <a:xfrm>
-            <a:off x="6247080" y="0"/>
-            <a:ext cx="5949360" cy="6857640"/>
+            <a:off x="6231960" y="1604520"/>
+            <a:ext cx="5354280" cy="3977280"/>
           </a:xfrm>
           <a:prstGeom prst="rect">
             <a:avLst/>
@@ -1467,20 +3556,8 @@
             <a:normAutofit/>
           </a:bodyPr>
           <a:p>
-            <a:pPr>
-              <a:lnSpc>
-                <a:spcPct val="90000"/>
-              </a:lnSpc>
-              <a:spcBef>
-                <a:spcPts val="1417"/>
-              </a:spcBef>
-              <a:buNone/>
-            </a:pPr>
-            <a:endParaRPr b="0" lang="es-ES" sz="2800" spc="-1" strike="noStrike">
-              <a:solidFill>
-                <a:srgbClr val="000000"/>
-              </a:solidFill>
-              <a:latin typeface="Calibri"/>
+            <a:endParaRPr b="0" lang="en-US" sz="3200" spc="-1" strike="noStrike">
+              <a:latin typeface="Arial"/>
             </a:endParaRPr>
           </a:p>
         </p:txBody>
@@ -1492,7 +3569,7 @@
             <a:spLocks noGrp="1"/>
           </p:cNvSpPr>
           <p:nvPr>
-            <p:ph type="ftr" idx="2"/>
+            <p:ph type="ftr" idx="1"/>
           </p:nvPr>
         </p:nvSpPr>
         <p:spPr/>
@@ -1512,14 +3589,14 @@
             <a:spLocks noGrp="1"/>
           </p:cNvSpPr>
           <p:nvPr>
-            <p:ph type="sldNum" idx="3"/>
+            <p:ph type="sldNum" idx="2"/>
           </p:nvPr>
         </p:nvSpPr>
         <p:spPr/>
         <p:txBody>
           <a:bodyPr/>
           <a:p>
-            <a:fld id="{F5ED619C-BE3F-4611-BD11-BD639CB3B5B0}" type="slidenum">
+            <a:fld id="{2F9EC6C7-3976-4A93-AC60-58654F745839}" type="slidenum">
               <a:t>&lt;#&gt;</a:t>
             </a:fld>
           </a:p>
@@ -1532,7 +3609,7 @@
             <a:spLocks noGrp="1"/>
           </p:cNvSpPr>
           <p:nvPr>
-            <p:ph type="dt" idx="1"/>
+            <p:ph type="dt" idx="3"/>
           </p:nvPr>
         </p:nvSpPr>
         <p:spPr/>
@@ -1580,8 +3657,8 @@
         </p:nvSpPr>
         <p:spPr>
           <a:xfrm>
-            <a:off x="1525680" y="2041560"/>
-            <a:ext cx="9143640" cy="1975320"/>
+            <a:off x="609480" y="273600"/>
+            <a:ext cx="10972440" cy="1144800"/>
           </a:xfrm>
           <a:prstGeom prst="rect">
             <a:avLst/>
@@ -1596,11 +3673,11 @@
             <a:noAutofit/>
           </a:bodyPr>
           <a:p>
-            <a:endParaRPr b="0" lang="es-ES" sz="1800" spc="-1" strike="noStrike">
-              <a:solidFill>
-                <a:srgbClr val="000000"/>
-              </a:solidFill>
-              <a:latin typeface="Calibri"/>
+            <a:pPr algn="ctr">
+              <a:buNone/>
+            </a:pPr>
+            <a:endParaRPr b="0" lang="en-US" sz="4400" spc="-1" strike="noStrike">
+              <a:latin typeface="Arial"/>
             </a:endParaRPr>
           </a:p>
         </p:txBody>
@@ -1612,7 +3689,7 @@
             <a:spLocks noGrp="1"/>
           </p:cNvSpPr>
           <p:nvPr>
-            <p:ph type="ftr" idx="2"/>
+            <p:ph type="ftr" idx="1"/>
           </p:nvPr>
         </p:nvSpPr>
         <p:spPr/>
@@ -1632,14 +3709,14 @@
             <a:spLocks noGrp="1"/>
           </p:cNvSpPr>
           <p:nvPr>
-            <p:ph type="sldNum" idx="3"/>
+            <p:ph type="sldNum" idx="2"/>
           </p:nvPr>
         </p:nvSpPr>
         <p:spPr/>
         <p:txBody>
           <a:bodyPr/>
           <a:p>
-            <a:fld id="{7DA01A1E-E8CF-4175-9956-A082E9E06B54}" type="slidenum">
+            <a:fld id="{1D8D1CEB-1873-4619-A13A-8A1841E3ECC3}" type="slidenum">
               <a:t>&lt;#&gt;</a:t>
             </a:fld>
           </a:p>
@@ -1652,7 +3729,7 @@
             <a:spLocks noGrp="1"/>
           </p:cNvSpPr>
           <p:nvPr>
-            <p:ph type="dt" idx="1"/>
+            <p:ph type="dt" idx="3"/>
           </p:nvPr>
         </p:nvSpPr>
         <p:spPr/>
@@ -1700,8 +3777,8 @@
         </p:nvSpPr>
         <p:spPr>
           <a:xfrm>
-            <a:off x="1525680" y="2041560"/>
-            <a:ext cx="9143640" cy="9157680"/>
+            <a:off x="609480" y="273600"/>
+            <a:ext cx="10972440" cy="5307840"/>
           </a:xfrm>
           <a:prstGeom prst="rect">
             <a:avLst/>
@@ -1732,7 +3809,7 @@
             <a:spLocks noGrp="1"/>
           </p:cNvSpPr>
           <p:nvPr>
-            <p:ph type="ftr" idx="2"/>
+            <p:ph type="ftr" idx="1"/>
           </p:nvPr>
         </p:nvSpPr>
         <p:spPr/>
@@ -1752,14 +3829,14 @@
             <a:spLocks noGrp="1"/>
           </p:cNvSpPr>
           <p:nvPr>
-            <p:ph type="sldNum" idx="3"/>
+            <p:ph type="sldNum" idx="2"/>
           </p:nvPr>
         </p:nvSpPr>
         <p:spPr/>
         <p:txBody>
           <a:bodyPr/>
           <a:p>
-            <a:fld id="{935F0F0F-6261-4B6F-8B96-41E7F2180C12}" type="slidenum">
+            <a:fld id="{5104CA57-DBE9-408E-996D-341D3910DA8B}" type="slidenum">
               <a:t>&lt;#&gt;</a:t>
             </a:fld>
           </a:p>
@@ -1772,7 +3849,7 @@
             <a:spLocks noGrp="1"/>
           </p:cNvSpPr>
           <p:nvPr>
-            <p:ph type="dt" idx="1"/>
+            <p:ph type="dt" idx="3"/>
           </p:nvPr>
         </p:nvSpPr>
         <p:spPr/>
@@ -1820,8 +3897,8 @@
         </p:nvSpPr>
         <p:spPr>
           <a:xfrm>
-            <a:off x="1525680" y="2041560"/>
-            <a:ext cx="9143640" cy="1975320"/>
+            <a:off x="609480" y="273600"/>
+            <a:ext cx="10972440" cy="1144800"/>
           </a:xfrm>
           <a:prstGeom prst="rect">
             <a:avLst/>
@@ -1836,11 +3913,11 @@
             <a:noAutofit/>
           </a:bodyPr>
           <a:p>
-            <a:endParaRPr b="0" lang="es-ES" sz="1800" spc="-1" strike="noStrike">
-              <a:solidFill>
-                <a:srgbClr val="000000"/>
-              </a:solidFill>
-              <a:latin typeface="Calibri"/>
+            <a:pPr algn="ctr">
+              <a:buNone/>
+            </a:pPr>
+            <a:endParaRPr b="0" lang="en-US" sz="4400" spc="-1" strike="noStrike">
+              <a:latin typeface="Arial"/>
             </a:endParaRPr>
           </a:p>
         </p:txBody>
@@ -1857,8 +3934,8 @@
         </p:nvSpPr>
         <p:spPr>
           <a:xfrm>
-            <a:off x="0" y="0"/>
-            <a:ext cx="5949360" cy="3270960"/>
+            <a:off x="609480" y="1604520"/>
+            <a:ext cx="5354280" cy="1896840"/>
           </a:xfrm>
           <a:prstGeom prst="rect">
             <a:avLst/>
@@ -1873,20 +3950,8 @@
             <a:normAutofit/>
           </a:bodyPr>
           <a:p>
-            <a:pPr>
-              <a:lnSpc>
-                <a:spcPct val="90000"/>
-              </a:lnSpc>
-              <a:spcBef>
-                <a:spcPts val="1417"/>
-              </a:spcBef>
-              <a:buNone/>
-            </a:pPr>
-            <a:endParaRPr b="0" lang="es-ES" sz="2800" spc="-1" strike="noStrike">
-              <a:solidFill>
-                <a:srgbClr val="000000"/>
-              </a:solidFill>
-              <a:latin typeface="Calibri"/>
+            <a:endParaRPr b="0" lang="en-US" sz="3200" spc="-1" strike="noStrike">
+              <a:latin typeface="Arial"/>
             </a:endParaRPr>
           </a:p>
         </p:txBody>
@@ -1903,8 +3968,8 @@
         </p:nvSpPr>
         <p:spPr>
           <a:xfrm>
-            <a:off x="6247080" y="0"/>
-            <a:ext cx="5949360" cy="6857640"/>
+            <a:off x="6231960" y="1604520"/>
+            <a:ext cx="5354280" cy="3977280"/>
           </a:xfrm>
           <a:prstGeom prst="rect">
             <a:avLst/>
@@ -1919,20 +3984,8 @@
             <a:normAutofit/>
           </a:bodyPr>
           <a:p>
-            <a:pPr>
-              <a:lnSpc>
-                <a:spcPct val="90000"/>
-              </a:lnSpc>
-              <a:spcBef>
-                <a:spcPts val="1417"/>
-              </a:spcBef>
-              <a:buNone/>
-            </a:pPr>
-            <a:endParaRPr b="0" lang="es-ES" sz="2800" spc="-1" strike="noStrike">
-              <a:solidFill>
-                <a:srgbClr val="000000"/>
-              </a:solidFill>
-              <a:latin typeface="Calibri"/>
+            <a:endParaRPr b="0" lang="en-US" sz="3200" spc="-1" strike="noStrike">
+              <a:latin typeface="Arial"/>
             </a:endParaRPr>
           </a:p>
         </p:txBody>
@@ -1949,8 +4002,8 @@
         </p:nvSpPr>
         <p:spPr>
           <a:xfrm>
-            <a:off x="0" y="3582000"/>
-            <a:ext cx="5949360" cy="3270960"/>
+            <a:off x="609480" y="3682080"/>
+            <a:ext cx="5354280" cy="1896840"/>
           </a:xfrm>
           <a:prstGeom prst="rect">
             <a:avLst/>
@@ -1965,20 +4018,8 @@
             <a:normAutofit/>
           </a:bodyPr>
           <a:p>
-            <a:pPr>
-              <a:lnSpc>
-                <a:spcPct val="90000"/>
-              </a:lnSpc>
-              <a:spcBef>
-                <a:spcPts val="1417"/>
-              </a:spcBef>
-              <a:buNone/>
-            </a:pPr>
-            <a:endParaRPr b="0" lang="es-ES" sz="2800" spc="-1" strike="noStrike">
-              <a:solidFill>
-                <a:srgbClr val="000000"/>
-              </a:solidFill>
-              <a:latin typeface="Calibri"/>
+            <a:endParaRPr b="0" lang="en-US" sz="3200" spc="-1" strike="noStrike">
+              <a:latin typeface="Arial"/>
             </a:endParaRPr>
           </a:p>
         </p:txBody>
@@ -1990,7 +4031,7 @@
             <a:spLocks noGrp="1"/>
           </p:cNvSpPr>
           <p:nvPr>
-            <p:ph type="ftr" idx="2"/>
+            <p:ph type="ftr" idx="1"/>
           </p:nvPr>
         </p:nvSpPr>
         <p:spPr/>
@@ -2010,14 +4051,14 @@
             <a:spLocks noGrp="1"/>
           </p:cNvSpPr>
           <p:nvPr>
-            <p:ph type="sldNum" idx="3"/>
+            <p:ph type="sldNum" idx="2"/>
           </p:nvPr>
         </p:nvSpPr>
         <p:spPr/>
         <p:txBody>
           <a:bodyPr/>
           <a:p>
-            <a:fld id="{94A60111-ED4A-40FC-9849-E1B4D3740DA1}" type="slidenum">
+            <a:fld id="{C65DBE2D-9F89-4CDC-AD05-CCA04AA1FBB9}" type="slidenum">
               <a:t>&lt;#&gt;</a:t>
             </a:fld>
           </a:p>
@@ -2030,7 +4071,7 @@
             <a:spLocks noGrp="1"/>
           </p:cNvSpPr>
           <p:nvPr>
-            <p:ph type="dt" idx="1"/>
+            <p:ph type="dt" idx="3"/>
           </p:nvPr>
         </p:nvSpPr>
         <p:spPr/>
@@ -2078,8 +4119,8 @@
         </p:nvSpPr>
         <p:spPr>
           <a:xfrm>
-            <a:off x="1525680" y="2041560"/>
-            <a:ext cx="9143640" cy="1975320"/>
+            <a:off x="609480" y="273600"/>
+            <a:ext cx="10972440" cy="1144800"/>
           </a:xfrm>
           <a:prstGeom prst="rect">
             <a:avLst/>
@@ -2094,11 +4135,11 @@
             <a:noAutofit/>
           </a:bodyPr>
           <a:p>
-            <a:endParaRPr b="0" lang="es-ES" sz="1800" spc="-1" strike="noStrike">
-              <a:solidFill>
-                <a:srgbClr val="000000"/>
-              </a:solidFill>
-              <a:latin typeface="Calibri"/>
+            <a:pPr algn="ctr">
+              <a:buNone/>
+            </a:pPr>
+            <a:endParaRPr b="0" lang="en-US" sz="4400" spc="-1" strike="noStrike">
+              <a:latin typeface="Arial"/>
             </a:endParaRPr>
           </a:p>
         </p:txBody>
@@ -2115,8 +4156,8 @@
         </p:nvSpPr>
         <p:spPr>
           <a:xfrm>
-            <a:off x="0" y="0"/>
-            <a:ext cx="5949360" cy="6857640"/>
+            <a:off x="609480" y="1604520"/>
+            <a:ext cx="5354280" cy="3977280"/>
           </a:xfrm>
           <a:prstGeom prst="rect">
             <a:avLst/>
@@ -2131,20 +4172,8 @@
             <a:normAutofit/>
           </a:bodyPr>
           <a:p>
-            <a:pPr>
-              <a:lnSpc>
-                <a:spcPct val="90000"/>
-              </a:lnSpc>
-              <a:spcBef>
-                <a:spcPts val="1417"/>
-              </a:spcBef>
-              <a:buNone/>
-            </a:pPr>
-            <a:endParaRPr b="0" lang="es-ES" sz="2800" spc="-1" strike="noStrike">
-              <a:solidFill>
-                <a:srgbClr val="000000"/>
-              </a:solidFill>
-              <a:latin typeface="Calibri"/>
+            <a:endParaRPr b="0" lang="en-US" sz="3200" spc="-1" strike="noStrike">
+              <a:latin typeface="Arial"/>
             </a:endParaRPr>
           </a:p>
         </p:txBody>
@@ -2161,8 +4190,8 @@
         </p:nvSpPr>
         <p:spPr>
           <a:xfrm>
-            <a:off x="6247080" y="0"/>
-            <a:ext cx="5949360" cy="3270960"/>
+            <a:off x="6231960" y="1604520"/>
+            <a:ext cx="5354280" cy="1896840"/>
           </a:xfrm>
           <a:prstGeom prst="rect">
             <a:avLst/>
@@ -2177,20 +4206,8 @@
             <a:normAutofit/>
           </a:bodyPr>
           <a:p>
-            <a:pPr>
-              <a:lnSpc>
-                <a:spcPct val="90000"/>
-              </a:lnSpc>
-              <a:spcBef>
-                <a:spcPts val="1417"/>
-              </a:spcBef>
-              <a:buNone/>
-            </a:pPr>
-            <a:endParaRPr b="0" lang="es-ES" sz="2800" spc="-1" strike="noStrike">
-              <a:solidFill>
-                <a:srgbClr val="000000"/>
-              </a:solidFill>
-              <a:latin typeface="Calibri"/>
+            <a:endParaRPr b="0" lang="en-US" sz="3200" spc="-1" strike="noStrike">
+              <a:latin typeface="Arial"/>
             </a:endParaRPr>
           </a:p>
         </p:txBody>
@@ -2207,8 +4224,8 @@
         </p:nvSpPr>
         <p:spPr>
           <a:xfrm>
-            <a:off x="6247080" y="3582000"/>
-            <a:ext cx="5949360" cy="3270960"/>
+            <a:off x="6231960" y="3682080"/>
+            <a:ext cx="5354280" cy="1896840"/>
           </a:xfrm>
           <a:prstGeom prst="rect">
             <a:avLst/>
@@ -2223,20 +4240,8 @@
             <a:normAutofit/>
           </a:bodyPr>
           <a:p>
-            <a:pPr>
-              <a:lnSpc>
-                <a:spcPct val="90000"/>
-              </a:lnSpc>
-              <a:spcBef>
-                <a:spcPts val="1417"/>
-              </a:spcBef>
-              <a:buNone/>
-            </a:pPr>
-            <a:endParaRPr b="0" lang="es-ES" sz="2800" spc="-1" strike="noStrike">
-              <a:solidFill>
-                <a:srgbClr val="000000"/>
-              </a:solidFill>
-              <a:latin typeface="Calibri"/>
+            <a:endParaRPr b="0" lang="en-US" sz="3200" spc="-1" strike="noStrike">
+              <a:latin typeface="Arial"/>
             </a:endParaRPr>
           </a:p>
         </p:txBody>
@@ -2248,7 +4253,7 @@
             <a:spLocks noGrp="1"/>
           </p:cNvSpPr>
           <p:nvPr>
-            <p:ph type="ftr" idx="2"/>
+            <p:ph type="ftr" idx="1"/>
           </p:nvPr>
         </p:nvSpPr>
         <p:spPr/>
@@ -2268,14 +4273,14 @@
             <a:spLocks noGrp="1"/>
           </p:cNvSpPr>
           <p:nvPr>
-            <p:ph type="sldNum" idx="3"/>
+            <p:ph type="sldNum" idx="2"/>
           </p:nvPr>
         </p:nvSpPr>
         <p:spPr/>
         <p:txBody>
           <a:bodyPr/>
           <a:p>
-            <a:fld id="{101D4856-46E7-4D2A-B10C-A73C826A0088}" type="slidenum">
+            <a:fld id="{5567A8B5-800F-44FA-9B9A-A6389EDCF6DE}" type="slidenum">
               <a:t>&lt;#&gt;</a:t>
             </a:fld>
           </a:p>
@@ -2288,7 +4293,7 @@
             <a:spLocks noGrp="1"/>
           </p:cNvSpPr>
           <p:nvPr>
-            <p:ph type="dt" idx="1"/>
+            <p:ph type="dt" idx="3"/>
           </p:nvPr>
         </p:nvSpPr>
         <p:spPr/>
@@ -2336,8 +4341,8 @@
         </p:nvSpPr>
         <p:spPr>
           <a:xfrm>
-            <a:off x="1525680" y="2041560"/>
-            <a:ext cx="9143640" cy="1975320"/>
+            <a:off x="609480" y="273600"/>
+            <a:ext cx="10972440" cy="1144800"/>
           </a:xfrm>
           <a:prstGeom prst="rect">
             <a:avLst/>
@@ -2352,11 +4357,11 @@
             <a:noAutofit/>
           </a:bodyPr>
           <a:p>
-            <a:endParaRPr b="0" lang="es-ES" sz="1800" spc="-1" strike="noStrike">
-              <a:solidFill>
-                <a:srgbClr val="000000"/>
-              </a:solidFill>
-              <a:latin typeface="Calibri"/>
+            <a:pPr algn="ctr">
+              <a:buNone/>
+            </a:pPr>
+            <a:endParaRPr b="0" lang="en-US" sz="4400" spc="-1" strike="noStrike">
+              <a:latin typeface="Arial"/>
             </a:endParaRPr>
           </a:p>
         </p:txBody>
@@ -2373,8 +4378,8 @@
         </p:nvSpPr>
         <p:spPr>
           <a:xfrm>
-            <a:off x="0" y="0"/>
-            <a:ext cx="5949360" cy="3270960"/>
+            <a:off x="609480" y="1604520"/>
+            <a:ext cx="5354280" cy="1896840"/>
           </a:xfrm>
           <a:prstGeom prst="rect">
             <a:avLst/>
@@ -2389,20 +4394,8 @@
             <a:normAutofit/>
           </a:bodyPr>
           <a:p>
-            <a:pPr>
-              <a:lnSpc>
-                <a:spcPct val="90000"/>
-              </a:lnSpc>
-              <a:spcBef>
-                <a:spcPts val="1417"/>
-              </a:spcBef>
-              <a:buNone/>
-            </a:pPr>
-            <a:endParaRPr b="0" lang="es-ES" sz="2800" spc="-1" strike="noStrike">
-              <a:solidFill>
-                <a:srgbClr val="000000"/>
-              </a:solidFill>
-              <a:latin typeface="Calibri"/>
+            <a:endParaRPr b="0" lang="en-US" sz="3200" spc="-1" strike="noStrike">
+              <a:latin typeface="Arial"/>
             </a:endParaRPr>
           </a:p>
         </p:txBody>
@@ -2419,8 +4412,8 @@
         </p:nvSpPr>
         <p:spPr>
           <a:xfrm>
-            <a:off x="6247080" y="0"/>
-            <a:ext cx="5949360" cy="3270960"/>
+            <a:off x="6231960" y="1604520"/>
+            <a:ext cx="5354280" cy="1896840"/>
           </a:xfrm>
           <a:prstGeom prst="rect">
             <a:avLst/>
@@ -2435,20 +4428,8 @@
             <a:normAutofit/>
           </a:bodyPr>
           <a:p>
-            <a:pPr>
-              <a:lnSpc>
-                <a:spcPct val="90000"/>
-              </a:lnSpc>
-              <a:spcBef>
-                <a:spcPts val="1417"/>
-              </a:spcBef>
-              <a:buNone/>
-            </a:pPr>
-            <a:endParaRPr b="0" lang="es-ES" sz="2800" spc="-1" strike="noStrike">
-              <a:solidFill>
-                <a:srgbClr val="000000"/>
-              </a:solidFill>
-              <a:latin typeface="Calibri"/>
+            <a:endParaRPr b="0" lang="en-US" sz="3200" spc="-1" strike="noStrike">
+              <a:latin typeface="Arial"/>
             </a:endParaRPr>
           </a:p>
         </p:txBody>
@@ -2465,8 +4446,8 @@
         </p:nvSpPr>
         <p:spPr>
           <a:xfrm>
-            <a:off x="0" y="3582000"/>
-            <a:ext cx="12191760" cy="3270960"/>
+            <a:off x="609480" y="3682080"/>
+            <a:ext cx="10972440" cy="1896840"/>
           </a:xfrm>
           <a:prstGeom prst="rect">
             <a:avLst/>
@@ -2481,20 +4462,8 @@
             <a:normAutofit/>
           </a:bodyPr>
           <a:p>
-            <a:pPr>
-              <a:lnSpc>
-                <a:spcPct val="90000"/>
-              </a:lnSpc>
-              <a:spcBef>
-                <a:spcPts val="1417"/>
-              </a:spcBef>
-              <a:buNone/>
-            </a:pPr>
-            <a:endParaRPr b="0" lang="es-ES" sz="2800" spc="-1" strike="noStrike">
-              <a:solidFill>
-                <a:srgbClr val="000000"/>
-              </a:solidFill>
-              <a:latin typeface="Calibri"/>
+            <a:endParaRPr b="0" lang="en-US" sz="3200" spc="-1" strike="noStrike">
+              <a:latin typeface="Arial"/>
             </a:endParaRPr>
           </a:p>
         </p:txBody>
@@ -2506,7 +4475,7 @@
             <a:spLocks noGrp="1"/>
           </p:cNvSpPr>
           <p:nvPr>
-            <p:ph type="ftr" idx="2"/>
+            <p:ph type="ftr" idx="1"/>
           </p:nvPr>
         </p:nvSpPr>
         <p:spPr/>
@@ -2526,14 +4495,14 @@
             <a:spLocks noGrp="1"/>
           </p:cNvSpPr>
           <p:nvPr>
-            <p:ph type="sldNum" idx="3"/>
+            <p:ph type="sldNum" idx="2"/>
           </p:nvPr>
         </p:nvSpPr>
         <p:spPr/>
         <p:txBody>
           <a:bodyPr/>
           <a:p>
-            <a:fld id="{F982A27F-E711-4B57-B1A4-E97F9F2CFA0A}" type="slidenum">
+            <a:fld id="{77B2F713-7158-4C2B-801F-61669745AE93}" type="slidenum">
               <a:t>&lt;#&gt;</a:t>
             </a:fld>
           </a:p>
@@ -2546,7 +4515,7 @@
             <a:spLocks noGrp="1"/>
           </p:cNvSpPr>
           <p:nvPr>
-            <p:ph type="dt" idx="1"/>
+            <p:ph type="dt" idx="3"/>
           </p:nvPr>
         </p:nvSpPr>
         <p:spPr/>
@@ -2589,396 +4558,101 @@
           <a:chExt cx="0" cy="0"/>
         </a:xfrm>
       </p:grpSpPr>
-      <p:sp>
-        <p:nvSpPr>
-          <p:cNvPr id="0" name="PlaceHolder 1"/>
-          <p:cNvSpPr>
-            <a:spLocks noGrp="1"/>
-          </p:cNvSpPr>
-          <p:nvPr>
-            <p:ph type="body"/>
-          </p:nvPr>
-        </p:nvSpPr>
-        <p:spPr>
-          <a:xfrm>
-            <a:off x="0" y="0"/>
-            <a:ext cx="12191760" cy="6857640"/>
-          </a:xfrm>
-          <a:prstGeom prst="rect">
-            <a:avLst/>
-          </a:prstGeom>
-          <a:noFill/>
-          <a:ln w="0">
-            <a:noFill/>
-          </a:ln>
-        </p:spPr>
-        <p:txBody>
-          <a:bodyPr lIns="0" rIns="0" tIns="0" bIns="0" anchor="t">
-            <a:normAutofit/>
-          </a:bodyPr>
-          <a:p>
-            <a:pPr marL="432000" indent="-324000">
-              <a:lnSpc>
-                <a:spcPct val="90000"/>
-              </a:lnSpc>
-              <a:spcBef>
-                <a:spcPts val="1417"/>
-              </a:spcBef>
-              <a:buClr>
-                <a:srgbClr val="000000"/>
-              </a:buClr>
-              <a:buSzPct val="45000"/>
-              <a:buFont typeface="Wingdings" charset="2"/>
-              <a:buChar char=""/>
-            </a:pPr>
-            <a:r>
-              <a:rPr b="0" lang="es-ES" sz="2800" spc="-1" strike="noStrike">
-                <a:solidFill>
-                  <a:srgbClr val="000000"/>
-                </a:solidFill>
-                <a:latin typeface="Calibri"/>
+      <p:pic>
+        <p:nvPicPr>
+          <p:cNvPr id="0" name="Imagen 7" descr="Imagen que contiene objeto, luz, reloj, tráfico&#10;&#10;Descripción generada automáticamente"/>
+          <p:cNvPicPr/>
+          <p:nvPr/>
+        </p:nvPicPr>
+        <p:blipFill>
+          <a:blip r:embed="rId2"/>
+          <a:stretch/>
+        </p:blipFill>
+        <p:spPr>
+          <a:xfrm>
+            <a:off x="11279880" y="253440"/>
+            <a:ext cx="530280" cy="584280"/>
+          </a:xfrm>
+          <a:prstGeom prst="rect">
+            <a:avLst/>
+          </a:prstGeom>
+          <a:ln w="0">
+            <a:noFill/>
+          </a:ln>
+        </p:spPr>
+      </p:pic>
+      <p:sp>
+        <p:nvSpPr>
+          <p:cNvPr id="1" name="PlaceHolder 1"/>
+          <p:cNvSpPr>
+            <a:spLocks noGrp="1"/>
+          </p:cNvSpPr>
+          <p:nvPr>
+            <p:ph type="title"/>
+          </p:nvPr>
+        </p:nvSpPr>
+        <p:spPr>
+          <a:xfrm>
+            <a:off x="1525680" y="2041560"/>
+            <a:ext cx="9143280" cy="1974960"/>
+          </a:xfrm>
+          <a:prstGeom prst="rect">
+            <a:avLst/>
+          </a:prstGeom>
+          <a:noFill/>
+          <a:ln w="0">
+            <a:noFill/>
+          </a:ln>
+        </p:spPr>
+        <p:txBody>
+          <a:bodyPr lIns="0" rIns="0" tIns="0" bIns="0" anchor="ctr">
+            <a:noAutofit/>
+          </a:bodyPr>
+          <a:p>
+            <a:r>
+              <a:rPr b="0" lang="en-US" sz="1800" spc="-1" strike="noStrike">
+                <a:latin typeface="Arial"/>
               </a:rPr>
-              <a:t>Click to edit the outline text format</a:t>
-            </a:r>
-            <a:endParaRPr b="0" lang="es-ES" sz="2800" spc="-1" strike="noStrike">
-              <a:solidFill>
-                <a:srgbClr val="000000"/>
-              </a:solidFill>
-              <a:latin typeface="Calibri"/>
-            </a:endParaRPr>
-          </a:p>
-          <a:p>
-            <a:pPr lvl="1" marL="864000" indent="-324000">
-              <a:lnSpc>
-                <a:spcPct val="90000"/>
-              </a:lnSpc>
-              <a:spcBef>
-                <a:spcPts val="1134"/>
-              </a:spcBef>
-              <a:buClr>
-                <a:srgbClr val="000000"/>
-              </a:buClr>
-              <a:buSzPct val="75000"/>
-              <a:buFont typeface="Symbol" charset="2"/>
-              <a:buChar char=""/>
-            </a:pPr>
-            <a:r>
-              <a:rPr b="0" lang="es-ES" sz="2000" spc="-1" strike="noStrike">
-                <a:solidFill>
-                  <a:srgbClr val="000000"/>
-                </a:solidFill>
-                <a:latin typeface="Calibri"/>
-              </a:rPr>
-              <a:t>Second Outline Level</a:t>
-            </a:r>
-            <a:endParaRPr b="0" lang="es-ES" sz="2000" spc="-1" strike="noStrike">
-              <a:solidFill>
-                <a:srgbClr val="000000"/>
-              </a:solidFill>
-              <a:latin typeface="Calibri"/>
-            </a:endParaRPr>
-          </a:p>
-          <a:p>
-            <a:pPr lvl="2" marL="1296000" indent="-288000">
-              <a:lnSpc>
-                <a:spcPct val="90000"/>
-              </a:lnSpc>
-              <a:spcBef>
-                <a:spcPts val="850"/>
-              </a:spcBef>
-              <a:buClr>
-                <a:srgbClr val="000000"/>
-              </a:buClr>
-              <a:buSzPct val="45000"/>
-              <a:buFont typeface="Wingdings" charset="2"/>
-              <a:buChar char=""/>
-            </a:pPr>
-            <a:r>
-              <a:rPr b="0" lang="es-ES" sz="1800" spc="-1" strike="noStrike">
-                <a:solidFill>
-                  <a:srgbClr val="000000"/>
-                </a:solidFill>
-                <a:latin typeface="Calibri"/>
-              </a:rPr>
-              <a:t>Third Outline Level</a:t>
-            </a:r>
-            <a:endParaRPr b="0" lang="es-ES" sz="1800" spc="-1" strike="noStrike">
-              <a:solidFill>
-                <a:srgbClr val="000000"/>
-              </a:solidFill>
-              <a:latin typeface="Calibri"/>
-            </a:endParaRPr>
-          </a:p>
-          <a:p>
-            <a:pPr lvl="3" marL="1728000" indent="-216000">
-              <a:lnSpc>
-                <a:spcPct val="90000"/>
-              </a:lnSpc>
-              <a:spcBef>
-                <a:spcPts val="567"/>
-              </a:spcBef>
-              <a:buClr>
-                <a:srgbClr val="000000"/>
-              </a:buClr>
-              <a:buSzPct val="75000"/>
-              <a:buFont typeface="Symbol" charset="2"/>
-              <a:buChar char=""/>
-            </a:pPr>
-            <a:r>
-              <a:rPr b="0" lang="es-ES" sz="1800" spc="-1" strike="noStrike">
-                <a:solidFill>
-                  <a:srgbClr val="000000"/>
-                </a:solidFill>
-                <a:latin typeface="Calibri"/>
-              </a:rPr>
-              <a:t>Fourth Outline Level</a:t>
-            </a:r>
-            <a:endParaRPr b="0" lang="es-ES" sz="1800" spc="-1" strike="noStrike">
-              <a:solidFill>
-                <a:srgbClr val="000000"/>
-              </a:solidFill>
-              <a:latin typeface="Calibri"/>
-            </a:endParaRPr>
-          </a:p>
-          <a:p>
-            <a:pPr lvl="4" marL="2160000" indent="-216000">
-              <a:lnSpc>
-                <a:spcPct val="90000"/>
-              </a:lnSpc>
-              <a:spcBef>
-                <a:spcPts val="283"/>
-              </a:spcBef>
-              <a:buClr>
-                <a:srgbClr val="000000"/>
-              </a:buClr>
-              <a:buSzPct val="45000"/>
-              <a:buFont typeface="Wingdings" charset="2"/>
-              <a:buChar char=""/>
-            </a:pPr>
-            <a:r>
-              <a:rPr b="0" lang="es-ES" sz="2000" spc="-1" strike="noStrike">
-                <a:solidFill>
-                  <a:srgbClr val="000000"/>
-                </a:solidFill>
-                <a:latin typeface="Calibri"/>
-              </a:rPr>
-              <a:t>Fifth Outline Level</a:t>
-            </a:r>
-            <a:endParaRPr b="0" lang="es-ES" sz="2000" spc="-1" strike="noStrike">
-              <a:solidFill>
-                <a:srgbClr val="000000"/>
-              </a:solidFill>
-              <a:latin typeface="Calibri"/>
-            </a:endParaRPr>
-          </a:p>
-          <a:p>
-            <a:pPr lvl="5" marL="2592000" indent="-216000">
-              <a:lnSpc>
-                <a:spcPct val="90000"/>
-              </a:lnSpc>
-              <a:spcBef>
-                <a:spcPts val="283"/>
-              </a:spcBef>
-              <a:buClr>
-                <a:srgbClr val="000000"/>
-              </a:buClr>
-              <a:buSzPct val="45000"/>
-              <a:buFont typeface="Wingdings" charset="2"/>
-              <a:buChar char=""/>
-            </a:pPr>
-            <a:r>
-              <a:rPr b="0" lang="es-ES" sz="2000" spc="-1" strike="noStrike">
-                <a:solidFill>
-                  <a:srgbClr val="000000"/>
-                </a:solidFill>
-                <a:latin typeface="Calibri"/>
-              </a:rPr>
-              <a:t>Sixth Outline Level</a:t>
-            </a:r>
-            <a:endParaRPr b="0" lang="es-ES" sz="2000" spc="-1" strike="noStrike">
-              <a:solidFill>
-                <a:srgbClr val="000000"/>
-              </a:solidFill>
-              <a:latin typeface="Calibri"/>
-            </a:endParaRPr>
-          </a:p>
-          <a:p>
-            <a:pPr lvl="6" marL="3024000" indent="-216000">
-              <a:lnSpc>
-                <a:spcPct val="90000"/>
-              </a:lnSpc>
-              <a:spcBef>
-                <a:spcPts val="283"/>
-              </a:spcBef>
-              <a:buClr>
-                <a:srgbClr val="000000"/>
-              </a:buClr>
-              <a:buSzPct val="45000"/>
-              <a:buFont typeface="Wingdings" charset="2"/>
-              <a:buChar char=""/>
-            </a:pPr>
-            <a:r>
-              <a:rPr b="0" lang="es-ES" sz="2000" spc="-1" strike="noStrike">
-                <a:solidFill>
-                  <a:srgbClr val="000000"/>
-                </a:solidFill>
-                <a:latin typeface="Calibri"/>
-              </a:rPr>
-              <a:t>Seventh Outline Level</a:t>
-            </a:r>
-            <a:endParaRPr b="0" lang="es-ES" sz="2000" spc="-1" strike="noStrike">
-              <a:solidFill>
-                <a:srgbClr val="000000"/>
-              </a:solidFill>
-              <a:latin typeface="Calibri"/>
-            </a:endParaRPr>
-          </a:p>
-        </p:txBody>
-      </p:sp>
-      <p:sp>
-        <p:nvSpPr>
-          <p:cNvPr id="1" name="PlaceHolder 2"/>
-          <p:cNvSpPr>
-            <a:spLocks noGrp="1"/>
-          </p:cNvSpPr>
-          <p:nvPr>
-            <p:ph type="title"/>
-          </p:nvPr>
-        </p:nvSpPr>
-        <p:spPr>
-          <a:xfrm>
-            <a:off x="1525680" y="2041560"/>
-            <a:ext cx="9143640" cy="1975320"/>
-          </a:xfrm>
-          <a:prstGeom prst="rect">
-            <a:avLst/>
-          </a:prstGeom>
-          <a:noFill/>
-          <a:ln w="0">
-            <a:noFill/>
-          </a:ln>
-        </p:spPr>
-        <p:txBody>
-          <a:bodyPr anchor="b">
+              <a:t>Click to edit the title text format</a:t>
+            </a:r>
+            <a:endParaRPr b="0" lang="en-US" sz="1800" spc="-1" strike="noStrike">
+              <a:latin typeface="Arial"/>
+            </a:endParaRPr>
+          </a:p>
+        </p:txBody>
+      </p:sp>
+      <p:sp>
+        <p:nvSpPr>
+          <p:cNvPr id="2" name="PlaceHolder 2"/>
+          <p:cNvSpPr>
+            <a:spLocks noGrp="1"/>
+          </p:cNvSpPr>
+          <p:nvPr>
+            <p:ph type="ftr" idx="1"/>
+          </p:nvPr>
+        </p:nvSpPr>
+        <p:spPr>
+          <a:xfrm>
+            <a:off x="4038480" y="6356520"/>
+            <a:ext cx="4114080" cy="364320"/>
+          </a:xfrm>
+          <a:prstGeom prst="rect">
+            <a:avLst/>
+          </a:prstGeom>
+          <a:noFill/>
+          <a:ln w="0">
+            <a:noFill/>
+          </a:ln>
+        </p:spPr>
+        <p:txBody>
+          <a:bodyPr lIns="90000" rIns="90000" tIns="45000" bIns="45000" anchor="ctr">
             <a:noAutofit/>
           </a:bodyPr>
-          <a:p>
-            <a:pPr algn="ctr">
-              <a:lnSpc>
-                <a:spcPct val="90000"/>
-              </a:lnSpc>
-              <a:buNone/>
-            </a:pPr>
-            <a:r>
-              <a:rPr b="1" lang="en-US" sz="11500" spc="-1" strike="noStrike">
-                <a:solidFill>
-                  <a:srgbClr val="e7e6e6"/>
-                </a:solidFill>
-                <a:latin typeface="Calibri Light"/>
-              </a:rPr>
-              <a:t>Click to edit</a:t>
-            </a:r>
-            <a:endParaRPr b="0" lang="es-ES" sz="11500" spc="-1" strike="noStrike">
-              <a:solidFill>
-                <a:srgbClr val="000000"/>
-              </a:solidFill>
-              <a:latin typeface="Calibri"/>
-            </a:endParaRPr>
-          </a:p>
-        </p:txBody>
-      </p:sp>
-      <p:sp>
-        <p:nvSpPr>
-          <p:cNvPr id="2" name="PlaceHolder 3"/>
-          <p:cNvSpPr>
-            <a:spLocks noGrp="1"/>
-          </p:cNvSpPr>
-          <p:nvPr>
-            <p:ph type="dt" idx="1"/>
-          </p:nvPr>
-        </p:nvSpPr>
-        <p:spPr>
-          <a:xfrm>
-            <a:off x="838080" y="6356520"/>
-            <a:ext cx="2742840" cy="364680"/>
-          </a:xfrm>
-          <a:prstGeom prst="rect">
-            <a:avLst/>
-          </a:prstGeom>
-          <a:noFill/>
-          <a:ln w="0">
-            <a:noFill/>
-          </a:ln>
-        </p:spPr>
-        <p:txBody>
-          <a:bodyPr anchor="ctr">
-            <a:noAutofit/>
-          </a:bodyPr>
           <a:lstStyle>
-            <a:lvl1pPr>
+            <a:lvl1pPr algn="ctr">
               <a:lnSpc>
                 <a:spcPct val="100000"/>
               </a:lnSpc>
-              <a:buNone/>
-              <a:defRPr b="0" lang="en-US" sz="1200" spc="-1" strike="noStrike">
-                <a:solidFill>
-                  <a:srgbClr val="8b8b8b"/>
-                </a:solidFill>
-                <a:latin typeface="Calibri"/>
-              </a:defRPr>
-            </a:lvl1pPr>
-          </a:lstStyle>
-          <a:p>
-            <a:pPr>
-              <a:lnSpc>
-                <a:spcPct val="100000"/>
-              </a:lnSpc>
-              <a:buNone/>
-            </a:pPr>
-            <a:r>
-              <a:rPr b="0" lang="en-US" sz="1200" spc="-1" strike="noStrike">
-                <a:solidFill>
-                  <a:srgbClr val="8b8b8b"/>
-                </a:solidFill>
-                <a:latin typeface="Calibri"/>
-              </a:rPr>
-              <a:t>&lt;date/time&gt;</a:t>
-            </a:r>
-            <a:endParaRPr b="0" lang="en-US" sz="1200" spc="-1" strike="noStrike">
-              <a:latin typeface="Times New Roman"/>
-            </a:endParaRPr>
-          </a:p>
-        </p:txBody>
-      </p:sp>
-      <p:sp>
-        <p:nvSpPr>
-          <p:cNvPr id="3" name="PlaceHolder 4"/>
-          <p:cNvSpPr>
-            <a:spLocks noGrp="1"/>
-          </p:cNvSpPr>
-          <p:nvPr>
-            <p:ph type="ftr" idx="2"/>
-          </p:nvPr>
-        </p:nvSpPr>
-        <p:spPr>
-          <a:xfrm>
-            <a:off x="4038480" y="6356520"/>
-            <a:ext cx="4114440" cy="364680"/>
-          </a:xfrm>
-          <a:prstGeom prst="rect">
-            <a:avLst/>
-          </a:prstGeom>
-          <a:noFill/>
-          <a:ln w="0">
-            <a:noFill/>
-          </a:ln>
-        </p:spPr>
-        <p:txBody>
-          <a:bodyPr anchor="ctr">
-            <a:noAutofit/>
-          </a:bodyPr>
-          <a:lstStyle>
-            <a:lvl1pPr algn="ctr">
               <a:buNone/>
               <a:defRPr b="0" lang="en-US" sz="1400" spc="-1" strike="noStrike">
                 <a:latin typeface="Times New Roman"/>
@@ -2987,13 +4661,16 @@
           </a:lstStyle>
           <a:p>
             <a:pPr algn="ctr">
+              <a:lnSpc>
+                <a:spcPct val="100000"/>
+              </a:lnSpc>
               <a:buNone/>
             </a:pPr>
             <a:r>
               <a:rPr b="0" lang="en-US" sz="1400" spc="-1" strike="noStrike">
                 <a:latin typeface="Times New Roman"/>
               </a:rPr>
-              <a:t>&lt;footer&gt;</a:t>
+              <a:t> </a:t>
             </a:r>
             <a:endParaRPr b="0" lang="en-US" sz="1400" spc="-1" strike="noStrike">
               <a:latin typeface="Times New Roman"/>
@@ -3003,29 +4680,29 @@
       </p:sp>
       <p:sp>
         <p:nvSpPr>
-          <p:cNvPr id="4" name="PlaceHolder 5"/>
-          <p:cNvSpPr>
-            <a:spLocks noGrp="1"/>
-          </p:cNvSpPr>
-          <p:nvPr>
-            <p:ph type="sldNum" idx="3"/>
+          <p:cNvPr id="3" name="PlaceHolder 3"/>
+          <p:cNvSpPr>
+            <a:spLocks noGrp="1"/>
+          </p:cNvSpPr>
+          <p:nvPr>
+            <p:ph type="sldNum" idx="2"/>
           </p:nvPr>
         </p:nvSpPr>
         <p:spPr>
           <a:xfrm>
             <a:off x="8610480" y="6356520"/>
-            <a:ext cx="2742840" cy="364680"/>
-          </a:xfrm>
-          <a:prstGeom prst="rect">
-            <a:avLst/>
-          </a:prstGeom>
-          <a:noFill/>
-          <a:ln w="0">
-            <a:noFill/>
-          </a:ln>
-        </p:spPr>
-        <p:txBody>
-          <a:bodyPr anchor="ctr">
+            <a:ext cx="2742480" cy="364320"/>
+          </a:xfrm>
+          <a:prstGeom prst="rect">
+            <a:avLst/>
+          </a:prstGeom>
+          <a:noFill/>
+          <a:ln w="0">
+            <a:noFill/>
+          </a:ln>
+        </p:spPr>
+        <p:txBody>
+          <a:bodyPr lIns="90000" rIns="90000" tIns="45000" bIns="45000" anchor="ctr">
             <a:noAutofit/>
           </a:bodyPr>
           <a:lstStyle>
@@ -3049,14 +4726,14 @@
               </a:lnSpc>
               <a:buNone/>
             </a:pPr>
-            <a:fld id="{0437BFC3-74DC-4B30-8E3A-EFAA4D388DD2}" type="slidenum">
+            <a:fld id="{E28FEC90-E577-4D4D-ADCA-0C32C284E760}" type="slidenum">
               <a:rPr b="0" lang="en-US" sz="1200" spc="-1" strike="noStrike">
                 <a:solidFill>
                   <a:srgbClr val="8b8b8b"/>
                 </a:solidFill>
                 <a:latin typeface="Calibri"/>
               </a:rPr>
-              <a:t>&lt;number&gt;</a:t>
+              <a:t>10</a:t>
             </a:fld>
             <a:endParaRPr b="0" lang="en-US" sz="1200" spc="-1" strike="noStrike">
               <a:latin typeface="Times New Roman"/>
@@ -3064,29 +4741,236 @@
           </a:p>
         </p:txBody>
       </p:sp>
-      <p:pic>
-        <p:nvPicPr>
-          <p:cNvPr id="5" name="Imagen 7" descr="Imagen que contiene objeto, luz, reloj, tráfico&#10;&#10;Descripción generada automáticamente"/>
-          <p:cNvPicPr/>
-          <p:nvPr/>
-        </p:nvPicPr>
-        <p:blipFill>
-          <a:blip r:embed="rId2"/>
-          <a:stretch/>
-        </p:blipFill>
-        <p:spPr>
-          <a:xfrm>
-            <a:off x="11279880" y="253440"/>
-            <a:ext cx="530640" cy="584640"/>
-          </a:xfrm>
-          <a:prstGeom prst="rect">
-            <a:avLst/>
-          </a:prstGeom>
-          <a:ln w="0">
-            <a:noFill/>
-          </a:ln>
-        </p:spPr>
-      </p:pic>
+      <p:sp>
+        <p:nvSpPr>
+          <p:cNvPr id="4" name="PlaceHolder 4"/>
+          <p:cNvSpPr>
+            <a:spLocks noGrp="1"/>
+          </p:cNvSpPr>
+          <p:nvPr>
+            <p:ph type="dt" idx="3"/>
+          </p:nvPr>
+        </p:nvSpPr>
+        <p:spPr>
+          <a:xfrm>
+            <a:off x="838080" y="6356520"/>
+            <a:ext cx="2742480" cy="364320"/>
+          </a:xfrm>
+          <a:prstGeom prst="rect">
+            <a:avLst/>
+          </a:prstGeom>
+          <a:noFill/>
+          <a:ln w="0">
+            <a:noFill/>
+          </a:ln>
+        </p:spPr>
+        <p:txBody>
+          <a:bodyPr lIns="90000" rIns="90000" tIns="45000" bIns="45000" anchor="ctr">
+            <a:noAutofit/>
+          </a:bodyPr>
+          <a:lstStyle>
+            <a:lvl1pPr>
+              <a:defRPr b="0" lang="en-US" sz="1400" spc="-1" strike="noStrike">
+                <a:latin typeface="Times New Roman"/>
+              </a:defRPr>
+            </a:lvl1pPr>
+          </a:lstStyle>
+          <a:p>
+            <a:r>
+              <a:rPr b="0" lang="en-US" sz="1400" spc="-1" strike="noStrike">
+                <a:latin typeface="Times New Roman"/>
+              </a:rPr>
+              <a:t>&lt;date/time&gt;</a:t>
+            </a:r>
+            <a:endParaRPr b="0" lang="en-US" sz="1400" spc="-1" strike="noStrike">
+              <a:latin typeface="Times New Roman"/>
+            </a:endParaRPr>
+          </a:p>
+        </p:txBody>
+      </p:sp>
+      <p:sp>
+        <p:nvSpPr>
+          <p:cNvPr id="5" name="PlaceHolder 5"/>
+          <p:cNvSpPr>
+            <a:spLocks noGrp="1"/>
+          </p:cNvSpPr>
+          <p:nvPr>
+            <p:ph type="body"/>
+          </p:nvPr>
+        </p:nvSpPr>
+        <p:spPr>
+          <a:xfrm>
+            <a:off x="609480" y="1604520"/>
+            <a:ext cx="10972440" cy="3977280"/>
+          </a:xfrm>
+          <a:prstGeom prst="rect">
+            <a:avLst/>
+          </a:prstGeom>
+          <a:noFill/>
+          <a:ln w="0">
+            <a:noFill/>
+          </a:ln>
+        </p:spPr>
+        <p:txBody>
+          <a:bodyPr lIns="0" rIns="0" tIns="0" bIns="0" anchor="t">
+            <a:normAutofit/>
+          </a:bodyPr>
+          <a:p>
+            <a:pPr marL="432000" indent="-324000">
+              <a:spcBef>
+                <a:spcPts val="1417"/>
+              </a:spcBef>
+              <a:buClr>
+                <a:srgbClr val="000000"/>
+              </a:buClr>
+              <a:buSzPct val="45000"/>
+              <a:buFont typeface="Wingdings" charset="2"/>
+              <a:buChar char=""/>
+            </a:pPr>
+            <a:r>
+              <a:rPr b="0" lang="en-US" sz="3200" spc="-1" strike="noStrike">
+                <a:latin typeface="Arial"/>
+              </a:rPr>
+              <a:t>Click to edit the outline text format</a:t>
+            </a:r>
+            <a:endParaRPr b="0" lang="en-US" sz="3200" spc="-1" strike="noStrike">
+              <a:latin typeface="Arial"/>
+            </a:endParaRPr>
+          </a:p>
+          <a:p>
+            <a:pPr lvl="1" marL="864000" indent="-324000">
+              <a:spcBef>
+                <a:spcPts val="1134"/>
+              </a:spcBef>
+              <a:buClr>
+                <a:srgbClr val="000000"/>
+              </a:buClr>
+              <a:buSzPct val="75000"/>
+              <a:buFont typeface="Symbol" charset="2"/>
+              <a:buChar char=""/>
+            </a:pPr>
+            <a:r>
+              <a:rPr b="0" lang="en-US" sz="2800" spc="-1" strike="noStrike">
+                <a:latin typeface="Arial"/>
+              </a:rPr>
+              <a:t>Second Outline Level</a:t>
+            </a:r>
+            <a:endParaRPr b="0" lang="en-US" sz="2800" spc="-1" strike="noStrike">
+              <a:latin typeface="Arial"/>
+            </a:endParaRPr>
+          </a:p>
+          <a:p>
+            <a:pPr lvl="2" marL="1296000" indent="-288000">
+              <a:spcBef>
+                <a:spcPts val="850"/>
+              </a:spcBef>
+              <a:buClr>
+                <a:srgbClr val="000000"/>
+              </a:buClr>
+              <a:buSzPct val="45000"/>
+              <a:buFont typeface="Wingdings" charset="2"/>
+              <a:buChar char=""/>
+            </a:pPr>
+            <a:r>
+              <a:rPr b="0" lang="en-US" sz="2400" spc="-1" strike="noStrike">
+                <a:latin typeface="Arial"/>
+              </a:rPr>
+              <a:t>Third Outline Level</a:t>
+            </a:r>
+            <a:endParaRPr b="0" lang="en-US" sz="2400" spc="-1" strike="noStrike">
+              <a:latin typeface="Arial"/>
+            </a:endParaRPr>
+          </a:p>
+          <a:p>
+            <a:pPr lvl="3" marL="1728000" indent="-216000">
+              <a:spcBef>
+                <a:spcPts val="567"/>
+              </a:spcBef>
+              <a:buClr>
+                <a:srgbClr val="000000"/>
+              </a:buClr>
+              <a:buSzPct val="75000"/>
+              <a:buFont typeface="Symbol" charset="2"/>
+              <a:buChar char=""/>
+            </a:pPr>
+            <a:r>
+              <a:rPr b="0" lang="en-US" sz="2000" spc="-1" strike="noStrike">
+                <a:latin typeface="Arial"/>
+              </a:rPr>
+              <a:t>Fourth Outline Level</a:t>
+            </a:r>
+            <a:endParaRPr b="0" lang="en-US" sz="2000" spc="-1" strike="noStrike">
+              <a:latin typeface="Arial"/>
+            </a:endParaRPr>
+          </a:p>
+          <a:p>
+            <a:pPr lvl="4" marL="2160000" indent="-216000">
+              <a:spcBef>
+                <a:spcPts val="283"/>
+              </a:spcBef>
+              <a:buClr>
+                <a:srgbClr val="000000"/>
+              </a:buClr>
+              <a:buSzPct val="45000"/>
+              <a:buFont typeface="Wingdings" charset="2"/>
+              <a:buChar char=""/>
+            </a:pPr>
+            <a:r>
+              <a:rPr b="0" lang="en-US" sz="2000" spc="-1" strike="noStrike">
+                <a:latin typeface="Arial"/>
+              </a:rPr>
+              <a:t>Fifth Outline Level</a:t>
+            </a:r>
+            <a:endParaRPr b="0" lang="en-US" sz="2000" spc="-1" strike="noStrike">
+              <a:latin typeface="Arial"/>
+            </a:endParaRPr>
+          </a:p>
+          <a:p>
+            <a:pPr lvl="5" marL="2592000" indent="-216000">
+              <a:spcBef>
+                <a:spcPts val="283"/>
+              </a:spcBef>
+              <a:buClr>
+                <a:srgbClr val="000000"/>
+              </a:buClr>
+              <a:buSzPct val="45000"/>
+              <a:buFont typeface="Wingdings" charset="2"/>
+              <a:buChar char=""/>
+            </a:pPr>
+            <a:r>
+              <a:rPr b="0" lang="en-US" sz="2000" spc="-1" strike="noStrike">
+                <a:latin typeface="Arial"/>
+              </a:rPr>
+              <a:t>Sixth Outline Level</a:t>
+            </a:r>
+            <a:endParaRPr b="0" lang="en-US" sz="2000" spc="-1" strike="noStrike">
+              <a:latin typeface="Arial"/>
+            </a:endParaRPr>
+          </a:p>
+          <a:p>
+            <a:pPr lvl="6" marL="3024000" indent="-216000">
+              <a:spcBef>
+                <a:spcPts val="283"/>
+              </a:spcBef>
+              <a:buClr>
+                <a:srgbClr val="000000"/>
+              </a:buClr>
+              <a:buSzPct val="45000"/>
+              <a:buFont typeface="Wingdings" charset="2"/>
+              <a:buChar char=""/>
+            </a:pPr>
+            <a:r>
+              <a:rPr b="0" lang="en-US" sz="2000" spc="-1" strike="noStrike">
+                <a:latin typeface="Arial"/>
+              </a:rPr>
+              <a:t>Seventh Outline Level</a:t>
+            </a:r>
+            <a:endParaRPr b="0" lang="en-US" sz="2000" spc="-1" strike="noStrike">
+              <a:latin typeface="Arial"/>
+            </a:endParaRPr>
+          </a:p>
+        </p:txBody>
+      </p:sp>
     </p:spTree>
   </p:cSld>
   <p:clrMap bg1="lt1" bg2="lt2" tx1="dk1" tx2="dk2" accent1="accent1" accent2="accent2" accent3="accent3" accent4="accent4" accent5="accent5" accent6="accent6" hlink="hlink" folHlink="folHlink"/>
@@ -3103,6 +4987,466 @@
     <p:sldLayoutId id="2147483658" r:id="rId12"/>
     <p:sldLayoutId id="2147483659" r:id="rId13"/>
     <p:sldLayoutId id="2147483660" r:id="rId14"/>
+  </p:sldLayoutIdLst>
+</p:sldMaster>
+</file>
+
+<file path=ppt/slideMasters/slideMaster2.xml><?xml version="1.0" encoding="utf-8"?>
+<p:sldMaster xmlns:a="http://schemas.openxmlformats.org/drawingml/2006/main" xmlns:p="http://schemas.openxmlformats.org/presentationml/2006/main" xmlns:r="http://schemas.openxmlformats.org/officeDocument/2006/relationships" xmlns:p14="http://schemas.microsoft.com/office/powerpoint/2010/main" xmlns:p15="http://schemas.microsoft.com/office/powerpoint/2012/main" xmlns:mc="http://schemas.openxmlformats.org/markup-compatibility/2006">
+  <p:cSld>
+    <p:bg>
+      <p:bgPr>
+        <a:solidFill>
+          <a:srgbClr val="ffffff"/>
+        </a:solidFill>
+      </p:bgPr>
+    </p:bg>
+    <p:spTree>
+      <p:nvGrpSpPr>
+        <p:cNvPr id="1" name=""/>
+        <p:cNvGrpSpPr/>
+        <p:nvPr/>
+      </p:nvGrpSpPr>
+      <p:grpSpPr>
+        <a:xfrm>
+          <a:off x="0" y="0"/>
+          <a:ext cx="0" cy="0"/>
+          <a:chOff x="0" y="0"/>
+          <a:chExt cx="0" cy="0"/>
+        </a:xfrm>
+      </p:grpSpPr>
+      <p:pic>
+        <p:nvPicPr>
+          <p:cNvPr id="42" name="Imagen 7" descr="Imagen que contiene objeto, luz, reloj, tráfico&#10;&#10;Descripción generada automáticamente"/>
+          <p:cNvPicPr/>
+          <p:nvPr/>
+        </p:nvPicPr>
+        <p:blipFill>
+          <a:blip r:embed="rId2"/>
+          <a:stretch/>
+        </p:blipFill>
+        <p:spPr>
+          <a:xfrm>
+            <a:off x="11279880" y="253440"/>
+            <a:ext cx="530280" cy="584280"/>
+          </a:xfrm>
+          <a:prstGeom prst="rect">
+            <a:avLst/>
+          </a:prstGeom>
+          <a:ln w="0">
+            <a:noFill/>
+          </a:ln>
+        </p:spPr>
+      </p:pic>
+      <p:sp>
+        <p:nvSpPr>
+          <p:cNvPr id="43" name="PlaceHolder 1"/>
+          <p:cNvSpPr>
+            <a:spLocks noGrp="1"/>
+          </p:cNvSpPr>
+          <p:nvPr>
+            <p:ph type="ftr" idx="4"/>
+          </p:nvPr>
+        </p:nvSpPr>
+        <p:spPr>
+          <a:xfrm>
+            <a:off x="4038480" y="6356520"/>
+            <a:ext cx="4114080" cy="364320"/>
+          </a:xfrm>
+          <a:prstGeom prst="rect">
+            <a:avLst/>
+          </a:prstGeom>
+          <a:noFill/>
+          <a:ln w="0">
+            <a:noFill/>
+          </a:ln>
+        </p:spPr>
+        <p:txBody>
+          <a:bodyPr lIns="90000" rIns="90000" tIns="45000" bIns="45000" anchor="ctr">
+            <a:noAutofit/>
+          </a:bodyPr>
+          <a:lstStyle>
+            <a:lvl1pPr algn="ctr">
+              <a:lnSpc>
+                <a:spcPct val="100000"/>
+              </a:lnSpc>
+              <a:buNone/>
+              <a:defRPr b="0" lang="en-US" sz="1400" spc="-1" strike="noStrike">
+                <a:latin typeface="Times New Roman"/>
+              </a:defRPr>
+            </a:lvl1pPr>
+          </a:lstStyle>
+          <a:p>
+            <a:pPr algn="ctr">
+              <a:lnSpc>
+                <a:spcPct val="100000"/>
+              </a:lnSpc>
+              <a:buNone/>
+            </a:pPr>
+            <a:r>
+              <a:rPr b="0" lang="en-US" sz="1400" spc="-1" strike="noStrike">
+                <a:latin typeface="Times New Roman"/>
+              </a:rPr>
+              <a:t>&lt;footer&gt;</a:t>
+            </a:r>
+            <a:endParaRPr b="0" lang="en-US" sz="1400" spc="-1" strike="noStrike">
+              <a:latin typeface="Times New Roman"/>
+            </a:endParaRPr>
+          </a:p>
+        </p:txBody>
+      </p:sp>
+      <p:sp>
+        <p:nvSpPr>
+          <p:cNvPr id="44" name="PlaceHolder 2"/>
+          <p:cNvSpPr>
+            <a:spLocks noGrp="1"/>
+          </p:cNvSpPr>
+          <p:nvPr>
+            <p:ph type="sldNum" idx="5"/>
+          </p:nvPr>
+        </p:nvSpPr>
+        <p:spPr>
+          <a:xfrm>
+            <a:off x="8610480" y="6356520"/>
+            <a:ext cx="2742480" cy="364320"/>
+          </a:xfrm>
+          <a:prstGeom prst="rect">
+            <a:avLst/>
+          </a:prstGeom>
+          <a:noFill/>
+          <a:ln w="0">
+            <a:noFill/>
+          </a:ln>
+        </p:spPr>
+        <p:txBody>
+          <a:bodyPr lIns="90000" rIns="90000" tIns="45000" bIns="45000" anchor="ctr">
+            <a:noAutofit/>
+          </a:bodyPr>
+          <a:lstStyle>
+            <a:lvl1pPr algn="r">
+              <a:lnSpc>
+                <a:spcPct val="100000"/>
+              </a:lnSpc>
+              <a:buNone/>
+              <a:defRPr b="0" lang="en-US" sz="1200" spc="-1" strike="noStrike">
+                <a:solidFill>
+                  <a:srgbClr val="8b8b8b"/>
+                </a:solidFill>
+                <a:latin typeface="Calibri"/>
+              </a:defRPr>
+            </a:lvl1pPr>
+          </a:lstStyle>
+          <a:p>
+            <a:pPr algn="r">
+              <a:lnSpc>
+                <a:spcPct val="100000"/>
+              </a:lnSpc>
+              <a:buNone/>
+            </a:pPr>
+            <a:fld id="{33385B8D-7945-4A46-9DE9-B6590E83F7DF}" type="slidenum">
+              <a:rPr b="0" lang="en-US" sz="1200" spc="-1" strike="noStrike">
+                <a:solidFill>
+                  <a:srgbClr val="8b8b8b"/>
+                </a:solidFill>
+                <a:latin typeface="Calibri"/>
+              </a:rPr>
+              <a:t>&lt;number&gt;</a:t>
+            </a:fld>
+            <a:endParaRPr b="0" lang="en-US" sz="1200" spc="-1" strike="noStrike">
+              <a:latin typeface="Times New Roman"/>
+            </a:endParaRPr>
+          </a:p>
+        </p:txBody>
+      </p:sp>
+      <p:sp>
+        <p:nvSpPr>
+          <p:cNvPr id="45" name="PlaceHolder 3"/>
+          <p:cNvSpPr>
+            <a:spLocks noGrp="1"/>
+          </p:cNvSpPr>
+          <p:nvPr>
+            <p:ph type="dt" idx="6"/>
+          </p:nvPr>
+        </p:nvSpPr>
+        <p:spPr>
+          <a:xfrm>
+            <a:off x="838080" y="6356520"/>
+            <a:ext cx="2742480" cy="364320"/>
+          </a:xfrm>
+          <a:prstGeom prst="rect">
+            <a:avLst/>
+          </a:prstGeom>
+          <a:noFill/>
+          <a:ln w="0">
+            <a:noFill/>
+          </a:ln>
+        </p:spPr>
+        <p:txBody>
+          <a:bodyPr lIns="90000" rIns="90000" tIns="45000" bIns="45000" anchor="ctr">
+            <a:noAutofit/>
+          </a:bodyPr>
+          <a:lstStyle>
+            <a:lvl1pPr>
+              <a:defRPr b="0" lang="en-US" sz="1400" spc="-1" strike="noStrike">
+                <a:latin typeface="Times New Roman"/>
+              </a:defRPr>
+            </a:lvl1pPr>
+          </a:lstStyle>
+          <a:p>
+            <a:r>
+              <a:rPr b="0" lang="en-US" sz="1400" spc="-1" strike="noStrike">
+                <a:latin typeface="Times New Roman"/>
+              </a:rPr>
+              <a:t>&lt;date/time&gt;</a:t>
+            </a:r>
+            <a:endParaRPr b="0" lang="en-US" sz="1400" spc="-1" strike="noStrike">
+              <a:latin typeface="Times New Roman"/>
+            </a:endParaRPr>
+          </a:p>
+        </p:txBody>
+      </p:sp>
+      <p:sp>
+        <p:nvSpPr>
+          <p:cNvPr id="46" name="PlaceHolder 4"/>
+          <p:cNvSpPr>
+            <a:spLocks noGrp="1"/>
+          </p:cNvSpPr>
+          <p:nvPr>
+            <p:ph type="title"/>
+          </p:nvPr>
+        </p:nvSpPr>
+        <p:spPr>
+          <a:xfrm>
+            <a:off x="609480" y="273600"/>
+            <a:ext cx="10972440" cy="1144800"/>
+          </a:xfrm>
+          <a:prstGeom prst="rect">
+            <a:avLst/>
+          </a:prstGeom>
+          <a:noFill/>
+          <a:ln w="0">
+            <a:noFill/>
+          </a:ln>
+        </p:spPr>
+        <p:txBody>
+          <a:bodyPr lIns="0" rIns="0" tIns="0" bIns="0" anchor="ctr">
+            <a:noAutofit/>
+          </a:bodyPr>
+          <a:p>
+            <a:pPr algn="ctr">
+              <a:buNone/>
+            </a:pPr>
+            <a:r>
+              <a:rPr b="0" lang="en-US" sz="4400" spc="-1" strike="noStrike">
+                <a:latin typeface="Arial"/>
+              </a:rPr>
+              <a:t>Click to edit the title text format</a:t>
+            </a:r>
+            <a:endParaRPr b="0" lang="en-US" sz="4400" spc="-1" strike="noStrike">
+              <a:latin typeface="Arial"/>
+            </a:endParaRPr>
+          </a:p>
+        </p:txBody>
+      </p:sp>
+      <p:sp>
+        <p:nvSpPr>
+          <p:cNvPr id="47" name="PlaceHolder 5"/>
+          <p:cNvSpPr>
+            <a:spLocks noGrp="1"/>
+          </p:cNvSpPr>
+          <p:nvPr>
+            <p:ph type="body"/>
+          </p:nvPr>
+        </p:nvSpPr>
+        <p:spPr>
+          <a:xfrm>
+            <a:off x="609480" y="1604520"/>
+            <a:ext cx="10972440" cy="3977280"/>
+          </a:xfrm>
+          <a:prstGeom prst="rect">
+            <a:avLst/>
+          </a:prstGeom>
+          <a:noFill/>
+          <a:ln w="0">
+            <a:noFill/>
+          </a:ln>
+        </p:spPr>
+        <p:txBody>
+          <a:bodyPr lIns="0" rIns="0" tIns="0" bIns="0" anchor="t">
+            <a:normAutofit/>
+          </a:bodyPr>
+          <a:p>
+            <a:pPr marL="432000" indent="-324000">
+              <a:spcBef>
+                <a:spcPts val="1417"/>
+              </a:spcBef>
+              <a:buClr>
+                <a:srgbClr val="000000"/>
+              </a:buClr>
+              <a:buSzPct val="45000"/>
+              <a:buFont typeface="Wingdings" charset="2"/>
+              <a:buChar char=""/>
+            </a:pPr>
+            <a:r>
+              <a:rPr b="0" lang="en-US" sz="3200" spc="-1" strike="noStrike">
+                <a:latin typeface="Arial"/>
+              </a:rPr>
+              <a:t>Click to edit the outline text format</a:t>
+            </a:r>
+            <a:endParaRPr b="0" lang="en-US" sz="3200" spc="-1" strike="noStrike">
+              <a:latin typeface="Arial"/>
+            </a:endParaRPr>
+          </a:p>
+          <a:p>
+            <a:pPr lvl="1" marL="864000" indent="-324000">
+              <a:spcBef>
+                <a:spcPts val="1134"/>
+              </a:spcBef>
+              <a:buClr>
+                <a:srgbClr val="000000"/>
+              </a:buClr>
+              <a:buSzPct val="75000"/>
+              <a:buFont typeface="Symbol" charset="2"/>
+              <a:buChar char=""/>
+            </a:pPr>
+            <a:r>
+              <a:rPr b="0" lang="en-US" sz="2800" spc="-1" strike="noStrike">
+                <a:latin typeface="Arial"/>
+              </a:rPr>
+              <a:t>Second Outline Level</a:t>
+            </a:r>
+            <a:endParaRPr b="0" lang="en-US" sz="2800" spc="-1" strike="noStrike">
+              <a:latin typeface="Arial"/>
+            </a:endParaRPr>
+          </a:p>
+          <a:p>
+            <a:pPr lvl="2" marL="1296000" indent="-288000">
+              <a:spcBef>
+                <a:spcPts val="850"/>
+              </a:spcBef>
+              <a:buClr>
+                <a:srgbClr val="000000"/>
+              </a:buClr>
+              <a:buSzPct val="45000"/>
+              <a:buFont typeface="Wingdings" charset="2"/>
+              <a:buChar char=""/>
+            </a:pPr>
+            <a:r>
+              <a:rPr b="0" lang="en-US" sz="2400" spc="-1" strike="noStrike">
+                <a:latin typeface="Arial"/>
+              </a:rPr>
+              <a:t>Third Outline Level</a:t>
+            </a:r>
+            <a:endParaRPr b="0" lang="en-US" sz="2400" spc="-1" strike="noStrike">
+              <a:latin typeface="Arial"/>
+            </a:endParaRPr>
+          </a:p>
+          <a:p>
+            <a:pPr lvl="3" marL="1728000" indent="-216000">
+              <a:spcBef>
+                <a:spcPts val="567"/>
+              </a:spcBef>
+              <a:buClr>
+                <a:srgbClr val="000000"/>
+              </a:buClr>
+              <a:buSzPct val="75000"/>
+              <a:buFont typeface="Symbol" charset="2"/>
+              <a:buChar char=""/>
+            </a:pPr>
+            <a:r>
+              <a:rPr b="0" lang="en-US" sz="2000" spc="-1" strike="noStrike">
+                <a:latin typeface="Arial"/>
+              </a:rPr>
+              <a:t>Fourth Outline Level</a:t>
+            </a:r>
+            <a:endParaRPr b="0" lang="en-US" sz="2000" spc="-1" strike="noStrike">
+              <a:latin typeface="Arial"/>
+            </a:endParaRPr>
+          </a:p>
+          <a:p>
+            <a:pPr lvl="4" marL="2160000" indent="-216000">
+              <a:spcBef>
+                <a:spcPts val="283"/>
+              </a:spcBef>
+              <a:buClr>
+                <a:srgbClr val="000000"/>
+              </a:buClr>
+              <a:buSzPct val="45000"/>
+              <a:buFont typeface="Wingdings" charset="2"/>
+              <a:buChar char=""/>
+            </a:pPr>
+            <a:r>
+              <a:rPr b="0" lang="en-US" sz="2000" spc="-1" strike="noStrike">
+                <a:latin typeface="Arial"/>
+              </a:rPr>
+              <a:t>Fifth Outline Level</a:t>
+            </a:r>
+            <a:endParaRPr b="0" lang="en-US" sz="2000" spc="-1" strike="noStrike">
+              <a:latin typeface="Arial"/>
+            </a:endParaRPr>
+          </a:p>
+          <a:p>
+            <a:pPr lvl="5" marL="2592000" indent="-216000">
+              <a:spcBef>
+                <a:spcPts val="283"/>
+              </a:spcBef>
+              <a:buClr>
+                <a:srgbClr val="000000"/>
+              </a:buClr>
+              <a:buSzPct val="45000"/>
+              <a:buFont typeface="Wingdings" charset="2"/>
+              <a:buChar char=""/>
+            </a:pPr>
+            <a:r>
+              <a:rPr b="0" lang="en-US" sz="2000" spc="-1" strike="noStrike">
+                <a:latin typeface="Arial"/>
+              </a:rPr>
+              <a:t>Sixth Outline Level</a:t>
+            </a:r>
+            <a:endParaRPr b="0" lang="en-US" sz="2000" spc="-1" strike="noStrike">
+              <a:latin typeface="Arial"/>
+            </a:endParaRPr>
+          </a:p>
+          <a:p>
+            <a:pPr lvl="6" marL="3024000" indent="-216000">
+              <a:spcBef>
+                <a:spcPts val="283"/>
+              </a:spcBef>
+              <a:buClr>
+                <a:srgbClr val="000000"/>
+              </a:buClr>
+              <a:buSzPct val="45000"/>
+              <a:buFont typeface="Wingdings" charset="2"/>
+              <a:buChar char=""/>
+            </a:pPr>
+            <a:r>
+              <a:rPr b="0" lang="en-US" sz="2000" spc="-1" strike="noStrike">
+                <a:latin typeface="Arial"/>
+              </a:rPr>
+              <a:t>Seventh Outline Level</a:t>
+            </a:r>
+            <a:endParaRPr b="0" lang="en-US" sz="2000" spc="-1" strike="noStrike">
+              <a:latin typeface="Arial"/>
+            </a:endParaRPr>
+          </a:p>
+        </p:txBody>
+      </p:sp>
+    </p:spTree>
+  </p:cSld>
+  <p:clrMap bg1="lt1" bg2="lt2" tx1="dk1" tx2="dk2" accent1="accent1" accent2="accent2" accent3="accent3" accent4="accent4" accent5="accent5" accent6="accent6" hlink="hlink" folHlink="folHlink"/>
+  <p:sldLayoutIdLst>
+    <p:sldLayoutId id="2147483662" r:id="rId3"/>
+    <p:sldLayoutId id="2147483663" r:id="rId4"/>
+    <p:sldLayoutId id="2147483664" r:id="rId5"/>
+    <p:sldLayoutId id="2147483665" r:id="rId6"/>
+    <p:sldLayoutId id="2147483666" r:id="rId7"/>
+    <p:sldLayoutId id="2147483667" r:id="rId8"/>
+    <p:sldLayoutId id="2147483668" r:id="rId9"/>
+    <p:sldLayoutId id="2147483669" r:id="rId10"/>
+    <p:sldLayoutId id="2147483670" r:id="rId11"/>
+    <p:sldLayoutId id="2147483671" r:id="rId12"/>
+    <p:sldLayoutId id="2147483672" r:id="rId13"/>
+    <p:sldLayoutId id="2147483673" r:id="rId14"/>
   </p:sldLayoutIdLst>
 </p:sldMaster>
 </file>
@@ -3126,14 +5470,14 @@
       </p:grpSpPr>
       <p:sp>
         <p:nvSpPr>
-          <p:cNvPr id="42" name="Rectángulo 5"/>
+          <p:cNvPr id="84" name="Rectángulo 5"/>
           <p:cNvSpPr/>
           <p:nvPr/>
         </p:nvSpPr>
         <p:spPr>
           <a:xfrm>
             <a:off x="0" y="0"/>
-            <a:ext cx="12191760" cy="6857640"/>
+            <a:ext cx="12191400" cy="6857280"/>
           </a:xfrm>
           <a:prstGeom prst="rect">
             <a:avLst/>
@@ -3165,28 +5509,28 @@
       </p:sp>
       <p:grpSp>
         <p:nvGrpSpPr>
-          <p:cNvPr id="43" name="Grupo 1"/>
+          <p:cNvPr id="85" name="Grupo 1"/>
           <p:cNvGrpSpPr/>
           <p:nvPr/>
         </p:nvGrpSpPr>
         <p:grpSpPr>
           <a:xfrm>
             <a:off x="1371600" y="1080000"/>
-            <a:ext cx="8152920" cy="1065960"/>
+            <a:ext cx="8152560" cy="1064520"/>
             <a:chOff x="1371600" y="1080000"/>
-            <a:chExt cx="8152920" cy="1065960"/>
+            <a:chExt cx="8152560" cy="1064520"/>
           </a:xfrm>
         </p:grpSpPr>
         <p:sp>
           <p:nvSpPr>
-            <p:cNvPr id="44" name="Rectángulo 18"/>
+            <p:cNvPr id="86" name="Rectángulo 18"/>
             <p:cNvSpPr/>
             <p:nvPr/>
           </p:nvSpPr>
           <p:spPr>
             <a:xfrm>
               <a:off x="1371600" y="1143000"/>
-              <a:ext cx="107640" cy="476640"/>
+              <a:ext cx="107280" cy="476280"/>
             </a:xfrm>
             <a:prstGeom prst="rect">
               <a:avLst/>
@@ -3207,14 +5551,14 @@
         </p:sp>
         <p:sp>
           <p:nvSpPr>
-            <p:cNvPr id="45" name="CuadroTexto 20"/>
+            <p:cNvPr id="87" name="CuadroTexto 20"/>
             <p:cNvSpPr/>
             <p:nvPr/>
           </p:nvSpPr>
           <p:spPr>
             <a:xfrm>
               <a:off x="1479600" y="1080000"/>
-              <a:ext cx="8044920" cy="1065960"/>
+              <a:ext cx="8044560" cy="1064520"/>
             </a:xfrm>
             <a:prstGeom prst="rect">
               <a:avLst/>
@@ -3231,7 +5575,7 @@
             <a:fontRef idx="minor"/>
           </p:style>
           <p:txBody>
-            <a:bodyPr anchor="t">
+            <a:bodyPr lIns="90000" rIns="90000" tIns="45000" bIns="45000" anchor="t">
               <a:spAutoFit/>
             </a:bodyPr>
             <a:p>
@@ -3247,6 +5591,7 @@
                     <a:srgbClr val="ffffff"/>
                   </a:solidFill>
                   <a:latin typeface="Raleway SemiBold"/>
+                  <a:ea typeface="DejaVu Sans"/>
                 </a:rPr>
                 <a:t>Sistema de gestión de finanzas personales</a:t>
               </a:r>
@@ -3259,14 +5604,14 @@
       </p:grpSp>
       <p:sp>
         <p:nvSpPr>
-          <p:cNvPr id="46" name="Title 14"/>
+          <p:cNvPr id="88" name="Title 14"/>
           <p:cNvSpPr/>
           <p:nvPr/>
         </p:nvSpPr>
         <p:spPr>
           <a:xfrm>
             <a:off x="2224440" y="3589200"/>
-            <a:ext cx="7742880" cy="1306800"/>
+            <a:ext cx="7742520" cy="1306440"/>
           </a:xfrm>
           <a:prstGeom prst="rect">
             <a:avLst/>
@@ -3283,7 +5628,7 @@
           <a:fontRef idx="minor"/>
         </p:style>
         <p:txBody>
-          <a:bodyPr anchor="b">
+          <a:bodyPr lIns="90000" rIns="90000" tIns="45000" bIns="45000" anchor="b">
             <a:noAutofit/>
           </a:bodyPr>
           <a:p>
@@ -3353,7 +5698,7 @@
       </p:sp>
       <p:pic>
         <p:nvPicPr>
-          <p:cNvPr id="47" name="Imagen 13" descr="Imagen que contiene Logotipo&#10;&#10;Descripción generada automáticamente"/>
+          <p:cNvPr id="89" name="Imagen 13" descr="Imagen que contiene Logotipo&#10;&#10;Descripción generada automáticamente"/>
           <p:cNvPicPr/>
           <p:nvPr/>
         </p:nvPicPr>
@@ -3364,7 +5709,7 @@
         <p:spPr>
           <a:xfrm>
             <a:off x="11264400" y="228600"/>
-            <a:ext cx="554040" cy="609120"/>
+            <a:ext cx="553680" cy="608760"/>
           </a:xfrm>
           <a:prstGeom prst="rect">
             <a:avLst/>
@@ -3376,7 +5721,7 @@
       </p:pic>
       <p:pic>
         <p:nvPicPr>
-          <p:cNvPr id="48" name="Imagen 2" descr=""/>
+          <p:cNvPr id="90" name="Imagen 2" descr=""/>
           <p:cNvPicPr/>
           <p:nvPr/>
         </p:nvPicPr>
@@ -3388,7 +5733,7 @@
         <p:spPr>
           <a:xfrm>
             <a:off x="4501080" y="5371920"/>
-            <a:ext cx="3189240" cy="505080"/>
+            <a:ext cx="3188880" cy="504720"/>
           </a:xfrm>
           <a:prstGeom prst="rect">
             <a:avLst/>
@@ -3442,7 +5787,7 @@
                                           </p:stCondLst>
                                         </p:cTn>
                                         <p:tgtEl>
-                                          <p:spTgt spid="43"/>
+                                          <p:spTgt spid="85"/>
                                         </p:tgtEl>
                                         <p:attrNameLst>
                                           <p:attrName>style.visibility</p:attrName>
@@ -3456,7 +5801,7 @@
                                       <p:cBhvr additive="repl">
                                         <p:cTn id="7" dur="1000" fill="hold"/>
                                         <p:tgtEl>
-                                          <p:spTgt spid="43"/>
+                                          <p:spTgt spid="85"/>
                                         </p:tgtEl>
                                         <p:attrNameLst>
                                           <p:attrName>ppt_x</p:attrName>
@@ -3479,7 +5824,7 @@
                                       <p:cBhvr additive="repl">
                                         <p:cTn id="8" dur="1000" fill="hold"/>
                                         <p:tgtEl>
-                                          <p:spTgt spid="43"/>
+                                          <p:spTgt spid="85"/>
                                         </p:tgtEl>
                                         <p:attrNameLst>
                                           <p:attrName>ppt_y</p:attrName>
@@ -3515,7 +5860,7 @@
                                           </p:stCondLst>
                                         </p:cTn>
                                         <p:tgtEl>
-                                          <p:spTgt spid="43"/>
+                                          <p:spTgt spid="85"/>
                                         </p:tgtEl>
                                         <p:attrNameLst>
                                           <p:attrName>style.visibility</p:attrName>
@@ -3529,7 +5874,7 @@
                                       <p:cBhvr additive="repl">
                                         <p:cTn id="11" dur="2000"/>
                                         <p:tgtEl>
-                                          <p:spTgt spid="43"/>
+                                          <p:spTgt spid="85"/>
                                         </p:tgtEl>
                                       </p:cBhvr>
                                     </p:animEffect>
@@ -3559,7 +5904,7 @@
                                           </p:stCondLst>
                                         </p:cTn>
                                         <p:tgtEl>
-                                          <p:spTgt spid="46"/>
+                                          <p:spTgt spid="88"/>
                                         </p:tgtEl>
                                         <p:attrNameLst>
                                           <p:attrName>style.visibility</p:attrName>
@@ -3573,7 +5918,7 @@
                                       <p:cBhvr additive="repl">
                                         <p:cTn id="15" dur="1000"/>
                                         <p:tgtEl>
-                                          <p:spTgt spid="46"/>
+                                          <p:spTgt spid="88"/>
                                         </p:tgtEl>
                                       </p:cBhvr>
                                     </p:animEffect>
@@ -3630,7 +5975,7 @@
       </p:grpSpPr>
       <p:pic>
         <p:nvPicPr>
-          <p:cNvPr id="89" name="Imagen 1" descr=""/>
+          <p:cNvPr id="131" name="Imagen 1" descr=""/>
           <p:cNvPicPr/>
           <p:nvPr/>
         </p:nvPicPr>
@@ -3640,8 +5985,8 @@
         </p:blipFill>
         <p:spPr>
           <a:xfrm flipH="1">
-            <a:off x="360" y="5207760"/>
-            <a:ext cx="12191760" cy="1649880"/>
+            <a:off x="720" y="5207760"/>
+            <a:ext cx="12191400" cy="1649520"/>
           </a:xfrm>
           <a:prstGeom prst="rect">
             <a:avLst/>
@@ -3653,14 +5998,14 @@
       </p:pic>
       <p:sp>
         <p:nvSpPr>
-          <p:cNvPr id="90" name="TextBox 12"/>
+          <p:cNvPr id="132" name="TextBox 12"/>
           <p:cNvSpPr/>
           <p:nvPr/>
         </p:nvSpPr>
         <p:spPr>
           <a:xfrm>
             <a:off x="2943000" y="1731600"/>
-            <a:ext cx="5919120" cy="3747240"/>
+            <a:ext cx="5918760" cy="3747240"/>
           </a:xfrm>
           <a:prstGeom prst="rect">
             <a:avLst/>
@@ -3693,6 +6038,7 @@
                   <a:srgbClr val="134c8f"/>
                 </a:solidFill>
                 <a:latin typeface="Raleway"/>
+                <a:ea typeface="DejaVu Sans"/>
               </a:rPr>
               <a:t>- Aplicación funcional y completa</a:t>
             </a:r>
@@ -3713,6 +6059,7 @@
                   <a:srgbClr val="134c8f"/>
                 </a:solidFill>
                 <a:latin typeface="Raleway"/>
+                <a:ea typeface="DejaVu Sans"/>
               </a:rPr>
               <a:t>- Arquitectura escalable</a:t>
             </a:r>
@@ -3733,6 +6080,7 @@
                   <a:srgbClr val="134c8f"/>
                 </a:solidFill>
                 <a:latin typeface="Raleway"/>
+                <a:ea typeface="DejaVu Sans"/>
               </a:rPr>
               <a:t>- Mejora de la organización financiera</a:t>
             </a:r>
@@ -3753,6 +6101,7 @@
                   <a:srgbClr val="134c8f"/>
                 </a:solidFill>
                 <a:latin typeface="Raleway"/>
+                <a:ea typeface="DejaVu Sans"/>
               </a:rPr>
               <a:t>- Posibles mejoras:</a:t>
             </a:r>
@@ -3773,6 +6122,7 @@
                   <a:srgbClr val="134c8f"/>
                 </a:solidFill>
                 <a:latin typeface="Raleway"/>
+                <a:ea typeface="DejaVu Sans"/>
               </a:rPr>
               <a:t>- Gráficos</a:t>
             </a:r>
@@ -3793,6 +6143,7 @@
                   <a:srgbClr val="134c8f"/>
                 </a:solidFill>
                 <a:latin typeface="Raleway"/>
+                <a:ea typeface="DejaVu Sans"/>
               </a:rPr>
               <a:t>- Exportación de datos</a:t>
             </a:r>
@@ -3813,6 +6164,7 @@
                   <a:srgbClr val="134c8f"/>
                 </a:solidFill>
                 <a:latin typeface="Raleway"/>
+                <a:ea typeface="DejaVu Sans"/>
               </a:rPr>
               <a:t>- Sincronización</a:t>
             </a:r>
@@ -3824,14 +6176,14 @@
       </p:sp>
       <p:sp>
         <p:nvSpPr>
-          <p:cNvPr id="91" name="Title 22"/>
+          <p:cNvPr id="133" name="Title 22"/>
           <p:cNvSpPr/>
           <p:nvPr/>
         </p:nvSpPr>
         <p:spPr>
           <a:xfrm>
             <a:off x="685800" y="516960"/>
-            <a:ext cx="8424000" cy="1018080"/>
+            <a:ext cx="8423640" cy="1017720"/>
           </a:xfrm>
           <a:prstGeom prst="rect">
             <a:avLst/>
@@ -3864,6 +6216,7 @@
                   <a:srgbClr val="134c8f"/>
                 </a:solidFill>
                 <a:latin typeface="Raleway SemiBold"/>
+                <a:ea typeface="DejaVu Sans"/>
               </a:rPr>
               <a:t>6. Conclusiones y proyección a futuro</a:t>
             </a:r>
@@ -3878,14 +6231,14 @@
       </p:sp>
       <p:sp>
         <p:nvSpPr>
-          <p:cNvPr id="92" name="Rectángulo 4"/>
+          <p:cNvPr id="134" name="Rectángulo 4"/>
           <p:cNvSpPr/>
           <p:nvPr/>
         </p:nvSpPr>
         <p:spPr>
           <a:xfrm>
             <a:off x="481320" y="496800"/>
-            <a:ext cx="151920" cy="1018080"/>
+            <a:ext cx="151560" cy="1017720"/>
           </a:xfrm>
           <a:prstGeom prst="rect">
             <a:avLst/>
@@ -3936,7 +6289,7 @@
       </p:grpSpPr>
       <p:pic>
         <p:nvPicPr>
-          <p:cNvPr id="49" name="Imagen 4" descr=""/>
+          <p:cNvPr id="91" name="Imagen 4" descr=""/>
           <p:cNvPicPr/>
           <p:nvPr/>
         </p:nvPicPr>
@@ -3946,8 +6299,8 @@
         </p:blipFill>
         <p:spPr>
           <a:xfrm flipH="1">
-            <a:off x="360" y="5207760"/>
-            <a:ext cx="12191760" cy="1649880"/>
+            <a:off x="720" y="5207760"/>
+            <a:ext cx="12191400" cy="1649520"/>
           </a:xfrm>
           <a:prstGeom prst="rect">
             <a:avLst/>
@@ -3959,14 +6312,14 @@
       </p:pic>
       <p:sp>
         <p:nvSpPr>
-          <p:cNvPr id="50" name="TextBox 12"/>
+          <p:cNvPr id="92" name="TextBox 12"/>
           <p:cNvSpPr/>
           <p:nvPr/>
         </p:nvSpPr>
         <p:spPr>
           <a:xfrm>
             <a:off x="786240" y="2424240"/>
-            <a:ext cx="9500760" cy="2376360"/>
+            <a:ext cx="9500400" cy="2375640"/>
           </a:xfrm>
           <a:prstGeom prst="rect">
             <a:avLst/>
@@ -3999,6 +6352,7 @@
                   <a:srgbClr val="134c8f"/>
                 </a:solidFill>
                 <a:latin typeface="Raleway"/>
+                <a:ea typeface="DejaVu Sans"/>
               </a:rPr>
               <a:t>- Aplicación de escritorio para gestión de finanzas personales.</a:t>
             </a:r>
@@ -4019,6 +6373,7 @@
                   <a:srgbClr val="134c8f"/>
                 </a:solidFill>
                 <a:latin typeface="Raleway"/>
+                <a:ea typeface="DejaVu Sans"/>
               </a:rPr>
               <a:t>- Registro de ingresos gasto y transferencias.</a:t>
             </a:r>
@@ -4039,6 +6394,7 @@
                   <a:srgbClr val="134c8f"/>
                 </a:solidFill>
                 <a:latin typeface="Raleway"/>
+                <a:ea typeface="DejaVu Sans"/>
               </a:rPr>
               <a:t>- Organización por cuentas y categorías.</a:t>
             </a:r>
@@ -4059,6 +6415,7 @@
                   <a:srgbClr val="134c8f"/>
                 </a:solidFill>
                 <a:latin typeface="Raleway"/>
+                <a:ea typeface="DejaVu Sans"/>
               </a:rPr>
               <a:t>- Enfoque simple, intuitivo y local.</a:t>
             </a:r>
@@ -4070,14 +6427,14 @@
       </p:sp>
       <p:sp>
         <p:nvSpPr>
-          <p:cNvPr id="51" name="Title 22"/>
+          <p:cNvPr id="93" name="Title 22"/>
           <p:cNvSpPr/>
           <p:nvPr/>
         </p:nvSpPr>
         <p:spPr>
           <a:xfrm>
             <a:off x="685800" y="516960"/>
-            <a:ext cx="5752800" cy="1018080"/>
+            <a:ext cx="5752440" cy="1017720"/>
           </a:xfrm>
           <a:prstGeom prst="rect">
             <a:avLst/>
@@ -4110,6 +6467,7 @@
                   <a:srgbClr val="134c8f"/>
                 </a:solidFill>
                 <a:latin typeface="Raleway SemiBold"/>
+                <a:ea typeface="DejaVu Sans"/>
               </a:rPr>
               <a:t>1.Introducción al tema</a:t>
             </a:r>
@@ -4124,14 +6482,14 @@
       </p:sp>
       <p:sp>
         <p:nvSpPr>
-          <p:cNvPr id="52" name="Rectángulo 7"/>
+          <p:cNvPr id="94" name="Rectángulo 7"/>
           <p:cNvSpPr/>
           <p:nvPr/>
         </p:nvSpPr>
         <p:spPr>
           <a:xfrm>
             <a:off x="481320" y="496800"/>
-            <a:ext cx="151920" cy="1018080"/>
+            <a:ext cx="151560" cy="1017720"/>
           </a:xfrm>
           <a:prstGeom prst="rect">
             <a:avLst/>
@@ -4182,7 +6540,7 @@
       </p:grpSpPr>
       <p:pic>
         <p:nvPicPr>
-          <p:cNvPr id="53" name="Imagen 4" descr=""/>
+          <p:cNvPr id="95" name="Imagen 4" descr=""/>
           <p:cNvPicPr/>
           <p:nvPr/>
         </p:nvPicPr>
@@ -4192,8 +6550,8 @@
         </p:blipFill>
         <p:spPr>
           <a:xfrm flipH="1">
-            <a:off x="360" y="5207760"/>
-            <a:ext cx="12191760" cy="1649880"/>
+            <a:off x="720" y="5207760"/>
+            <a:ext cx="12191400" cy="1649520"/>
           </a:xfrm>
           <a:prstGeom prst="rect">
             <a:avLst/>
@@ -4205,14 +6563,14 @@
       </p:pic>
       <p:sp>
         <p:nvSpPr>
-          <p:cNvPr id="54" name="TextBox 12"/>
+          <p:cNvPr id="96" name="TextBox 12"/>
           <p:cNvSpPr/>
           <p:nvPr/>
         </p:nvSpPr>
         <p:spPr>
           <a:xfrm>
-            <a:off x="1143000" y="2514600"/>
-            <a:ext cx="8229600" cy="2375640"/>
+            <a:off x="1371600" y="1967760"/>
+            <a:ext cx="8229240" cy="2375640"/>
           </a:xfrm>
           <a:prstGeom prst="rect">
             <a:avLst/>
@@ -4245,6 +6603,7 @@
                   <a:srgbClr val="134c8f"/>
                 </a:solidFill>
                 <a:latin typeface="Raleway"/>
+                <a:ea typeface="DejaVu Sans"/>
               </a:rPr>
               <a:t>-</a:t>
             </a:r>
@@ -4254,6 +6613,7 @@
                   <a:srgbClr val="134c8f"/>
                 </a:solidFill>
                 <a:latin typeface="Raleway"/>
+                <a:ea typeface="DejaVu Sans"/>
               </a:rPr>
               <a:t> Facilitar el control de finanzas personales</a:t>
             </a:r>
@@ -4274,6 +6634,7 @@
                   <a:srgbClr val="134c8f"/>
                 </a:solidFill>
                 <a:latin typeface="Raleway"/>
+                <a:ea typeface="DejaVu Sans"/>
               </a:rPr>
               <a:t>- Ofrecer una herramienta intuitiva y rápida</a:t>
             </a:r>
@@ -4294,6 +6655,7 @@
                   <a:srgbClr val="134c8f"/>
                 </a:solidFill>
                 <a:latin typeface="Raleway"/>
+                <a:ea typeface="DejaVu Sans"/>
               </a:rPr>
               <a:t>- Organizar la información financiera</a:t>
             </a:r>
@@ -4314,6 +6676,7 @@
                   <a:srgbClr val="134c8f"/>
                 </a:solidFill>
                 <a:latin typeface="Raleway"/>
+                <a:ea typeface="DejaVu Sans"/>
               </a:rPr>
               <a:t>- Aplicar arquitectura por capas</a:t>
             </a:r>
@@ -4334,6 +6697,7 @@
                   <a:srgbClr val="134c8f"/>
                 </a:solidFill>
                 <a:latin typeface="Raleway"/>
+                <a:ea typeface="DejaVu Sans"/>
               </a:rPr>
               <a:t>- Desarrollar una aplicación funcional completa</a:t>
             </a:r>
@@ -4345,14 +6709,14 @@
       </p:sp>
       <p:sp>
         <p:nvSpPr>
-          <p:cNvPr id="55" name="Title 22"/>
+          <p:cNvPr id="97" name="Title 22"/>
           <p:cNvSpPr/>
           <p:nvPr/>
         </p:nvSpPr>
         <p:spPr>
           <a:xfrm>
             <a:off x="685800" y="516960"/>
-            <a:ext cx="5752800" cy="1018080"/>
+            <a:ext cx="5752440" cy="1017720"/>
           </a:xfrm>
           <a:prstGeom prst="rect">
             <a:avLst/>
@@ -4385,21 +6749,10 @@
                   <a:srgbClr val="134c8f"/>
                 </a:solidFill>
                 <a:latin typeface="Raleway SemiBold"/>
+                <a:ea typeface="DejaVu Sans"/>
               </a:rPr>
               <a:t>2. Objetivos planteados </a:t>
             </a:r>
-            <a:br>
-              <a:rPr sz="3600"/>
-            </a:br>
-            <a:r>
-              <a:rPr b="1" lang="es-ES" sz="3600" spc="-1" strike="noStrike">
-                <a:solidFill>
-                  <a:srgbClr val="134c8f"/>
-                </a:solidFill>
-                <a:latin typeface="Raleway SemiBold"/>
-              </a:rPr>
-              <a:t>(una diapositiva)</a:t>
-            </a:r>
             <a:endParaRPr b="0" lang="en-US" sz="3600" spc="-1" strike="noStrike">
               <a:latin typeface="Arial"/>
             </a:endParaRPr>
@@ -4408,14 +6761,14 @@
       </p:sp>
       <p:sp>
         <p:nvSpPr>
-          <p:cNvPr id="56" name="Rectángulo 7"/>
+          <p:cNvPr id="98" name="Rectángulo 7"/>
           <p:cNvSpPr/>
           <p:nvPr/>
         </p:nvSpPr>
         <p:spPr>
           <a:xfrm>
             <a:off x="481320" y="496800"/>
-            <a:ext cx="151920" cy="1018080"/>
+            <a:ext cx="151560" cy="1017720"/>
           </a:xfrm>
           <a:prstGeom prst="rect">
             <a:avLst/>
@@ -4466,7 +6819,7 @@
       </p:grpSpPr>
       <p:pic>
         <p:nvPicPr>
-          <p:cNvPr id="57" name="Imagen 4" descr=""/>
+          <p:cNvPr id="99" name="Imagen 4" descr=""/>
           <p:cNvPicPr/>
           <p:nvPr/>
         </p:nvPicPr>
@@ -4476,8 +6829,8 @@
         </p:blipFill>
         <p:spPr>
           <a:xfrm flipH="1">
-            <a:off x="360" y="5207760"/>
-            <a:ext cx="12191760" cy="1649880"/>
+            <a:off x="720" y="5207760"/>
+            <a:ext cx="12191400" cy="1649520"/>
           </a:xfrm>
           <a:prstGeom prst="rect">
             <a:avLst/>
@@ -4489,14 +6842,14 @@
       </p:pic>
       <p:sp>
         <p:nvSpPr>
-          <p:cNvPr id="58" name="TextBox 12"/>
+          <p:cNvPr id="100" name="TextBox 12"/>
           <p:cNvSpPr/>
           <p:nvPr/>
         </p:nvSpPr>
         <p:spPr>
           <a:xfrm>
             <a:off x="457200" y="2057400"/>
-            <a:ext cx="4700160" cy="1919160"/>
+            <a:ext cx="4699800" cy="1918440"/>
           </a:xfrm>
           <a:prstGeom prst="rect">
             <a:avLst/>
@@ -4529,6 +6882,7 @@
                   <a:srgbClr val="134c8f"/>
                 </a:solidFill>
                 <a:latin typeface="Raleway"/>
+                <a:ea typeface="DejaVu Sans"/>
               </a:rPr>
               <a:t>- Interfaz minimalista y clara.</a:t>
             </a:r>
@@ -4549,6 +6903,7 @@
                   <a:srgbClr val="134c8f"/>
                 </a:solidFill>
                 <a:latin typeface="Raleway"/>
+                <a:ea typeface="DejaVu Sans"/>
               </a:rPr>
               <a:t>- Panel de resumen financiero.</a:t>
             </a:r>
@@ -4569,6 +6924,7 @@
                   <a:srgbClr val="134c8f"/>
                 </a:solidFill>
                 <a:latin typeface="Raleway"/>
+                <a:ea typeface="DejaVu Sans"/>
               </a:rPr>
               <a:t>- Navegación por secciones.</a:t>
             </a:r>
@@ -4580,14 +6936,14 @@
       </p:sp>
       <p:sp>
         <p:nvSpPr>
-          <p:cNvPr id="59" name="Title 22"/>
+          <p:cNvPr id="101" name="Title 22"/>
           <p:cNvSpPr/>
           <p:nvPr/>
         </p:nvSpPr>
         <p:spPr>
           <a:xfrm>
             <a:off x="685800" y="516960"/>
-            <a:ext cx="7041600" cy="1018080"/>
+            <a:ext cx="7041240" cy="1017720"/>
           </a:xfrm>
           <a:prstGeom prst="rect">
             <a:avLst/>
@@ -4620,6 +6976,7 @@
                   <a:srgbClr val="134c8f"/>
                 </a:solidFill>
                 <a:latin typeface="Raleway SemiBold"/>
+                <a:ea typeface="DejaVu Sans"/>
               </a:rPr>
               <a:t>3. Diseño y funcionalidad </a:t>
             </a:r>
@@ -4631,14 +6988,14 @@
       </p:sp>
       <p:sp>
         <p:nvSpPr>
-          <p:cNvPr id="60" name="Rectángulo 7"/>
+          <p:cNvPr id="102" name="Rectángulo 7"/>
           <p:cNvSpPr/>
           <p:nvPr/>
         </p:nvSpPr>
         <p:spPr>
           <a:xfrm>
             <a:off x="481320" y="496800"/>
-            <a:ext cx="151920" cy="1018080"/>
+            <a:ext cx="151560" cy="1017720"/>
           </a:xfrm>
           <a:prstGeom prst="rect">
             <a:avLst/>
@@ -4659,7 +7016,7 @@
       </p:sp>
       <p:pic>
         <p:nvPicPr>
-          <p:cNvPr id="61" name="" descr=""/>
+          <p:cNvPr id="103" name="" descr=""/>
           <p:cNvPicPr/>
           <p:nvPr/>
         </p:nvPicPr>
@@ -4670,7 +7027,7 @@
         <p:spPr>
           <a:xfrm>
             <a:off x="5463720" y="1371600"/>
-            <a:ext cx="6423480" cy="4949640"/>
+            <a:ext cx="6423120" cy="4949280"/>
           </a:xfrm>
           <a:prstGeom prst="rect">
             <a:avLst/>
@@ -4712,7 +7069,7 @@
       </p:grpSpPr>
       <p:pic>
         <p:nvPicPr>
-          <p:cNvPr id="62" name="Imagen 3" descr=""/>
+          <p:cNvPr id="104" name="Imagen 3" descr=""/>
           <p:cNvPicPr/>
           <p:nvPr/>
         </p:nvPicPr>
@@ -4722,8 +7079,8 @@
         </p:blipFill>
         <p:spPr>
           <a:xfrm flipH="1">
-            <a:off x="360" y="5207760"/>
-            <a:ext cx="12191760" cy="1649880"/>
+            <a:off x="720" y="5207760"/>
+            <a:ext cx="12191400" cy="1649520"/>
           </a:xfrm>
           <a:prstGeom prst="rect">
             <a:avLst/>
@@ -4735,14 +7092,14 @@
       </p:pic>
       <p:sp>
         <p:nvSpPr>
-          <p:cNvPr id="63" name="TextBox 1"/>
+          <p:cNvPr id="105" name="TextBox 1"/>
           <p:cNvSpPr/>
           <p:nvPr/>
         </p:nvSpPr>
         <p:spPr>
           <a:xfrm>
             <a:off x="786240" y="1143000"/>
-            <a:ext cx="10872360" cy="1345680"/>
+            <a:ext cx="10872000" cy="1345680"/>
           </a:xfrm>
           <a:prstGeom prst="rect">
             <a:avLst/>
@@ -4775,6 +7132,7 @@
                   <a:srgbClr val="134c8f"/>
                 </a:solidFill>
                 <a:latin typeface="Raleway"/>
+                <a:ea typeface="DejaVu Sans"/>
               </a:rPr>
               <a:t>- Gestión de cuentas</a:t>
             </a:r>
@@ -4795,6 +7153,7 @@
                   <a:srgbClr val="134c8f"/>
                 </a:solidFill>
                 <a:latin typeface="Raleway"/>
+                <a:ea typeface="DejaVu Sans"/>
               </a:rPr>
               <a:t>- Registro de transacciones</a:t>
             </a:r>
@@ -4815,6 +7174,7 @@
                   <a:srgbClr val="134c8f"/>
                 </a:solidFill>
                 <a:latin typeface="Raleway"/>
+                <a:ea typeface="DejaVu Sans"/>
               </a:rPr>
               <a:t>- Clasificación por categorías</a:t>
             </a:r>
@@ -4826,14 +7186,14 @@
       </p:sp>
       <p:sp>
         <p:nvSpPr>
-          <p:cNvPr id="64" name="Title 1"/>
+          <p:cNvPr id="106" name="Title 1"/>
           <p:cNvSpPr/>
           <p:nvPr/>
         </p:nvSpPr>
         <p:spPr>
           <a:xfrm>
             <a:off x="685800" y="516960"/>
-            <a:ext cx="7041600" cy="1018080"/>
+            <a:ext cx="7041240" cy="1017720"/>
           </a:xfrm>
           <a:prstGeom prst="rect">
             <a:avLst/>
@@ -4866,6 +7226,7 @@
                   <a:srgbClr val="134c8f"/>
                 </a:solidFill>
                 <a:latin typeface="Raleway SemiBold"/>
+                <a:ea typeface="DejaVu Sans"/>
               </a:rPr>
               <a:t>3. Diseño y funcionalidad </a:t>
             </a:r>
@@ -4880,14 +7241,14 @@
       </p:sp>
       <p:sp>
         <p:nvSpPr>
-          <p:cNvPr id="65" name="Rectángulo 1"/>
+          <p:cNvPr id="107" name="Rectángulo 1"/>
           <p:cNvSpPr/>
           <p:nvPr/>
         </p:nvSpPr>
         <p:spPr>
           <a:xfrm>
             <a:off x="481320" y="496800"/>
-            <a:ext cx="151920" cy="1018080"/>
+            <a:ext cx="151560" cy="1017720"/>
           </a:xfrm>
           <a:prstGeom prst="rect">
             <a:avLst/>
@@ -4908,7 +7269,7 @@
       </p:sp>
       <p:pic>
         <p:nvPicPr>
-          <p:cNvPr id="66" name="" descr=""/>
+          <p:cNvPr id="108" name="" descr=""/>
           <p:cNvPicPr/>
           <p:nvPr/>
         </p:nvPicPr>
@@ -4919,7 +7280,7 @@
         <p:spPr>
           <a:xfrm>
             <a:off x="352440" y="2743200"/>
-            <a:ext cx="3762360" cy="3657600"/>
+            <a:ext cx="3762000" cy="3657240"/>
           </a:xfrm>
           <a:prstGeom prst="rect">
             <a:avLst/>
@@ -4931,7 +7292,7 @@
       </p:pic>
       <p:pic>
         <p:nvPicPr>
-          <p:cNvPr id="67" name="" descr=""/>
+          <p:cNvPr id="109" name="" descr=""/>
           <p:cNvPicPr/>
           <p:nvPr/>
         </p:nvPicPr>
@@ -4942,7 +7303,7 @@
         <p:spPr>
           <a:xfrm>
             <a:off x="4343400" y="2743200"/>
-            <a:ext cx="3429000" cy="3657600"/>
+            <a:ext cx="3428640" cy="3657240"/>
           </a:xfrm>
           <a:prstGeom prst="rect">
             <a:avLst/>
@@ -4954,7 +7315,7 @@
       </p:pic>
       <p:pic>
         <p:nvPicPr>
-          <p:cNvPr id="68" name="" descr=""/>
+          <p:cNvPr id="110" name="" descr=""/>
           <p:cNvPicPr/>
           <p:nvPr/>
         </p:nvPicPr>
@@ -4965,7 +7326,7 @@
         <p:spPr>
           <a:xfrm>
             <a:off x="8229600" y="2743200"/>
-            <a:ext cx="3515400" cy="3657600"/>
+            <a:ext cx="3515040" cy="3657240"/>
           </a:xfrm>
           <a:prstGeom prst="rect">
             <a:avLst/>
@@ -5007,7 +7368,7 @@
       </p:grpSpPr>
       <p:pic>
         <p:nvPicPr>
-          <p:cNvPr id="69" name="Imagen 4" descr=""/>
+          <p:cNvPr id="111" name="Imagen 4" descr=""/>
           <p:cNvPicPr/>
           <p:nvPr/>
         </p:nvPicPr>
@@ -5017,8 +7378,8 @@
         </p:blipFill>
         <p:spPr>
           <a:xfrm flipH="1">
-            <a:off x="360" y="5207760"/>
-            <a:ext cx="12191760" cy="1649880"/>
+            <a:off x="720" y="5207760"/>
+            <a:ext cx="12191400" cy="1649520"/>
           </a:xfrm>
           <a:prstGeom prst="rect">
             <a:avLst/>
@@ -5030,14 +7391,14 @@
       </p:pic>
       <p:sp>
         <p:nvSpPr>
-          <p:cNvPr id="70" name="Title 22"/>
+          <p:cNvPr id="112" name="Title 22"/>
           <p:cNvSpPr/>
           <p:nvPr/>
         </p:nvSpPr>
         <p:spPr>
           <a:xfrm>
             <a:off x="685800" y="516960"/>
-            <a:ext cx="7041600" cy="1018080"/>
+            <a:ext cx="7041240" cy="1017720"/>
           </a:xfrm>
           <a:prstGeom prst="rect">
             <a:avLst/>
@@ -5070,6 +7431,7 @@
                   <a:srgbClr val="134c8f"/>
                 </a:solidFill>
                 <a:latin typeface="Raleway SemiBold"/>
+                <a:ea typeface="DejaVu Sans"/>
               </a:rPr>
               <a:t>4. Metodología y planificación</a:t>
             </a:r>
@@ -5081,14 +7443,14 @@
       </p:sp>
       <p:sp>
         <p:nvSpPr>
-          <p:cNvPr id="71" name="Rectángulo 7"/>
+          <p:cNvPr id="113" name="Rectángulo 7"/>
           <p:cNvSpPr/>
           <p:nvPr/>
         </p:nvSpPr>
         <p:spPr>
           <a:xfrm>
             <a:off x="481320" y="496800"/>
-            <a:ext cx="151920" cy="1018080"/>
+            <a:ext cx="151560" cy="1017720"/>
           </a:xfrm>
           <a:prstGeom prst="rect">
             <a:avLst/>
@@ -5109,28 +7471,40 @@
       </p:sp>
       <p:sp>
         <p:nvSpPr>
-          <p:cNvPr id="72" name=""/>
-          <p:cNvSpPr txBox="1"/>
+          <p:cNvPr id="114" name=""/>
+          <p:cNvSpPr/>
           <p:nvPr/>
         </p:nvSpPr>
         <p:spPr>
           <a:xfrm>
             <a:off x="228600" y="2514600"/>
-            <a:ext cx="6888240" cy="3040200"/>
-          </a:xfrm>
-          <a:prstGeom prst="rect">
-            <a:avLst/>
-          </a:prstGeom>
-          <a:noFill/>
-          <a:ln w="0">
-            <a:noFill/>
-          </a:ln>
-        </p:spPr>
+            <a:ext cx="6887880" cy="3039840"/>
+          </a:xfrm>
+          <a:prstGeom prst="rect">
+            <a:avLst/>
+          </a:prstGeom>
+          <a:noFill/>
+          <a:ln w="0">
+            <a:noFill/>
+          </a:ln>
+        </p:spPr>
+        <p:style>
+          <a:lnRef idx="0"/>
+          <a:fillRef idx="0"/>
+          <a:effectRef idx="0"/>
+          <a:fontRef idx="minor"/>
+        </p:style>
         <p:txBody>
           <a:bodyPr lIns="90000" rIns="90000" tIns="45000" bIns="45000" anchor="t">
             <a:noAutofit/>
           </a:bodyPr>
           <a:p>
+            <a:pPr>
+              <a:lnSpc>
+                <a:spcPct val="100000"/>
+              </a:lnSpc>
+              <a:buNone/>
+            </a:pPr>
             <a:r>
               <a:rPr b="0" lang="en-US" sz="2400" spc="-1" strike="noStrike">
                 <a:latin typeface="Arial"/>
@@ -5142,6 +7516,12 @@
             </a:endParaRPr>
           </a:p>
           <a:p>
+            <a:pPr>
+              <a:lnSpc>
+                <a:spcPct val="100000"/>
+              </a:lnSpc>
+              <a:buNone/>
+            </a:pPr>
             <a:r>
               <a:rPr b="0" lang="en-US" sz="2400" spc="-1" strike="noStrike">
                 <a:latin typeface="Arial"/>
@@ -5153,6 +7533,12 @@
             </a:endParaRPr>
           </a:p>
           <a:p>
+            <a:pPr>
+              <a:lnSpc>
+                <a:spcPct val="100000"/>
+              </a:lnSpc>
+              <a:buNone/>
+            </a:pPr>
             <a:r>
               <a:rPr b="0" lang="en-US" sz="2400" spc="-1" strike="noStrike">
                 <a:latin typeface="Arial"/>
@@ -5164,6 +7550,12 @@
             </a:endParaRPr>
           </a:p>
           <a:p>
+            <a:pPr>
+              <a:lnSpc>
+                <a:spcPct val="100000"/>
+              </a:lnSpc>
+              <a:buNone/>
+            </a:pPr>
             <a:r>
               <a:rPr b="0" lang="en-US" sz="2400" spc="-1" strike="noStrike">
                 <a:latin typeface="Arial"/>
@@ -5175,6 +7567,12 @@
             </a:endParaRPr>
           </a:p>
           <a:p>
+            <a:pPr>
+              <a:lnSpc>
+                <a:spcPct val="100000"/>
+              </a:lnSpc>
+              <a:buNone/>
+            </a:pPr>
             <a:endParaRPr b="0" lang="en-US" sz="1000" spc="-1" strike="noStrike">
               <a:latin typeface="Arial"/>
             </a:endParaRPr>
@@ -5183,7 +7581,7 @@
       </p:sp>
       <p:pic>
         <p:nvPicPr>
-          <p:cNvPr id="73" name="" descr=""/>
+          <p:cNvPr id="115" name="" descr=""/>
           <p:cNvPicPr/>
           <p:nvPr/>
         </p:nvPicPr>
@@ -5194,7 +7592,7 @@
         <p:spPr>
           <a:xfrm>
             <a:off x="7086600" y="1144080"/>
-            <a:ext cx="4856760" cy="5028120"/>
+            <a:ext cx="4856400" cy="5027760"/>
           </a:xfrm>
           <a:prstGeom prst="rect">
             <a:avLst/>
@@ -5236,7 +7634,7 @@
       </p:grpSpPr>
       <p:pic>
         <p:nvPicPr>
-          <p:cNvPr id="74" name="Imagen 4" descr=""/>
+          <p:cNvPr id="116" name="Imagen 4" descr=""/>
           <p:cNvPicPr/>
           <p:nvPr/>
         </p:nvPicPr>
@@ -5246,8 +7644,8 @@
         </p:blipFill>
         <p:spPr>
           <a:xfrm flipH="1">
-            <a:off x="360" y="5207760"/>
-            <a:ext cx="12191760" cy="1649880"/>
+            <a:off x="720" y="5207760"/>
+            <a:ext cx="12191400" cy="1649520"/>
           </a:xfrm>
           <a:prstGeom prst="rect">
             <a:avLst/>
@@ -5259,14 +7657,14 @@
       </p:pic>
       <p:sp>
         <p:nvSpPr>
-          <p:cNvPr id="75" name="TextBox 12"/>
+          <p:cNvPr id="117" name="TextBox 12"/>
           <p:cNvSpPr/>
           <p:nvPr/>
         </p:nvSpPr>
         <p:spPr>
           <a:xfrm>
             <a:off x="685800" y="1967760"/>
-            <a:ext cx="6172200" cy="3290040"/>
+            <a:ext cx="6171840" cy="3290040"/>
           </a:xfrm>
           <a:prstGeom prst="rect">
             <a:avLst/>
@@ -5299,6 +7697,7 @@
                   <a:srgbClr val="134c8f"/>
                 </a:solidFill>
                 <a:latin typeface="Raleway"/>
+                <a:ea typeface="DejaVu Sans"/>
               </a:rPr>
               <a:t>Arquitectura:</a:t>
             </a:r>
@@ -5330,6 +7729,7 @@
                   <a:srgbClr val="134c8f"/>
                 </a:solidFill>
                 <a:latin typeface="Raleway"/>
+                <a:ea typeface="DejaVu Sans"/>
               </a:rPr>
               <a:t>domain → entidades</a:t>
             </a:r>
@@ -5350,6 +7750,7 @@
                   <a:srgbClr val="134c8f"/>
                 </a:solidFill>
                 <a:latin typeface="Raleway"/>
+                <a:ea typeface="DejaVu Sans"/>
               </a:rPr>
               <a:t>dao → acceso a datos</a:t>
             </a:r>
@@ -5370,6 +7771,7 @@
                   <a:srgbClr val="134c8f"/>
                 </a:solidFill>
                 <a:latin typeface="Raleway"/>
+                <a:ea typeface="DejaVu Sans"/>
               </a:rPr>
               <a:t>db → configuración base de datos</a:t>
             </a:r>
@@ -5390,6 +7792,7 @@
                   <a:srgbClr val="134c8f"/>
                 </a:solidFill>
                 <a:latin typeface="Raleway"/>
+                <a:ea typeface="DejaVu Sans"/>
               </a:rPr>
               <a:t>services → lógica de negocio</a:t>
             </a:r>
@@ -5410,6 +7813,7 @@
                   <a:srgbClr val="134c8f"/>
                 </a:solidFill>
                 <a:latin typeface="Raleway"/>
+                <a:ea typeface="DejaVu Sans"/>
               </a:rPr>
               <a:t>controllers → interacción con interfaz</a:t>
             </a:r>
@@ -5421,14 +7825,14 @@
       </p:sp>
       <p:sp>
         <p:nvSpPr>
-          <p:cNvPr id="76" name="Title 22"/>
+          <p:cNvPr id="118" name="Title 22"/>
           <p:cNvSpPr/>
           <p:nvPr/>
         </p:nvSpPr>
         <p:spPr>
           <a:xfrm>
             <a:off x="685800" y="516960"/>
-            <a:ext cx="7041600" cy="1018080"/>
+            <a:ext cx="7041240" cy="1017720"/>
           </a:xfrm>
           <a:prstGeom prst="rect">
             <a:avLst/>
@@ -5461,6 +7865,7 @@
                   <a:srgbClr val="134c8f"/>
                 </a:solidFill>
                 <a:latin typeface="Raleway SemiBold"/>
+                <a:ea typeface="DejaVu Sans"/>
               </a:rPr>
               <a:t>5. Desarrollo</a:t>
             </a:r>
@@ -5475,14 +7880,14 @@
       </p:sp>
       <p:sp>
         <p:nvSpPr>
-          <p:cNvPr id="77" name="Rectángulo 7"/>
+          <p:cNvPr id="119" name="Rectángulo 7"/>
           <p:cNvSpPr/>
           <p:nvPr/>
         </p:nvSpPr>
         <p:spPr>
           <a:xfrm>
             <a:off x="481320" y="496800"/>
-            <a:ext cx="151920" cy="1018080"/>
+            <a:ext cx="151560" cy="1017720"/>
           </a:xfrm>
           <a:prstGeom prst="rect">
             <a:avLst/>
@@ -5503,7 +7908,7 @@
       </p:sp>
       <p:pic>
         <p:nvPicPr>
-          <p:cNvPr id="78" name="" descr=""/>
+          <p:cNvPr id="120" name="" descr=""/>
           <p:cNvPicPr/>
           <p:nvPr/>
         </p:nvPicPr>
@@ -5514,7 +7919,7 @@
         <p:spPr>
           <a:xfrm>
             <a:off x="7789680" y="516960"/>
-            <a:ext cx="2954520" cy="5865840"/>
+            <a:ext cx="2954160" cy="5865480"/>
           </a:xfrm>
           <a:prstGeom prst="rect">
             <a:avLst/>
@@ -5556,7 +7961,7 @@
       </p:grpSpPr>
       <p:pic>
         <p:nvPicPr>
-          <p:cNvPr id="79" name="Imagen 5" descr=""/>
+          <p:cNvPr id="121" name="Imagen 5" descr=""/>
           <p:cNvPicPr/>
           <p:nvPr/>
         </p:nvPicPr>
@@ -5566,8 +7971,8 @@
         </p:blipFill>
         <p:spPr>
           <a:xfrm flipH="1">
-            <a:off x="360" y="5207760"/>
-            <a:ext cx="12191760" cy="1649880"/>
+            <a:off x="720" y="5207760"/>
+            <a:ext cx="12191400" cy="1649520"/>
           </a:xfrm>
           <a:prstGeom prst="rect">
             <a:avLst/>
@@ -5579,14 +7984,14 @@
       </p:pic>
       <p:sp>
         <p:nvSpPr>
-          <p:cNvPr id="80" name="TextBox 2"/>
+          <p:cNvPr id="122" name="TextBox 2"/>
           <p:cNvSpPr/>
           <p:nvPr/>
         </p:nvSpPr>
         <p:spPr>
           <a:xfrm>
             <a:off x="685800" y="1460520"/>
-            <a:ext cx="5257800" cy="3747240"/>
+            <a:ext cx="5257440" cy="3747240"/>
           </a:xfrm>
           <a:prstGeom prst="rect">
             <a:avLst/>
@@ -5619,6 +8024,7 @@
                   <a:srgbClr val="134c8f"/>
                 </a:solidFill>
                 <a:latin typeface="Raleway"/>
+                <a:ea typeface="DejaVu Sans"/>
               </a:rPr>
               <a:t>Base de datos: </a:t>
             </a:r>
@@ -5650,6 +8056,7 @@
                   <a:srgbClr val="134c8f"/>
                 </a:solidFill>
                 <a:latin typeface="Raleway"/>
+                <a:ea typeface="DejaVu Sans"/>
               </a:rPr>
               <a:t>- Tablas: account, category, transaction</a:t>
             </a:r>
@@ -5670,6 +8077,7 @@
                   <a:srgbClr val="134c8f"/>
                 </a:solidFill>
                 <a:latin typeface="Raleway"/>
+                <a:ea typeface="DejaVu Sans"/>
               </a:rPr>
               <a:t>- Relaciones mediante claves foráneas</a:t>
             </a:r>
@@ -5690,6 +8098,7 @@
                   <a:srgbClr val="134c8f"/>
                 </a:solidFill>
                 <a:latin typeface="Raleway"/>
+                <a:ea typeface="DejaVu Sans"/>
               </a:rPr>
               <a:t>- Restricciones para integridad</a:t>
             </a:r>
@@ -5710,6 +8119,7 @@
                   <a:srgbClr val="134c8f"/>
                 </a:solidFill>
                 <a:latin typeface="Raleway"/>
+                <a:ea typeface="DejaVu Sans"/>
               </a:rPr>
               <a:t>- Uso de SQLite</a:t>
             </a:r>
@@ -5721,14 +8131,14 @@
       </p:sp>
       <p:sp>
         <p:nvSpPr>
-          <p:cNvPr id="81" name="Title 2"/>
+          <p:cNvPr id="123" name="Title 2"/>
           <p:cNvSpPr/>
           <p:nvPr/>
         </p:nvSpPr>
         <p:spPr>
           <a:xfrm>
             <a:off x="685800" y="516960"/>
-            <a:ext cx="7041600" cy="1018080"/>
+            <a:ext cx="7041240" cy="1017720"/>
           </a:xfrm>
           <a:prstGeom prst="rect">
             <a:avLst/>
@@ -5761,6 +8171,7 @@
                   <a:srgbClr val="134c8f"/>
                 </a:solidFill>
                 <a:latin typeface="Raleway SemiBold"/>
+                <a:ea typeface="DejaVu Sans"/>
               </a:rPr>
               <a:t>5. Desarrollo</a:t>
             </a:r>
@@ -5775,14 +8186,14 @@
       </p:sp>
       <p:sp>
         <p:nvSpPr>
-          <p:cNvPr id="82" name="Rectángulo 2"/>
+          <p:cNvPr id="124" name="Rectángulo 2"/>
           <p:cNvSpPr/>
           <p:nvPr/>
         </p:nvSpPr>
         <p:spPr>
           <a:xfrm>
             <a:off x="481320" y="496800"/>
-            <a:ext cx="151920" cy="1018080"/>
+            <a:ext cx="151560" cy="1017720"/>
           </a:xfrm>
           <a:prstGeom prst="rect">
             <a:avLst/>
@@ -5803,7 +8214,7 @@
       </p:sp>
       <p:pic>
         <p:nvPicPr>
-          <p:cNvPr id="83" name="" descr=""/>
+          <p:cNvPr id="125" name="" descr=""/>
           <p:cNvPicPr/>
           <p:nvPr/>
         </p:nvPicPr>
@@ -5814,7 +8225,7 @@
         <p:spPr>
           <a:xfrm>
             <a:off x="6383160" y="1143000"/>
-            <a:ext cx="5504040" cy="5346360"/>
+            <a:ext cx="5503680" cy="5346000"/>
           </a:xfrm>
           <a:prstGeom prst="rect">
             <a:avLst/>
@@ -5856,7 +8267,7 @@
       </p:grpSpPr>
       <p:pic>
         <p:nvPicPr>
-          <p:cNvPr id="84" name="Imagen 6" descr=""/>
+          <p:cNvPr id="126" name="Imagen 6" descr=""/>
           <p:cNvPicPr/>
           <p:nvPr/>
         </p:nvPicPr>
@@ -5866,8 +8277,8 @@
         </p:blipFill>
         <p:spPr>
           <a:xfrm flipH="1">
-            <a:off x="360" y="5207760"/>
-            <a:ext cx="12191760" cy="1649880"/>
+            <a:off x="720" y="5207760"/>
+            <a:ext cx="12191400" cy="1649520"/>
           </a:xfrm>
           <a:prstGeom prst="rect">
             <a:avLst/>
@@ -5879,14 +8290,14 @@
       </p:pic>
       <p:sp>
         <p:nvSpPr>
-          <p:cNvPr id="85" name="TextBox 3"/>
+          <p:cNvPr id="127" name="TextBox 3"/>
           <p:cNvSpPr/>
           <p:nvPr/>
         </p:nvSpPr>
         <p:spPr>
           <a:xfrm>
             <a:off x="1143000" y="2514600"/>
-            <a:ext cx="5257800" cy="2832840"/>
+            <a:ext cx="5257440" cy="2832840"/>
           </a:xfrm>
           <a:prstGeom prst="rect">
             <a:avLst/>
@@ -5919,6 +8330,7 @@
                   <a:srgbClr val="134c8f"/>
                 </a:solidFill>
                 <a:latin typeface="Raleway"/>
+                <a:ea typeface="DejaVu Sans"/>
               </a:rPr>
               <a:t>Funcionalidades:</a:t>
             </a:r>
@@ -5950,6 +8362,7 @@
                   <a:srgbClr val="134c8f"/>
                 </a:solidFill>
                 <a:latin typeface="Raleway"/>
+                <a:ea typeface="DejaVu Sans"/>
               </a:rPr>
               <a:t>- CRUD completo</a:t>
             </a:r>
@@ -5970,6 +8383,7 @@
                   <a:srgbClr val="134c8f"/>
                 </a:solidFill>
                 <a:latin typeface="Raleway"/>
+                <a:ea typeface="DejaVu Sans"/>
               </a:rPr>
               <a:t>- Validaciones en capa service</a:t>
             </a:r>
@@ -5990,6 +8404,7 @@
                   <a:srgbClr val="134c8f"/>
                 </a:solidFill>
                 <a:latin typeface="Raleway"/>
+                <a:ea typeface="DejaVu Sans"/>
               </a:rPr>
               <a:t>- Cálculo de balances</a:t>
             </a:r>
@@ -6010,6 +8425,7 @@
                   <a:srgbClr val="134c8f"/>
                 </a:solidFill>
                 <a:latin typeface="Raleway"/>
+                <a:ea typeface="DejaVu Sans"/>
               </a:rPr>
               <a:t>- Resúmenes financieros</a:t>
             </a:r>
@@ -6021,14 +8437,14 @@
       </p:sp>
       <p:sp>
         <p:nvSpPr>
-          <p:cNvPr id="86" name="Title 3"/>
+          <p:cNvPr id="128" name="Title 3"/>
           <p:cNvSpPr/>
           <p:nvPr/>
         </p:nvSpPr>
         <p:spPr>
           <a:xfrm>
             <a:off x="685800" y="516960"/>
-            <a:ext cx="7041600" cy="1018080"/>
+            <a:ext cx="7041240" cy="1017720"/>
           </a:xfrm>
           <a:prstGeom prst="rect">
             <a:avLst/>
@@ -6061,6 +8477,7 @@
                   <a:srgbClr val="134c8f"/>
                 </a:solidFill>
                 <a:latin typeface="Raleway SemiBold"/>
+                <a:ea typeface="DejaVu Sans"/>
               </a:rPr>
               <a:t>5. Desarrollo</a:t>
             </a:r>
@@ -6075,14 +8492,14 @@
       </p:sp>
       <p:sp>
         <p:nvSpPr>
-          <p:cNvPr id="87" name="Rectángulo 3"/>
+          <p:cNvPr id="129" name="Rectángulo 3"/>
           <p:cNvSpPr/>
           <p:nvPr/>
         </p:nvSpPr>
         <p:spPr>
           <a:xfrm>
             <a:off x="481320" y="496800"/>
-            <a:ext cx="151920" cy="1018080"/>
+            <a:ext cx="151560" cy="1017720"/>
           </a:xfrm>
           <a:prstGeom prst="rect">
             <a:avLst/>
@@ -6103,7 +8520,7 @@
       </p:sp>
       <p:pic>
         <p:nvPicPr>
-          <p:cNvPr id="88" name="" descr=""/>
+          <p:cNvPr id="130" name="" descr=""/>
           <p:cNvPicPr/>
           <p:nvPr/>
         </p:nvPicPr>
@@ -6114,7 +8531,7 @@
         <p:spPr>
           <a:xfrm>
             <a:off x="914400" y="1220040"/>
-            <a:ext cx="8513640" cy="1294560"/>
+            <a:ext cx="8513280" cy="1294200"/>
           </a:xfrm>
           <a:prstGeom prst="rect">
             <a:avLst/>
@@ -6361,4 +8778,230 @@
     </a:fmtScheme>
   </a:themeElements>
 </a:theme>
+</file>
+
+<file path=ppt/theme/theme2.xml><?xml version="1.0" encoding="utf-8"?>
+<a:theme xmlns:a="http://schemas.openxmlformats.org/drawingml/2006/main" name="Office Theme">
+  <a:themeElements>
+    <a:clrScheme name="Office">
+      <a:dk1>
+        <a:sysClr val="windowText" lastClr="000000"/>
+      </a:dk1>
+      <a:lt1>
+        <a:sysClr val="window" lastClr="FFFFFF"/>
+      </a:lt1>
+      <a:dk2>
+        <a:srgbClr val="1f497d"/>
+      </a:dk2>
+      <a:lt2>
+        <a:srgbClr val="eeece1"/>
+      </a:lt2>
+      <a:accent1>
+        <a:srgbClr val="4f81bd"/>
+      </a:accent1>
+      <a:accent2>
+        <a:srgbClr val="c0504d"/>
+      </a:accent2>
+      <a:accent3>
+        <a:srgbClr val="9bbb59"/>
+      </a:accent3>
+      <a:accent4>
+        <a:srgbClr val="8064a2"/>
+      </a:accent4>
+      <a:accent5>
+        <a:srgbClr val="4bacc6"/>
+      </a:accent5>
+      <a:accent6>
+        <a:srgbClr val="f79646"/>
+      </a:accent6>
+      <a:hlink>
+        <a:srgbClr val="0000ff"/>
+      </a:hlink>
+      <a:folHlink>
+        <a:srgbClr val="800080"/>
+      </a:folHlink>
+    </a:clrScheme>
+    <a:fontScheme name="Office">
+      <a:majorFont>
+        <a:latin typeface="Arial"/>
+        <a:ea typeface="DejaVu Sans"/>
+        <a:cs typeface="DejaVu Sans"/>
+      </a:majorFont>
+      <a:minorFont>
+        <a:latin typeface="Arial"/>
+        <a:ea typeface="DejaVu Sans"/>
+        <a:cs typeface="DejaVu Sans"/>
+      </a:minorFont>
+    </a:fontScheme>
+    <a:fmtScheme name="Office">
+      <a:fillStyleLst>
+        <a:solidFill>
+          <a:schemeClr val="phClr"/>
+        </a:solidFill>
+        <a:gradFill rotWithShape="1">
+          <a:gsLst>
+            <a:gs pos="0">
+              <a:schemeClr val="phClr">
+                <a:tint val="50000"/>
+                <a:satMod val="300000"/>
+              </a:schemeClr>
+            </a:gs>
+            <a:gs pos="35000">
+              <a:schemeClr val="phClr">
+                <a:tint val="37000"/>
+                <a:satMod val="300000"/>
+              </a:schemeClr>
+            </a:gs>
+            <a:gs pos="100000">
+              <a:schemeClr val="phClr">
+                <a:tint val="15000"/>
+                <a:satMod val="350000"/>
+              </a:schemeClr>
+            </a:gs>
+          </a:gsLst>
+          <a:lin ang="16200000" scaled="1"/>
+        </a:gradFill>
+        <a:gradFill rotWithShape="1">
+          <a:gsLst>
+            <a:gs pos="0">
+              <a:schemeClr val="phClr">
+                <a:shade val="51000"/>
+                <a:satMod val="130000"/>
+              </a:schemeClr>
+            </a:gs>
+            <a:gs pos="80000">
+              <a:schemeClr val="phClr">
+                <a:shade val="93000"/>
+                <a:satMod val="130000"/>
+              </a:schemeClr>
+            </a:gs>
+            <a:gs pos="100000">
+              <a:schemeClr val="phClr">
+                <a:shade val="94000"/>
+                <a:satMod val="135000"/>
+              </a:schemeClr>
+            </a:gs>
+          </a:gsLst>
+          <a:lin ang="16200000" scaled="0"/>
+        </a:gradFill>
+      </a:fillStyleLst>
+      <a:lnStyleLst>
+        <a:ln w="9525" cap="flat" cmpd="sng" algn="ctr">
+          <a:solidFill>
+            <a:schemeClr val="phClr">
+              <a:shade val="95000"/>
+              <a:satMod val="105000"/>
+            </a:schemeClr>
+          </a:solidFill>
+          <a:prstDash val="solid"/>
+          <a:miter/>
+        </a:ln>
+        <a:ln w="25400" cap="flat" cmpd="sng" algn="ctr">
+          <a:solidFill>
+            <a:schemeClr val="phClr"/>
+          </a:solidFill>
+          <a:prstDash val="solid"/>
+          <a:miter/>
+        </a:ln>
+        <a:ln w="38100" cap="flat" cmpd="sng" algn="ctr">
+          <a:solidFill>
+            <a:schemeClr val="phClr"/>
+          </a:solidFill>
+          <a:prstDash val="solid"/>
+          <a:miter/>
+        </a:ln>
+      </a:lnStyleLst>
+      <a:effectStyleLst>
+        <a:effectStyle>
+          <a:effectLst>
+            <a:outerShdw blurRad="40000" dist="20000" dir="5400000" rotWithShape="0">
+              <a:srgbClr val="000000">
+                <a:alpha val="38000"/>
+              </a:srgbClr>
+            </a:outerShdw>
+          </a:effectLst>
+        </a:effectStyle>
+        <a:effectStyle>
+          <a:effectLst>
+            <a:outerShdw blurRad="40000" dist="23000" dir="5400000" rotWithShape="0">
+              <a:srgbClr val="000000">
+                <a:alpha val="35000"/>
+              </a:srgbClr>
+            </a:outerShdw>
+          </a:effectLst>
+        </a:effectStyle>
+        <a:effectStyle>
+          <a:effectLst>
+            <a:outerShdw blurRad="40000" dist="23000" dir="5400000" rotWithShape="0">
+              <a:srgbClr val="000000">
+                <a:alpha val="35000"/>
+              </a:srgbClr>
+            </a:outerShdw>
+          </a:effectLst>
+          <a:scene3d>
+            <a:camera prst="orthographicFront">
+              <a:rot lat="0" lon="0" rev="0"/>
+            </a:camera>
+            <a:lightRig rig="threePt" dir="t">
+              <a:rot lat="0" lon="0" rev="1200000"/>
+            </a:lightRig>
+          </a:scene3d>
+          <a:sp3d>
+            <a:bevelT w="63500" h="25400"/>
+          </a:sp3d>
+        </a:effectStyle>
+      </a:effectStyleLst>
+      <a:bgFillStyleLst>
+        <a:solidFill>
+          <a:schemeClr val="phClr"/>
+        </a:solidFill>
+        <a:gradFill rotWithShape="1">
+          <a:gsLst>
+            <a:gs pos="0">
+              <a:schemeClr val="phClr">
+                <a:tint val="40000"/>
+                <a:satMod val="350000"/>
+              </a:schemeClr>
+            </a:gs>
+            <a:gs pos="40000">
+              <a:schemeClr val="phClr">
+                <a:tint val="45000"/>
+                <a:shade val="99000"/>
+                <a:satMod val="350000"/>
+              </a:schemeClr>
+            </a:gs>
+            <a:gs pos="100000">
+              <a:schemeClr val="phClr">
+                <a:shade val="20000"/>
+                <a:satMod val="255000"/>
+              </a:schemeClr>
+            </a:gs>
+          </a:gsLst>
+          <a:path path="circle">
+            <a:fillToRect l="50000" t="-80000" r="50000" b="180000"/>
+          </a:path>
+        </a:gradFill>
+        <a:gradFill rotWithShape="1">
+          <a:gsLst>
+            <a:gs pos="0">
+              <a:schemeClr val="phClr">
+                <a:tint val="80000"/>
+                <a:satMod val="300000"/>
+              </a:schemeClr>
+            </a:gs>
+            <a:gs pos="100000">
+              <a:schemeClr val="phClr">
+                <a:shade val="30000"/>
+                <a:satMod val="200000"/>
+              </a:schemeClr>
+            </a:gs>
+          </a:gsLst>
+          <a:path path="circle">
+            <a:fillToRect l="50000" t="50000" r="50000" b="50000"/>
+          </a:path>
+        </a:gradFill>
+      </a:bgFillStyleLst>
+    </a:fmtScheme>
+  </a:themeElements>
+</a:theme>
 </file>
--- a/docs/Sistema Gestor de Finanzas Personales - Diego J. Martín Roldán.pptx
+++ b/docs/Sistema Gestor de Finanzas Personales - Diego J. Martín Roldán.pptx
@@ -73,7 +73,7 @@
         <p:txBody>
           <a:bodyPr/>
           <a:p>
-            <a:fld id="{465003AD-AA6D-4A27-9F2A-F7A852BEF1A4}" type="slidenum">
+            <a:fld id="{F48121DB-DA6A-45B7-949B-6B8391642453}" type="slidenum">
               <a:t>&lt;#&gt;</a:t>
             </a:fld>
           </a:p>
@@ -261,7 +261,7 @@
         <p:txBody>
           <a:bodyPr/>
           <a:p>
-            <a:fld id="{E0EFBB7B-61C8-494B-8660-E5C53B3E0AD9}" type="slidenum">
+            <a:fld id="{9ED773DE-C803-4FD8-9CAE-3B672B1D3311}" type="slidenum">
               <a:t>&lt;#&gt;</a:t>
             </a:fld>
           </a:p>
@@ -517,7 +517,7 @@
         <p:txBody>
           <a:bodyPr/>
           <a:p>
-            <a:fld id="{DB7DB2B7-FBE1-4D7B-B6E7-725BAD9696CC}" type="slidenum">
+            <a:fld id="{4AA4B56B-2779-4BD6-8955-419C50BB79E9}" type="slidenum">
               <a:t>&lt;#&gt;</a:t>
             </a:fld>
           </a:p>
@@ -841,7 +841,7 @@
         <p:txBody>
           <a:bodyPr/>
           <a:p>
-            <a:fld id="{1F027D3C-FB4E-4BFE-AD1B-0E40CBD2B31E}" type="slidenum">
+            <a:fld id="{B60FCB92-A116-4698-B4E1-4C2FA833EC8A}" type="slidenum">
               <a:t>&lt;#&gt;</a:t>
             </a:fld>
           </a:p>
@@ -924,7 +924,7 @@
         <p:txBody>
           <a:bodyPr/>
           <a:p>
-            <a:fld id="{EE189EAC-00E5-42BD-A239-F80AE8F8DB9A}" type="slidenum">
+            <a:fld id="{964DF748-A2C4-4251-9A8C-34AA3E71CAA2}" type="slidenum">
               <a:t>&lt;#&gt;</a:t>
             </a:fld>
           </a:p>
@@ -1081,7 +1081,7 @@
         <p:txBody>
           <a:bodyPr/>
           <a:p>
-            <a:fld id="{AE5596E2-31EE-409A-A057-7B0EEAC8E38B}" type="slidenum">
+            <a:fld id="{7D4E12B9-6817-48CA-AFCF-6BAD2FF7FF7F}" type="slidenum">
               <a:t>&lt;#&gt;</a:t>
             </a:fld>
           </a:p>
@@ -1235,7 +1235,7 @@
         <p:txBody>
           <a:bodyPr/>
           <a:p>
-            <a:fld id="{9A7B0C0F-2717-4885-A4BC-C11727EAB233}" type="slidenum">
+            <a:fld id="{8A346237-AD23-4C4A-B438-D8BD8C70F5B8}" type="slidenum">
               <a:t>&lt;#&gt;</a:t>
             </a:fld>
           </a:p>
@@ -1423,7 +1423,7 @@
         <p:txBody>
           <a:bodyPr/>
           <a:p>
-            <a:fld id="{0F9755CA-374B-4611-B04B-A524ED3840F5}" type="slidenum">
+            <a:fld id="{6EFB7643-8965-4233-A09F-A18D78A67CB6}" type="slidenum">
               <a:t>&lt;#&gt;</a:t>
             </a:fld>
           </a:p>
@@ -1543,7 +1543,7 @@
         <p:txBody>
           <a:bodyPr/>
           <a:p>
-            <a:fld id="{9FD19CD7-5226-4A4C-992E-51FB7A331ABA}" type="slidenum">
+            <a:fld id="{D51B609A-AF29-48EA-9758-17597E2B4249}" type="slidenum">
               <a:t>&lt;#&gt;</a:t>
             </a:fld>
           </a:p>
@@ -1663,7 +1663,7 @@
         <p:txBody>
           <a:bodyPr/>
           <a:p>
-            <a:fld id="{D80ADD45-A6F2-42E3-9CA1-6AC1BE58C7D7}" type="slidenum">
+            <a:fld id="{276C9839-B065-4AD6-BD26-CCB9154CDD9E}" type="slidenum">
               <a:t>&lt;#&gt;</a:t>
             </a:fld>
           </a:p>
@@ -1885,7 +1885,7 @@
         <p:txBody>
           <a:bodyPr/>
           <a:p>
-            <a:fld id="{E1ED4391-DAEF-4699-9634-3108282B83AD}" type="slidenum">
+            <a:fld id="{CFA0D87F-D517-435D-9502-4E10FA188C19}" type="slidenum">
               <a:t>&lt;#&gt;</a:t>
             </a:fld>
           </a:p>
@@ -2042,7 +2042,7 @@
         <p:txBody>
           <a:bodyPr/>
           <a:p>
-            <a:fld id="{99478DF6-235A-44B1-BFE6-E164482ADDE6}" type="slidenum">
+            <a:fld id="{4F30E520-27F4-45E1-BE5B-AE8F96B16F9C}" type="slidenum">
               <a:t>&lt;#&gt;</a:t>
             </a:fld>
           </a:p>
@@ -2264,7 +2264,7 @@
         <p:txBody>
           <a:bodyPr/>
           <a:p>
-            <a:fld id="{357F145F-3185-415D-9E8C-B86C41A4984D}" type="slidenum">
+            <a:fld id="{C579CF9C-56E2-49E4-AF96-C6A73DB2E19E}" type="slidenum">
               <a:t>&lt;#&gt;</a:t>
             </a:fld>
           </a:p>
@@ -2486,7 +2486,7 @@
         <p:txBody>
           <a:bodyPr/>
           <a:p>
-            <a:fld id="{8ECAB6D2-C0FE-43F4-A29D-9B58F652BB57}" type="slidenum">
+            <a:fld id="{D78EA79D-A456-44B9-BF59-ABF246AFC486}" type="slidenum">
               <a:t>&lt;#&gt;</a:t>
             </a:fld>
           </a:p>
@@ -2674,7 +2674,7 @@
         <p:txBody>
           <a:bodyPr/>
           <a:p>
-            <a:fld id="{644366D8-DB1B-4827-BA35-2931BCD706B1}" type="slidenum">
+            <a:fld id="{D64CEB34-D05E-411C-957E-08A40DF3927D}" type="slidenum">
               <a:t>&lt;#&gt;</a:t>
             </a:fld>
           </a:p>
@@ -2930,7 +2930,7 @@
         <p:txBody>
           <a:bodyPr/>
           <a:p>
-            <a:fld id="{265EB786-291D-417A-8995-1F41404AF52A}" type="slidenum">
+            <a:fld id="{5CC4FEB1-CBD8-455A-8E33-F66A960E89AB}" type="slidenum">
               <a:t>&lt;#&gt;</a:t>
             </a:fld>
           </a:p>
@@ -3254,7 +3254,7 @@
         <p:txBody>
           <a:bodyPr/>
           <a:p>
-            <a:fld id="{ADE60FBF-43A0-4184-9BED-045CE4F7E31D}" type="slidenum">
+            <a:fld id="{69A111C7-9168-4C5E-A898-7E05154A55F4}" type="slidenum">
               <a:t>&lt;#&gt;</a:t>
             </a:fld>
           </a:p>
@@ -3408,7 +3408,7 @@
         <p:txBody>
           <a:bodyPr/>
           <a:p>
-            <a:fld id="{3AEC71F0-65FD-4F00-B3C0-7004BB56F2B8}" type="slidenum">
+            <a:fld id="{1B1C640E-3613-4224-B852-91EA8E4F724C}" type="slidenum">
               <a:t>&lt;#&gt;</a:t>
             </a:fld>
           </a:p>
@@ -3596,7 +3596,7 @@
         <p:txBody>
           <a:bodyPr/>
           <a:p>
-            <a:fld id="{2F9EC6C7-3976-4A93-AC60-58654F745839}" type="slidenum">
+            <a:fld id="{F07196F2-1193-4D20-9ED7-178B1E9AF4FB}" type="slidenum">
               <a:t>&lt;#&gt;</a:t>
             </a:fld>
           </a:p>
@@ -3716,7 +3716,7 @@
         <p:txBody>
           <a:bodyPr/>
           <a:p>
-            <a:fld id="{1D8D1CEB-1873-4619-A13A-8A1841E3ECC3}" type="slidenum">
+            <a:fld id="{504DB512-8D76-4B51-876C-4E56B1CB885B}" type="slidenum">
               <a:t>&lt;#&gt;</a:t>
             </a:fld>
           </a:p>
@@ -3836,7 +3836,7 @@
         <p:txBody>
           <a:bodyPr/>
           <a:p>
-            <a:fld id="{5104CA57-DBE9-408E-996D-341D3910DA8B}" type="slidenum">
+            <a:fld id="{CA33D2B6-8ED0-44D7-9EB4-AACBF2033C5C}" type="slidenum">
               <a:t>&lt;#&gt;</a:t>
             </a:fld>
           </a:p>
@@ -4058,7 +4058,7 @@
         <p:txBody>
           <a:bodyPr/>
           <a:p>
-            <a:fld id="{C65DBE2D-9F89-4CDC-AD05-CCA04AA1FBB9}" type="slidenum">
+            <a:fld id="{2F0F7792-3063-4884-A38B-CB4B65CB2ADA}" type="slidenum">
               <a:t>&lt;#&gt;</a:t>
             </a:fld>
           </a:p>
@@ -4280,7 +4280,7 @@
         <p:txBody>
           <a:bodyPr/>
           <a:p>
-            <a:fld id="{5567A8B5-800F-44FA-9B9A-A6389EDCF6DE}" type="slidenum">
+            <a:fld id="{B418A883-23D9-4254-8C91-E9D14379DA17}" type="slidenum">
               <a:t>&lt;#&gt;</a:t>
             </a:fld>
           </a:p>
@@ -4502,7 +4502,7 @@
         <p:txBody>
           <a:bodyPr/>
           <a:p>
-            <a:fld id="{77B2F713-7158-4C2B-801F-61669745AE93}" type="slidenum">
+            <a:fld id="{D9F0AB96-2508-4C02-803B-BA221A1EE7C0}" type="slidenum">
               <a:t>&lt;#&gt;</a:t>
             </a:fld>
           </a:p>
@@ -4571,7 +4571,7 @@
         <p:spPr>
           <a:xfrm>
             <a:off x="11279880" y="253440"/>
-            <a:ext cx="530280" cy="584280"/>
+            <a:ext cx="529920" cy="583920"/>
           </a:xfrm>
           <a:prstGeom prst="rect">
             <a:avLst/>
@@ -4593,8 +4593,8 @@
         </p:nvSpPr>
         <p:spPr>
           <a:xfrm>
-            <a:off x="1525680" y="2041560"/>
-            <a:ext cx="9143280" cy="1974960"/>
+            <a:off x="609480" y="273600"/>
+            <a:ext cx="10972080" cy="1144440"/>
           </a:xfrm>
           <a:prstGeom prst="rect">
             <a:avLst/>
@@ -4628,180 +4628,13 @@
             <a:spLocks noGrp="1"/>
           </p:cNvSpPr>
           <p:nvPr>
-            <p:ph type="ftr" idx="1"/>
-          </p:nvPr>
-        </p:nvSpPr>
-        <p:spPr>
-          <a:xfrm>
-            <a:off x="4038480" y="6356520"/>
-            <a:ext cx="4114080" cy="364320"/>
-          </a:xfrm>
-          <a:prstGeom prst="rect">
-            <a:avLst/>
-          </a:prstGeom>
-          <a:noFill/>
-          <a:ln w="0">
-            <a:noFill/>
-          </a:ln>
-        </p:spPr>
-        <p:txBody>
-          <a:bodyPr lIns="90000" rIns="90000" tIns="45000" bIns="45000" anchor="ctr">
-            <a:noAutofit/>
-          </a:bodyPr>
-          <a:lstStyle>
-            <a:lvl1pPr algn="ctr">
-              <a:lnSpc>
-                <a:spcPct val="100000"/>
-              </a:lnSpc>
-              <a:buNone/>
-              <a:defRPr b="0" lang="en-US" sz="1400" spc="-1" strike="noStrike">
-                <a:latin typeface="Times New Roman"/>
-              </a:defRPr>
-            </a:lvl1pPr>
-          </a:lstStyle>
-          <a:p>
-            <a:pPr algn="ctr">
-              <a:lnSpc>
-                <a:spcPct val="100000"/>
-              </a:lnSpc>
-              <a:buNone/>
-            </a:pPr>
-            <a:r>
-              <a:rPr b="0" lang="en-US" sz="1400" spc="-1" strike="noStrike">
-                <a:latin typeface="Times New Roman"/>
-              </a:rPr>
-              <a:t> </a:t>
-            </a:r>
-            <a:endParaRPr b="0" lang="en-US" sz="1400" spc="-1" strike="noStrike">
-              <a:latin typeface="Times New Roman"/>
-            </a:endParaRPr>
-          </a:p>
-        </p:txBody>
-      </p:sp>
-      <p:sp>
-        <p:nvSpPr>
-          <p:cNvPr id="3" name="PlaceHolder 3"/>
-          <p:cNvSpPr>
-            <a:spLocks noGrp="1"/>
-          </p:cNvSpPr>
-          <p:nvPr>
-            <p:ph type="sldNum" idx="2"/>
-          </p:nvPr>
-        </p:nvSpPr>
-        <p:spPr>
-          <a:xfrm>
-            <a:off x="8610480" y="6356520"/>
-            <a:ext cx="2742480" cy="364320"/>
-          </a:xfrm>
-          <a:prstGeom prst="rect">
-            <a:avLst/>
-          </a:prstGeom>
-          <a:noFill/>
-          <a:ln w="0">
-            <a:noFill/>
-          </a:ln>
-        </p:spPr>
-        <p:txBody>
-          <a:bodyPr lIns="90000" rIns="90000" tIns="45000" bIns="45000" anchor="ctr">
-            <a:noAutofit/>
-          </a:bodyPr>
-          <a:lstStyle>
-            <a:lvl1pPr algn="r">
-              <a:lnSpc>
-                <a:spcPct val="100000"/>
-              </a:lnSpc>
-              <a:buNone/>
-              <a:defRPr b="0" lang="en-US" sz="1200" spc="-1" strike="noStrike">
-                <a:solidFill>
-                  <a:srgbClr val="8b8b8b"/>
-                </a:solidFill>
-                <a:latin typeface="Calibri"/>
-              </a:defRPr>
-            </a:lvl1pPr>
-          </a:lstStyle>
-          <a:p>
-            <a:pPr algn="r">
-              <a:lnSpc>
-                <a:spcPct val="100000"/>
-              </a:lnSpc>
-              <a:buNone/>
-            </a:pPr>
-            <a:fld id="{E28FEC90-E577-4D4D-ADCA-0C32C284E760}" type="slidenum">
-              <a:rPr b="0" lang="en-US" sz="1200" spc="-1" strike="noStrike">
-                <a:solidFill>
-                  <a:srgbClr val="8b8b8b"/>
-                </a:solidFill>
-                <a:latin typeface="Calibri"/>
-              </a:rPr>
-              <a:t>10</a:t>
-            </a:fld>
-            <a:endParaRPr b="0" lang="en-US" sz="1200" spc="-1" strike="noStrike">
-              <a:latin typeface="Times New Roman"/>
-            </a:endParaRPr>
-          </a:p>
-        </p:txBody>
-      </p:sp>
-      <p:sp>
-        <p:nvSpPr>
-          <p:cNvPr id="4" name="PlaceHolder 4"/>
-          <p:cNvSpPr>
-            <a:spLocks noGrp="1"/>
-          </p:cNvSpPr>
-          <p:nvPr>
-            <p:ph type="dt" idx="3"/>
-          </p:nvPr>
-        </p:nvSpPr>
-        <p:spPr>
-          <a:xfrm>
-            <a:off x="838080" y="6356520"/>
-            <a:ext cx="2742480" cy="364320"/>
-          </a:xfrm>
-          <a:prstGeom prst="rect">
-            <a:avLst/>
-          </a:prstGeom>
-          <a:noFill/>
-          <a:ln w="0">
-            <a:noFill/>
-          </a:ln>
-        </p:spPr>
-        <p:txBody>
-          <a:bodyPr lIns="90000" rIns="90000" tIns="45000" bIns="45000" anchor="ctr">
-            <a:noAutofit/>
-          </a:bodyPr>
-          <a:lstStyle>
-            <a:lvl1pPr>
-              <a:defRPr b="0" lang="en-US" sz="1400" spc="-1" strike="noStrike">
-                <a:latin typeface="Times New Roman"/>
-              </a:defRPr>
-            </a:lvl1pPr>
-          </a:lstStyle>
-          <a:p>
-            <a:r>
-              <a:rPr b="0" lang="en-US" sz="1400" spc="-1" strike="noStrike">
-                <a:latin typeface="Times New Roman"/>
-              </a:rPr>
-              <a:t>&lt;date/time&gt;</a:t>
-            </a:r>
-            <a:endParaRPr b="0" lang="en-US" sz="1400" spc="-1" strike="noStrike">
-              <a:latin typeface="Times New Roman"/>
-            </a:endParaRPr>
-          </a:p>
-        </p:txBody>
-      </p:sp>
-      <p:sp>
-        <p:nvSpPr>
-          <p:cNvPr id="5" name="PlaceHolder 5"/>
-          <p:cNvSpPr>
-            <a:spLocks noGrp="1"/>
-          </p:cNvSpPr>
-          <p:nvPr>
             <p:ph type="body"/>
           </p:nvPr>
         </p:nvSpPr>
         <p:spPr>
           <a:xfrm>
             <a:off x="609480" y="1604520"/>
-            <a:ext cx="10972440" cy="3977280"/>
+            <a:ext cx="10972080" cy="3976920"/>
           </a:xfrm>
           <a:prstGeom prst="rect">
             <a:avLst/>
@@ -4828,12 +4661,12 @@
               <a:buChar char=""/>
             </a:pPr>
             <a:r>
-              <a:rPr b="0" lang="en-US" sz="3200" spc="-1" strike="noStrike">
+              <a:rPr b="0" lang="en-US" sz="1800" spc="-1" strike="noStrike">
                 <a:latin typeface="Arial"/>
               </a:rPr>
               <a:t>Click to edit the outline text format</a:t>
             </a:r>
-            <a:endParaRPr b="0" lang="en-US" sz="3200" spc="-1" strike="noStrike">
+            <a:endParaRPr b="0" lang="en-US" sz="1800" spc="-1" strike="noStrike">
               <a:latin typeface="Arial"/>
             </a:endParaRPr>
           </a:p>
@@ -4850,12 +4683,12 @@
               <a:buChar char=""/>
             </a:pPr>
             <a:r>
-              <a:rPr b="0" lang="en-US" sz="2800" spc="-1" strike="noStrike">
+              <a:rPr b="0" lang="en-US" sz="1800" spc="-1" strike="noStrike">
                 <a:latin typeface="Arial"/>
               </a:rPr>
               <a:t>Second Outline Level</a:t>
             </a:r>
-            <a:endParaRPr b="0" lang="en-US" sz="2800" spc="-1" strike="noStrike">
+            <a:endParaRPr b="0" lang="en-US" sz="1800" spc="-1" strike="noStrike">
               <a:latin typeface="Arial"/>
             </a:endParaRPr>
           </a:p>
@@ -4872,12 +4705,12 @@
               <a:buChar char=""/>
             </a:pPr>
             <a:r>
-              <a:rPr b="0" lang="en-US" sz="2400" spc="-1" strike="noStrike">
+              <a:rPr b="0" lang="en-US" sz="1800" spc="-1" strike="noStrike">
                 <a:latin typeface="Arial"/>
               </a:rPr>
               <a:t>Third Outline Level</a:t>
             </a:r>
-            <a:endParaRPr b="0" lang="en-US" sz="2400" spc="-1" strike="noStrike">
+            <a:endParaRPr b="0" lang="en-US" sz="1800" spc="-1" strike="noStrike">
               <a:latin typeface="Arial"/>
             </a:endParaRPr>
           </a:p>
@@ -4894,12 +4727,12 @@
               <a:buChar char=""/>
             </a:pPr>
             <a:r>
-              <a:rPr b="0" lang="en-US" sz="2000" spc="-1" strike="noStrike">
+              <a:rPr b="0" lang="en-US" sz="1800" spc="-1" strike="noStrike">
                 <a:latin typeface="Arial"/>
               </a:rPr>
               <a:t>Fourth Outline Level</a:t>
             </a:r>
-            <a:endParaRPr b="0" lang="en-US" sz="2000" spc="-1" strike="noStrike">
+            <a:endParaRPr b="0" lang="en-US" sz="1800" spc="-1" strike="noStrike">
               <a:latin typeface="Arial"/>
             </a:endParaRPr>
           </a:p>
@@ -4916,12 +4749,12 @@
               <a:buChar char=""/>
             </a:pPr>
             <a:r>
-              <a:rPr b="0" lang="en-US" sz="2000" spc="-1" strike="noStrike">
+              <a:rPr b="0" lang="en-US" sz="1800" spc="-1" strike="noStrike">
                 <a:latin typeface="Arial"/>
               </a:rPr>
               <a:t>Fifth Outline Level</a:t>
             </a:r>
-            <a:endParaRPr b="0" lang="en-US" sz="2000" spc="-1" strike="noStrike">
+            <a:endParaRPr b="0" lang="en-US" sz="1800" spc="-1" strike="noStrike">
               <a:latin typeface="Arial"/>
             </a:endParaRPr>
           </a:p>
@@ -4938,12 +4771,12 @@
               <a:buChar char=""/>
             </a:pPr>
             <a:r>
-              <a:rPr b="0" lang="en-US" sz="2000" spc="-1" strike="noStrike">
+              <a:rPr b="0" lang="en-US" sz="1800" spc="-1" strike="noStrike">
                 <a:latin typeface="Arial"/>
               </a:rPr>
               <a:t>Sixth Outline Level</a:t>
             </a:r>
-            <a:endParaRPr b="0" lang="en-US" sz="2000" spc="-1" strike="noStrike">
+            <a:endParaRPr b="0" lang="en-US" sz="1800" spc="-1" strike="noStrike">
               <a:latin typeface="Arial"/>
             </a:endParaRPr>
           </a:p>
@@ -4960,13 +4793,180 @@
               <a:buChar char=""/>
             </a:pPr>
             <a:r>
-              <a:rPr b="0" lang="en-US" sz="2000" spc="-1" strike="noStrike">
+              <a:rPr b="0" lang="en-US" sz="1800" spc="-1" strike="noStrike">
                 <a:latin typeface="Arial"/>
               </a:rPr>
               <a:t>Seventh Outline Level</a:t>
             </a:r>
-            <a:endParaRPr b="0" lang="en-US" sz="2000" spc="-1" strike="noStrike">
-              <a:latin typeface="Arial"/>
+            <a:endParaRPr b="0" lang="en-US" sz="1800" spc="-1" strike="noStrike">
+              <a:latin typeface="Arial"/>
+            </a:endParaRPr>
+          </a:p>
+        </p:txBody>
+      </p:sp>
+      <p:sp>
+        <p:nvSpPr>
+          <p:cNvPr id="3" name="PlaceHolder 3"/>
+          <p:cNvSpPr>
+            <a:spLocks noGrp="1"/>
+          </p:cNvSpPr>
+          <p:nvPr>
+            <p:ph type="ftr" idx="1"/>
+          </p:nvPr>
+        </p:nvSpPr>
+        <p:spPr>
+          <a:xfrm>
+            <a:off x="4038480" y="6356520"/>
+            <a:ext cx="4113720" cy="363960"/>
+          </a:xfrm>
+          <a:prstGeom prst="rect">
+            <a:avLst/>
+          </a:prstGeom>
+          <a:noFill/>
+          <a:ln w="0">
+            <a:noFill/>
+          </a:ln>
+        </p:spPr>
+        <p:txBody>
+          <a:bodyPr lIns="90000" rIns="90000" tIns="45000" bIns="45000" anchor="ctr">
+            <a:noAutofit/>
+          </a:bodyPr>
+          <a:lstStyle>
+            <a:lvl1pPr algn="ctr">
+              <a:lnSpc>
+                <a:spcPct val="100000"/>
+              </a:lnSpc>
+              <a:buNone/>
+              <a:defRPr b="0" lang="en-US" sz="1400" spc="-1" strike="noStrike">
+                <a:latin typeface="Times New Roman"/>
+              </a:defRPr>
+            </a:lvl1pPr>
+          </a:lstStyle>
+          <a:p>
+            <a:pPr algn="ctr">
+              <a:lnSpc>
+                <a:spcPct val="100000"/>
+              </a:lnSpc>
+              <a:buNone/>
+            </a:pPr>
+            <a:r>
+              <a:rPr b="0" lang="en-US" sz="1400" spc="-1" strike="noStrike">
+                <a:latin typeface="Times New Roman"/>
+              </a:rPr>
+              <a:t>&lt;footer&gt;</a:t>
+            </a:r>
+            <a:endParaRPr b="0" lang="en-US" sz="1400" spc="-1" strike="noStrike">
+              <a:latin typeface="Times New Roman"/>
+            </a:endParaRPr>
+          </a:p>
+        </p:txBody>
+      </p:sp>
+      <p:sp>
+        <p:nvSpPr>
+          <p:cNvPr id="4" name="PlaceHolder 4"/>
+          <p:cNvSpPr>
+            <a:spLocks noGrp="1"/>
+          </p:cNvSpPr>
+          <p:nvPr>
+            <p:ph type="sldNum" idx="2"/>
+          </p:nvPr>
+        </p:nvSpPr>
+        <p:spPr>
+          <a:xfrm>
+            <a:off x="8610480" y="6356520"/>
+            <a:ext cx="2742120" cy="363960"/>
+          </a:xfrm>
+          <a:prstGeom prst="rect">
+            <a:avLst/>
+          </a:prstGeom>
+          <a:noFill/>
+          <a:ln w="0">
+            <a:noFill/>
+          </a:ln>
+        </p:spPr>
+        <p:txBody>
+          <a:bodyPr lIns="90000" rIns="90000" tIns="45000" bIns="45000" anchor="ctr">
+            <a:noAutofit/>
+          </a:bodyPr>
+          <a:lstStyle>
+            <a:lvl1pPr algn="r">
+              <a:lnSpc>
+                <a:spcPct val="100000"/>
+              </a:lnSpc>
+              <a:buNone/>
+              <a:defRPr b="0" lang="en-US" sz="1200" spc="-1" strike="noStrike">
+                <a:solidFill>
+                  <a:srgbClr val="8b8b8b"/>
+                </a:solidFill>
+                <a:latin typeface="Calibri"/>
+              </a:defRPr>
+            </a:lvl1pPr>
+          </a:lstStyle>
+          <a:p>
+            <a:pPr algn="r">
+              <a:lnSpc>
+                <a:spcPct val="100000"/>
+              </a:lnSpc>
+              <a:buNone/>
+            </a:pPr>
+            <a:fld id="{26B4A4F1-535E-40BC-9E55-67C51124773C}" type="slidenum">
+              <a:rPr b="0" lang="en-US" sz="1200" spc="-1" strike="noStrike">
+                <a:solidFill>
+                  <a:srgbClr val="8b8b8b"/>
+                </a:solidFill>
+                <a:latin typeface="Calibri"/>
+              </a:rPr>
+              <a:t>&lt;number&gt;</a:t>
+            </a:fld>
+            <a:endParaRPr b="0" lang="en-US" sz="1200" spc="-1" strike="noStrike">
+              <a:latin typeface="Times New Roman"/>
+            </a:endParaRPr>
+          </a:p>
+        </p:txBody>
+      </p:sp>
+      <p:sp>
+        <p:nvSpPr>
+          <p:cNvPr id="5" name="PlaceHolder 5"/>
+          <p:cNvSpPr>
+            <a:spLocks noGrp="1"/>
+          </p:cNvSpPr>
+          <p:nvPr>
+            <p:ph type="dt" idx="3"/>
+          </p:nvPr>
+        </p:nvSpPr>
+        <p:spPr>
+          <a:xfrm>
+            <a:off x="838080" y="6356520"/>
+            <a:ext cx="2742120" cy="363960"/>
+          </a:xfrm>
+          <a:prstGeom prst="rect">
+            <a:avLst/>
+          </a:prstGeom>
+          <a:noFill/>
+          <a:ln w="0">
+            <a:noFill/>
+          </a:ln>
+        </p:spPr>
+        <p:txBody>
+          <a:bodyPr lIns="90000" rIns="90000" tIns="45000" bIns="45000" anchor="ctr">
+            <a:noAutofit/>
+          </a:bodyPr>
+          <a:lstStyle>
+            <a:lvl1pPr>
+              <a:defRPr b="0" lang="en-US" sz="1400" spc="-1" strike="noStrike">
+                <a:latin typeface="Times New Roman"/>
+              </a:defRPr>
+            </a:lvl1pPr>
+          </a:lstStyle>
+          <a:p>
+            <a:r>
+              <a:rPr b="0" lang="en-US" sz="1400" spc="-1" strike="noStrike">
+                <a:latin typeface="Times New Roman"/>
+              </a:rPr>
+              <a:t>&lt;date/time&gt;</a:t>
+            </a:r>
+            <a:endParaRPr b="0" lang="en-US" sz="1400" spc="-1" strike="noStrike">
+              <a:latin typeface="Times New Roman"/>
             </a:endParaRPr>
           </a:p>
         </p:txBody>
@@ -5028,7 +5028,7 @@
         <p:spPr>
           <a:xfrm>
             <a:off x="11279880" y="253440"/>
-            <a:ext cx="530280" cy="584280"/>
+            <a:ext cx="529920" cy="583920"/>
           </a:xfrm>
           <a:prstGeom prst="rect">
             <a:avLst/>
@@ -5051,7 +5051,7 @@
         <p:spPr>
           <a:xfrm>
             <a:off x="4038480" y="6356520"/>
-            <a:ext cx="4114080" cy="364320"/>
+            <a:ext cx="4113720" cy="363960"/>
           </a:xfrm>
           <a:prstGeom prst="rect">
             <a:avLst/>
@@ -5108,7 +5108,7 @@
         <p:spPr>
           <a:xfrm>
             <a:off x="8610480" y="6356520"/>
-            <a:ext cx="2742480" cy="364320"/>
+            <a:ext cx="2742120" cy="363960"/>
           </a:xfrm>
           <a:prstGeom prst="rect">
             <a:avLst/>
@@ -5143,7 +5143,7 @@
               </a:lnSpc>
               <a:buNone/>
             </a:pPr>
-            <a:fld id="{33385B8D-7945-4A46-9DE9-B6590E83F7DF}" type="slidenum">
+            <a:fld id="{4AA55937-55BA-46CA-91C8-5EF698B74A1F}" type="slidenum">
               <a:rPr b="0" lang="en-US" sz="1200" spc="-1" strike="noStrike">
                 <a:solidFill>
                   <a:srgbClr val="8b8b8b"/>
@@ -5171,7 +5171,7 @@
         <p:spPr>
           <a:xfrm>
             <a:off x="838080" y="6356520"/>
-            <a:ext cx="2742480" cy="364320"/>
+            <a:ext cx="2742120" cy="363960"/>
           </a:xfrm>
           <a:prstGeom prst="rect">
             <a:avLst/>
@@ -5477,7 +5477,7 @@
         <p:spPr>
           <a:xfrm>
             <a:off x="0" y="0"/>
-            <a:ext cx="12191400" cy="6857280"/>
+            <a:ext cx="12191040" cy="6856920"/>
           </a:xfrm>
           <a:prstGeom prst="rect">
             <a:avLst/>
@@ -5516,9 +5516,9 @@
         <p:grpSpPr>
           <a:xfrm>
             <a:off x="1371600" y="1080000"/>
-            <a:ext cx="8152560" cy="1064520"/>
+            <a:ext cx="8152200" cy="1064520"/>
             <a:chOff x="1371600" y="1080000"/>
-            <a:chExt cx="8152560" cy="1064520"/>
+            <a:chExt cx="8152200" cy="1064520"/>
           </a:xfrm>
         </p:grpSpPr>
         <p:sp>
@@ -5530,7 +5530,7 @@
           <p:spPr>
             <a:xfrm>
               <a:off x="1371600" y="1143000"/>
-              <a:ext cx="107280" cy="476280"/>
+              <a:ext cx="106920" cy="475920"/>
             </a:xfrm>
             <a:prstGeom prst="rect">
               <a:avLst/>
@@ -5558,7 +5558,7 @@
           <p:spPr>
             <a:xfrm>
               <a:off x="1479600" y="1080000"/>
-              <a:ext cx="8044560" cy="1064520"/>
+              <a:ext cx="8044200" cy="1064520"/>
             </a:xfrm>
             <a:prstGeom prst="rect">
               <a:avLst/>
@@ -5611,7 +5611,7 @@
         <p:spPr>
           <a:xfrm>
             <a:off x="2224440" y="3589200"/>
-            <a:ext cx="7742520" cy="1306440"/>
+            <a:ext cx="7742160" cy="1306080"/>
           </a:xfrm>
           <a:prstGeom prst="rect">
             <a:avLst/>
@@ -5709,7 +5709,7 @@
         <p:spPr>
           <a:xfrm>
             <a:off x="11264400" y="228600"/>
-            <a:ext cx="553680" cy="608760"/>
+            <a:ext cx="553320" cy="608400"/>
           </a:xfrm>
           <a:prstGeom prst="rect">
             <a:avLst/>
@@ -5733,7 +5733,7 @@
         <p:spPr>
           <a:xfrm>
             <a:off x="4501080" y="5371920"/>
-            <a:ext cx="3188880" cy="504720"/>
+            <a:ext cx="3188520" cy="504360"/>
           </a:xfrm>
           <a:prstGeom prst="rect">
             <a:avLst/>
@@ -5975,7 +5975,7 @@
       </p:grpSpPr>
       <p:pic>
         <p:nvPicPr>
-          <p:cNvPr id="131" name="Imagen 1" descr=""/>
+          <p:cNvPr id="132" name="Imagen 1" descr=""/>
           <p:cNvPicPr/>
           <p:nvPr/>
         </p:nvPicPr>
@@ -5985,8 +5985,8 @@
         </p:blipFill>
         <p:spPr>
           <a:xfrm flipH="1">
-            <a:off x="720" y="5207760"/>
-            <a:ext cx="12191400" cy="1649520"/>
+            <a:off x="1080" y="5207760"/>
+            <a:ext cx="12191040" cy="1649160"/>
           </a:xfrm>
           <a:prstGeom prst="rect">
             <a:avLst/>
@@ -5998,14 +5998,14 @@
       </p:pic>
       <p:sp>
         <p:nvSpPr>
-          <p:cNvPr id="132" name="TextBox 12"/>
+          <p:cNvPr id="133" name="TextBox 12"/>
           <p:cNvSpPr/>
           <p:nvPr/>
         </p:nvSpPr>
         <p:spPr>
           <a:xfrm>
             <a:off x="2943000" y="1731600"/>
-            <a:ext cx="5918760" cy="3747240"/>
+            <a:ext cx="5918400" cy="3747240"/>
           </a:xfrm>
           <a:prstGeom prst="rect">
             <a:avLst/>
@@ -6176,14 +6176,14 @@
       </p:sp>
       <p:sp>
         <p:nvSpPr>
-          <p:cNvPr id="133" name="Title 22"/>
+          <p:cNvPr id="134" name="Title 22"/>
           <p:cNvSpPr/>
           <p:nvPr/>
         </p:nvSpPr>
         <p:spPr>
           <a:xfrm>
             <a:off x="685800" y="516960"/>
-            <a:ext cx="8423640" cy="1017720"/>
+            <a:ext cx="8423280" cy="1017360"/>
           </a:xfrm>
           <a:prstGeom prst="rect">
             <a:avLst/>
@@ -6231,14 +6231,14 @@
       </p:sp>
       <p:sp>
         <p:nvSpPr>
-          <p:cNvPr id="134" name="Rectángulo 4"/>
+          <p:cNvPr id="135" name="Rectángulo 4"/>
           <p:cNvSpPr/>
           <p:nvPr/>
         </p:nvSpPr>
         <p:spPr>
           <a:xfrm>
             <a:off x="481320" y="496800"/>
-            <a:ext cx="151560" cy="1017720"/>
+            <a:ext cx="151200" cy="1017360"/>
           </a:xfrm>
           <a:prstGeom prst="rect">
             <a:avLst/>
@@ -6299,8 +6299,8 @@
         </p:blipFill>
         <p:spPr>
           <a:xfrm flipH="1">
-            <a:off x="720" y="5207760"/>
-            <a:ext cx="12191400" cy="1649520"/>
+            <a:off x="1080" y="5207760"/>
+            <a:ext cx="12191040" cy="1649160"/>
           </a:xfrm>
           <a:prstGeom prst="rect">
             <a:avLst/>
@@ -6319,7 +6319,7 @@
         <p:spPr>
           <a:xfrm>
             <a:off x="786240" y="2424240"/>
-            <a:ext cx="9500400" cy="2375640"/>
+            <a:ext cx="9500040" cy="2375640"/>
           </a:xfrm>
           <a:prstGeom prst="rect">
             <a:avLst/>
@@ -6434,7 +6434,7 @@
         <p:spPr>
           <a:xfrm>
             <a:off x="685800" y="516960"/>
-            <a:ext cx="5752440" cy="1017720"/>
+            <a:ext cx="5752080" cy="1017360"/>
           </a:xfrm>
           <a:prstGeom prst="rect">
             <a:avLst/>
@@ -6489,7 +6489,7 @@
         <p:spPr>
           <a:xfrm>
             <a:off x="481320" y="496800"/>
-            <a:ext cx="151560" cy="1017720"/>
+            <a:ext cx="151200" cy="1017360"/>
           </a:xfrm>
           <a:prstGeom prst="rect">
             <a:avLst/>
@@ -6550,8 +6550,8 @@
         </p:blipFill>
         <p:spPr>
           <a:xfrm flipH="1">
-            <a:off x="720" y="5207760"/>
-            <a:ext cx="12191400" cy="1649520"/>
+            <a:off x="1080" y="5207760"/>
+            <a:ext cx="12191040" cy="1649160"/>
           </a:xfrm>
           <a:prstGeom prst="rect">
             <a:avLst/>
@@ -6570,7 +6570,7 @@
         <p:spPr>
           <a:xfrm>
             <a:off x="1371600" y="1967760"/>
-            <a:ext cx="8229240" cy="2375640"/>
+            <a:ext cx="8228880" cy="2375640"/>
           </a:xfrm>
           <a:prstGeom prst="rect">
             <a:avLst/>
@@ -6716,7 +6716,7 @@
         <p:spPr>
           <a:xfrm>
             <a:off x="685800" y="516960"/>
-            <a:ext cx="5752440" cy="1017720"/>
+            <a:ext cx="5752080" cy="1017360"/>
           </a:xfrm>
           <a:prstGeom prst="rect">
             <a:avLst/>
@@ -6768,7 +6768,7 @@
         <p:spPr>
           <a:xfrm>
             <a:off x="481320" y="496800"/>
-            <a:ext cx="151560" cy="1017720"/>
+            <a:ext cx="151200" cy="1017360"/>
           </a:xfrm>
           <a:prstGeom prst="rect">
             <a:avLst/>
@@ -6829,8 +6829,8 @@
         </p:blipFill>
         <p:spPr>
           <a:xfrm flipH="1">
-            <a:off x="720" y="5207760"/>
-            <a:ext cx="12191400" cy="1649520"/>
+            <a:off x="1080" y="5207760"/>
+            <a:ext cx="12191040" cy="1649160"/>
           </a:xfrm>
           <a:prstGeom prst="rect">
             <a:avLst/>
@@ -6849,7 +6849,7 @@
         <p:spPr>
           <a:xfrm>
             <a:off x="457200" y="2057400"/>
-            <a:ext cx="4699800" cy="1918440"/>
+            <a:ext cx="4699440" cy="1918440"/>
           </a:xfrm>
           <a:prstGeom prst="rect">
             <a:avLst/>
@@ -6943,7 +6943,7 @@
         <p:spPr>
           <a:xfrm>
             <a:off x="685800" y="516960"/>
-            <a:ext cx="7041240" cy="1017720"/>
+            <a:ext cx="7040880" cy="1017360"/>
           </a:xfrm>
           <a:prstGeom prst="rect">
             <a:avLst/>
@@ -6995,7 +6995,7 @@
         <p:spPr>
           <a:xfrm>
             <a:off x="481320" y="496800"/>
-            <a:ext cx="151560" cy="1017720"/>
+            <a:ext cx="151200" cy="1017360"/>
           </a:xfrm>
           <a:prstGeom prst="rect">
             <a:avLst/>
@@ -7027,7 +7027,7 @@
         <p:spPr>
           <a:xfrm>
             <a:off x="5463720" y="1371600"/>
-            <a:ext cx="6423120" cy="4949280"/>
+            <a:ext cx="6422760" cy="4948920"/>
           </a:xfrm>
           <a:prstGeom prst="rect">
             <a:avLst/>
@@ -7079,8 +7079,8 @@
         </p:blipFill>
         <p:spPr>
           <a:xfrm flipH="1">
-            <a:off x="720" y="5207760"/>
-            <a:ext cx="12191400" cy="1649520"/>
+            <a:off x="1080" y="5207760"/>
+            <a:ext cx="12191040" cy="1649160"/>
           </a:xfrm>
           <a:prstGeom prst="rect">
             <a:avLst/>
@@ -7099,7 +7099,7 @@
         <p:spPr>
           <a:xfrm>
             <a:off x="786240" y="1143000"/>
-            <a:ext cx="10872000" cy="1345680"/>
+            <a:ext cx="10871640" cy="1345680"/>
           </a:xfrm>
           <a:prstGeom prst="rect">
             <a:avLst/>
@@ -7193,7 +7193,7 @@
         <p:spPr>
           <a:xfrm>
             <a:off x="685800" y="516960"/>
-            <a:ext cx="7041240" cy="1017720"/>
+            <a:ext cx="7040880" cy="1017360"/>
           </a:xfrm>
           <a:prstGeom prst="rect">
             <a:avLst/>
@@ -7248,7 +7248,7 @@
         <p:spPr>
           <a:xfrm>
             <a:off x="481320" y="496800"/>
-            <a:ext cx="151560" cy="1017720"/>
+            <a:ext cx="151200" cy="1017360"/>
           </a:xfrm>
           <a:prstGeom prst="rect">
             <a:avLst/>
@@ -7280,7 +7280,7 @@
         <p:spPr>
           <a:xfrm>
             <a:off x="352440" y="2743200"/>
-            <a:ext cx="3762000" cy="3657240"/>
+            <a:ext cx="3761640" cy="3656880"/>
           </a:xfrm>
           <a:prstGeom prst="rect">
             <a:avLst/>
@@ -7303,7 +7303,7 @@
         <p:spPr>
           <a:xfrm>
             <a:off x="4343400" y="2743200"/>
-            <a:ext cx="3428640" cy="3657240"/>
+            <a:ext cx="3428280" cy="3656880"/>
           </a:xfrm>
           <a:prstGeom prst="rect">
             <a:avLst/>
@@ -7325,8 +7325,8 @@
         </p:blipFill>
         <p:spPr>
           <a:xfrm>
-            <a:off x="8229600" y="2743200"/>
-            <a:ext cx="3515040" cy="3657240"/>
+            <a:off x="8001000" y="2743200"/>
+            <a:ext cx="4098960" cy="3657600"/>
           </a:xfrm>
           <a:prstGeom prst="rect">
             <a:avLst/>
@@ -7378,8 +7378,8 @@
         </p:blipFill>
         <p:spPr>
           <a:xfrm flipH="1">
-            <a:off x="720" y="5207760"/>
-            <a:ext cx="12191400" cy="1649520"/>
+            <a:off x="1080" y="5207760"/>
+            <a:ext cx="12191040" cy="1649160"/>
           </a:xfrm>
           <a:prstGeom prst="rect">
             <a:avLst/>
@@ -7398,7 +7398,7 @@
         <p:spPr>
           <a:xfrm>
             <a:off x="685800" y="516960"/>
-            <a:ext cx="7041240" cy="1017720"/>
+            <a:ext cx="7040880" cy="1017360"/>
           </a:xfrm>
           <a:prstGeom prst="rect">
             <a:avLst/>
@@ -7450,7 +7450,7 @@
         <p:spPr>
           <a:xfrm>
             <a:off x="481320" y="496800"/>
-            <a:ext cx="151560" cy="1017720"/>
+            <a:ext cx="151200" cy="1017360"/>
           </a:xfrm>
           <a:prstGeom prst="rect">
             <a:avLst/>
@@ -7478,7 +7478,7 @@
         <p:spPr>
           <a:xfrm>
             <a:off x="228600" y="2514600"/>
-            <a:ext cx="6887880" cy="3039840"/>
+            <a:ext cx="6887520" cy="1828800"/>
           </a:xfrm>
           <a:prstGeom prst="rect">
             <a:avLst/>
@@ -7505,63 +7505,6 @@
               </a:lnSpc>
               <a:buNone/>
             </a:pPr>
-            <a:r>
-              <a:rPr b="0" lang="en-US" sz="2400" spc="-1" strike="noStrike">
-                <a:latin typeface="Arial"/>
-              </a:rPr>
-              <a:t>- Desarrollo incremental. </a:t>
-            </a:r>
-            <a:endParaRPr b="0" lang="en-US" sz="2400" spc="-1" strike="noStrike">
-              <a:latin typeface="Arial"/>
-            </a:endParaRPr>
-          </a:p>
-          <a:p>
-            <a:pPr>
-              <a:lnSpc>
-                <a:spcPct val="100000"/>
-              </a:lnSpc>
-              <a:buNone/>
-            </a:pPr>
-            <a:r>
-              <a:rPr b="0" lang="en-US" sz="2400" spc="-1" strike="noStrike">
-                <a:latin typeface="Arial"/>
-              </a:rPr>
-              <a:t>- Separación en capas.</a:t>
-            </a:r>
-            <a:endParaRPr b="0" lang="en-US" sz="2400" spc="-1" strike="noStrike">
-              <a:latin typeface="Arial"/>
-            </a:endParaRPr>
-          </a:p>
-          <a:p>
-            <a:pPr>
-              <a:lnSpc>
-                <a:spcPct val="100000"/>
-              </a:lnSpc>
-              <a:buNone/>
-            </a:pPr>
-            <a:r>
-              <a:rPr b="0" lang="en-US" sz="2400" spc="-1" strike="noStrike">
-                <a:latin typeface="Arial"/>
-              </a:rPr>
-              <a:t>- Modelo Entidad-Relación inicial.</a:t>
-            </a:r>
-            <a:endParaRPr b="0" lang="en-US" sz="2400" spc="-1" strike="noStrike">
-              <a:latin typeface="Arial"/>
-            </a:endParaRPr>
-          </a:p>
-          <a:p>
-            <a:pPr>
-              <a:lnSpc>
-                <a:spcPct val="100000"/>
-              </a:lnSpc>
-              <a:buNone/>
-            </a:pPr>
-            <a:r>
-              <a:rPr b="0" lang="en-US" sz="2400" spc="-1" strike="noStrike">
-                <a:latin typeface="Arial"/>
-              </a:rPr>
-              <a:t>- Implementación progresiva de funcionalidades.</a:t>
-            </a:r>
             <a:endParaRPr b="0" lang="en-US" sz="2400" spc="-1" strike="noStrike">
               <a:latin typeface="Arial"/>
             </a:endParaRPr>
@@ -7592,7 +7535,7 @@
         <p:spPr>
           <a:xfrm>
             <a:off x="7086600" y="1144080"/>
-            <a:ext cx="4856400" cy="5027760"/>
+            <a:ext cx="4856040" cy="5027400"/>
           </a:xfrm>
           <a:prstGeom prst="rect">
             <a:avLst/>
@@ -7602,6 +7545,163 @@
           </a:ln>
         </p:spPr>
       </p:pic>
+      <p:sp>
+        <p:nvSpPr>
+          <p:cNvPr id="116" name="TextBox 4"/>
+          <p:cNvSpPr/>
+          <p:nvPr/>
+        </p:nvSpPr>
+        <p:spPr>
+          <a:xfrm>
+            <a:off x="228600" y="2198160"/>
+            <a:ext cx="8001000" cy="2602440"/>
+          </a:xfrm>
+          <a:prstGeom prst="rect">
+            <a:avLst/>
+          </a:prstGeom>
+          <a:noFill/>
+          <a:ln w="0">
+            <a:noFill/>
+          </a:ln>
+        </p:spPr>
+        <p:style>
+          <a:lnRef idx="0"/>
+          <a:fillRef idx="0"/>
+          <a:effectRef idx="0"/>
+          <a:fontRef idx="minor"/>
+        </p:style>
+        <p:txBody>
+          <a:bodyPr numCol="1" spcCol="0" lIns="90000" rIns="90000" tIns="45000" bIns="45000" anchor="t">
+            <a:spAutoFit/>
+          </a:bodyPr>
+          <a:p>
+            <a:pPr>
+              <a:lnSpc>
+                <a:spcPct val="125000"/>
+              </a:lnSpc>
+              <a:buNone/>
+            </a:pPr>
+            <a:r>
+              <a:rPr b="0" lang="es-ES" sz="2200" spc="-1" strike="noStrike">
+                <a:solidFill>
+                  <a:srgbClr val="134c8f"/>
+                </a:solidFill>
+                <a:latin typeface="Raleway"/>
+                <a:ea typeface="DejaVu Sans"/>
+              </a:rPr>
+              <a:t>- Desarrollo incremental.</a:t>
+            </a:r>
+            <a:endParaRPr b="0" lang="en-US" sz="2200" spc="-1" strike="noStrike">
+              <a:latin typeface="Arial"/>
+            </a:endParaRPr>
+          </a:p>
+          <a:p>
+            <a:pPr>
+              <a:lnSpc>
+                <a:spcPct val="125000"/>
+              </a:lnSpc>
+              <a:buNone/>
+            </a:pPr>
+            <a:r>
+              <a:rPr b="0" lang="es-ES" sz="2200" spc="-1" strike="noStrike">
+                <a:solidFill>
+                  <a:srgbClr val="134c8f"/>
+                </a:solidFill>
+                <a:latin typeface="Raleway"/>
+                <a:ea typeface="DejaVu Sans"/>
+              </a:rPr>
+              <a:t>- Separación en capas.</a:t>
+            </a:r>
+            <a:endParaRPr b="0" lang="en-US" sz="2200" spc="-1" strike="noStrike">
+              <a:latin typeface="Arial"/>
+            </a:endParaRPr>
+          </a:p>
+          <a:p>
+            <a:pPr>
+              <a:lnSpc>
+                <a:spcPct val="125000"/>
+              </a:lnSpc>
+              <a:buNone/>
+            </a:pPr>
+            <a:r>
+              <a:rPr b="0" lang="es-ES" sz="2200" spc="-1" strike="noStrike">
+                <a:solidFill>
+                  <a:srgbClr val="134c8f"/>
+                </a:solidFill>
+                <a:latin typeface="Raleway"/>
+                <a:ea typeface="DejaVu Sans"/>
+              </a:rPr>
+              <a:t>- Modelo Entidad-Relación inicial.</a:t>
+            </a:r>
+            <a:endParaRPr b="0" lang="en-US" sz="2200" spc="-1" strike="noStrike">
+              <a:latin typeface="Arial"/>
+            </a:endParaRPr>
+          </a:p>
+          <a:p>
+            <a:pPr>
+              <a:lnSpc>
+                <a:spcPct val="125000"/>
+              </a:lnSpc>
+              <a:buNone/>
+            </a:pPr>
+            <a:r>
+              <a:rPr b="0" lang="es-ES" sz="2200" spc="-1" strike="noStrike">
+                <a:solidFill>
+                  <a:srgbClr val="134c8f"/>
+                </a:solidFill>
+                <a:latin typeface="Raleway"/>
+                <a:ea typeface="DejaVu Sans"/>
+              </a:rPr>
+              <a:t>- Implementación progresiva de funcionalidades.</a:t>
+            </a:r>
+            <a:endParaRPr b="0" lang="en-US" sz="2200" spc="-1" strike="noStrike">
+              <a:latin typeface="Arial"/>
+            </a:endParaRPr>
+          </a:p>
+          <a:p>
+            <a:pPr>
+              <a:lnSpc>
+                <a:spcPct val="125000"/>
+              </a:lnSpc>
+              <a:buNone/>
+            </a:pPr>
+            <a:r>
+              <a:rPr b="0" lang="es-ES" sz="2200" spc="-1" strike="noStrike">
+                <a:solidFill>
+                  <a:srgbClr val="134c8f"/>
+                </a:solidFill>
+                <a:latin typeface="Raleway"/>
+                <a:ea typeface="DejaVu Sans"/>
+              </a:rPr>
+              <a:t>- Registro de transacciones</a:t>
+            </a:r>
+            <a:endParaRPr b="0" lang="en-US" sz="2200" spc="-1" strike="noStrike">
+              <a:latin typeface="Arial"/>
+            </a:endParaRPr>
+          </a:p>
+          <a:p>
+            <a:pPr>
+              <a:lnSpc>
+                <a:spcPct val="125000"/>
+              </a:lnSpc>
+              <a:buNone/>
+            </a:pPr>
+            <a:r>
+              <a:rPr b="0" lang="es-ES" sz="2200" spc="-1" strike="noStrike">
+                <a:solidFill>
+                  <a:srgbClr val="134c8f"/>
+                </a:solidFill>
+                <a:latin typeface="Raleway"/>
+                <a:ea typeface="DejaVu Sans"/>
+              </a:rPr>
+              <a:t>- Clasificación por categorías</a:t>
+            </a:r>
+            <a:endParaRPr b="0" lang="en-US" sz="2200" spc="-1" strike="noStrike">
+              <a:latin typeface="Arial"/>
+            </a:endParaRPr>
+          </a:p>
+        </p:txBody>
+      </p:sp>
     </p:spTree>
   </p:cSld>
   <mc:AlternateContent>
@@ -7634,7 +7734,7 @@
       </p:grpSpPr>
       <p:pic>
         <p:nvPicPr>
-          <p:cNvPr id="116" name="Imagen 4" descr=""/>
+          <p:cNvPr id="117" name="Imagen 4" descr=""/>
           <p:cNvPicPr/>
           <p:nvPr/>
         </p:nvPicPr>
@@ -7644,8 +7744,8 @@
         </p:blipFill>
         <p:spPr>
           <a:xfrm flipH="1">
-            <a:off x="720" y="5207760"/>
-            <a:ext cx="12191400" cy="1649520"/>
+            <a:off x="1080" y="5207760"/>
+            <a:ext cx="12191040" cy="1649160"/>
           </a:xfrm>
           <a:prstGeom prst="rect">
             <a:avLst/>
@@ -7657,14 +7757,14 @@
       </p:pic>
       <p:sp>
         <p:nvSpPr>
-          <p:cNvPr id="117" name="TextBox 12"/>
+          <p:cNvPr id="118" name="TextBox 12"/>
           <p:cNvSpPr/>
           <p:nvPr/>
         </p:nvSpPr>
         <p:spPr>
           <a:xfrm>
             <a:off x="685800" y="1967760"/>
-            <a:ext cx="6171840" cy="3290040"/>
+            <a:ext cx="6171480" cy="3290040"/>
           </a:xfrm>
           <a:prstGeom prst="rect">
             <a:avLst/>
@@ -7825,14 +7925,14 @@
       </p:sp>
       <p:sp>
         <p:nvSpPr>
-          <p:cNvPr id="118" name="Title 22"/>
+          <p:cNvPr id="119" name="Title 22"/>
           <p:cNvSpPr/>
           <p:nvPr/>
         </p:nvSpPr>
         <p:spPr>
           <a:xfrm>
             <a:off x="685800" y="516960"/>
-            <a:ext cx="7041240" cy="1017720"/>
+            <a:ext cx="7040880" cy="1017360"/>
           </a:xfrm>
           <a:prstGeom prst="rect">
             <a:avLst/>
@@ -7880,14 +7980,14 @@
       </p:sp>
       <p:sp>
         <p:nvSpPr>
-          <p:cNvPr id="119" name="Rectángulo 7"/>
+          <p:cNvPr id="120" name="Rectángulo 7"/>
           <p:cNvSpPr/>
           <p:nvPr/>
         </p:nvSpPr>
         <p:spPr>
           <a:xfrm>
             <a:off x="481320" y="496800"/>
-            <a:ext cx="151560" cy="1017720"/>
+            <a:ext cx="151200" cy="1017360"/>
           </a:xfrm>
           <a:prstGeom prst="rect">
             <a:avLst/>
@@ -7908,7 +8008,7 @@
       </p:sp>
       <p:pic>
         <p:nvPicPr>
-          <p:cNvPr id="120" name="" descr=""/>
+          <p:cNvPr id="121" name="" descr=""/>
           <p:cNvPicPr/>
           <p:nvPr/>
         </p:nvPicPr>
@@ -7919,7 +8019,7 @@
         <p:spPr>
           <a:xfrm>
             <a:off x="7789680" y="516960"/>
-            <a:ext cx="2954160" cy="5865480"/>
+            <a:ext cx="2953800" cy="5865120"/>
           </a:xfrm>
           <a:prstGeom prst="rect">
             <a:avLst/>
@@ -7961,7 +8061,7 @@
       </p:grpSpPr>
       <p:pic>
         <p:nvPicPr>
-          <p:cNvPr id="121" name="Imagen 5" descr=""/>
+          <p:cNvPr id="122" name="Imagen 5" descr=""/>
           <p:cNvPicPr/>
           <p:nvPr/>
         </p:nvPicPr>
@@ -7971,8 +8071,8 @@
         </p:blipFill>
         <p:spPr>
           <a:xfrm flipH="1">
-            <a:off x="720" y="5207760"/>
-            <a:ext cx="12191400" cy="1649520"/>
+            <a:off x="1080" y="5207760"/>
+            <a:ext cx="12191040" cy="1649160"/>
           </a:xfrm>
           <a:prstGeom prst="rect">
             <a:avLst/>
@@ -7984,14 +8084,14 @@
       </p:pic>
       <p:sp>
         <p:nvSpPr>
-          <p:cNvPr id="122" name="TextBox 2"/>
+          <p:cNvPr id="123" name="TextBox 2"/>
           <p:cNvSpPr/>
           <p:nvPr/>
         </p:nvSpPr>
         <p:spPr>
           <a:xfrm>
             <a:off x="685800" y="1460520"/>
-            <a:ext cx="5257440" cy="3747240"/>
+            <a:ext cx="5257080" cy="3747240"/>
           </a:xfrm>
           <a:prstGeom prst="rect">
             <a:avLst/>
@@ -8131,14 +8231,14 @@
       </p:sp>
       <p:sp>
         <p:nvSpPr>
-          <p:cNvPr id="123" name="Title 2"/>
+          <p:cNvPr id="124" name="Title 2"/>
           <p:cNvSpPr/>
           <p:nvPr/>
         </p:nvSpPr>
         <p:spPr>
           <a:xfrm>
             <a:off x="685800" y="516960"/>
-            <a:ext cx="7041240" cy="1017720"/>
+            <a:ext cx="7040880" cy="1017360"/>
           </a:xfrm>
           <a:prstGeom prst="rect">
             <a:avLst/>
@@ -8186,14 +8286,14 @@
       </p:sp>
       <p:sp>
         <p:nvSpPr>
-          <p:cNvPr id="124" name="Rectángulo 2"/>
+          <p:cNvPr id="125" name="Rectángulo 2"/>
           <p:cNvSpPr/>
           <p:nvPr/>
         </p:nvSpPr>
         <p:spPr>
           <a:xfrm>
             <a:off x="481320" y="496800"/>
-            <a:ext cx="151560" cy="1017720"/>
+            <a:ext cx="151200" cy="1017360"/>
           </a:xfrm>
           <a:prstGeom prst="rect">
             <a:avLst/>
@@ -8214,7 +8314,7 @@
       </p:sp>
       <p:pic>
         <p:nvPicPr>
-          <p:cNvPr id="125" name="" descr=""/>
+          <p:cNvPr id="126" name="" descr=""/>
           <p:cNvPicPr/>
           <p:nvPr/>
         </p:nvPicPr>
@@ -8225,7 +8325,7 @@
         <p:spPr>
           <a:xfrm>
             <a:off x="6383160" y="1143000"/>
-            <a:ext cx="5503680" cy="5346000"/>
+            <a:ext cx="5503320" cy="5345640"/>
           </a:xfrm>
           <a:prstGeom prst="rect">
             <a:avLst/>
@@ -8267,7 +8367,7 @@
       </p:grpSpPr>
       <p:pic>
         <p:nvPicPr>
-          <p:cNvPr id="126" name="Imagen 6" descr=""/>
+          <p:cNvPr id="127" name="Imagen 6" descr=""/>
           <p:cNvPicPr/>
           <p:nvPr/>
         </p:nvPicPr>
@@ -8277,8 +8377,8 @@
         </p:blipFill>
         <p:spPr>
           <a:xfrm flipH="1">
-            <a:off x="720" y="5207760"/>
-            <a:ext cx="12191400" cy="1649520"/>
+            <a:off x="1080" y="5207760"/>
+            <a:ext cx="12191040" cy="1649160"/>
           </a:xfrm>
           <a:prstGeom prst="rect">
             <a:avLst/>
@@ -8290,14 +8390,14 @@
       </p:pic>
       <p:sp>
         <p:nvSpPr>
-          <p:cNvPr id="127" name="TextBox 3"/>
+          <p:cNvPr id="128" name="TextBox 3"/>
           <p:cNvSpPr/>
           <p:nvPr/>
         </p:nvSpPr>
         <p:spPr>
           <a:xfrm>
             <a:off x="1143000" y="2514600"/>
-            <a:ext cx="5257440" cy="2832840"/>
+            <a:ext cx="5257080" cy="2832840"/>
           </a:xfrm>
           <a:prstGeom prst="rect">
             <a:avLst/>
@@ -8437,14 +8537,14 @@
       </p:sp>
       <p:sp>
         <p:nvSpPr>
-          <p:cNvPr id="128" name="Title 3"/>
+          <p:cNvPr id="129" name="Title 3"/>
           <p:cNvSpPr/>
           <p:nvPr/>
         </p:nvSpPr>
         <p:spPr>
           <a:xfrm>
             <a:off x="685800" y="516960"/>
-            <a:ext cx="7041240" cy="1017720"/>
+            <a:ext cx="7040880" cy="1017360"/>
           </a:xfrm>
           <a:prstGeom prst="rect">
             <a:avLst/>
@@ -8492,14 +8592,14 @@
       </p:sp>
       <p:sp>
         <p:nvSpPr>
-          <p:cNvPr id="129" name="Rectángulo 3"/>
+          <p:cNvPr id="130" name="Rectángulo 3"/>
           <p:cNvSpPr/>
           <p:nvPr/>
         </p:nvSpPr>
         <p:spPr>
           <a:xfrm>
             <a:off x="481320" y="496800"/>
-            <a:ext cx="151560" cy="1017720"/>
+            <a:ext cx="151200" cy="1017360"/>
           </a:xfrm>
           <a:prstGeom prst="rect">
             <a:avLst/>
@@ -8520,7 +8620,7 @@
       </p:sp>
       <p:pic>
         <p:nvPicPr>
-          <p:cNvPr id="130" name="" descr=""/>
+          <p:cNvPr id="131" name="" descr=""/>
           <p:cNvPicPr/>
           <p:nvPr/>
         </p:nvPicPr>
@@ -8531,7 +8631,7 @@
         <p:spPr>
           <a:xfrm>
             <a:off x="914400" y="1220040"/>
-            <a:ext cx="8513280" cy="1294200"/>
+            <a:ext cx="8512920" cy="1293840"/>
           </a:xfrm>
           <a:prstGeom prst="rect">
             <a:avLst/>
